--- a/字节跳动_BA画像_v4.0.pptx
+++ b/字节跳动_BA画像_v4.0.pptx
@@ -3114,9 +3114,7 @@
           <a:prstGeom prst="rect">
             <a:avLst/>
           </a:prstGeom>
-          <a:solidFill>
-            <a:srgbClr val="F0F0F0"/>
-          </a:solidFill>
+          <a:noFill/>
           <a:ln>
             <a:noFill/>
           </a:ln>
@@ -3136,13 +3134,10 @@
           </a:fontRef>
         </p:style>
         <p:txBody>
-          <a:bodyPr rtlCol="0" anchor="ctr" wrap="square" lIns="1828754" rIns="1828754"/>
+          <a:bodyPr rtlCol="0" anchor="ctr" wrap="square" lIns="609584" rIns="609584"/>
           <a:lstStyle/>
           <a:p>
             <a:pPr algn="l">
-              <a:spcBef>
-                <a:spcPts val="400"/>
-              </a:spcBef>
               <a:defRPr sz="2200" b="1">
                 <a:solidFill>
                   <a:srgbClr val="C7000B"/>
@@ -3164,8 +3159,8 @@
         </p:nvSpPr>
         <p:spPr>
           <a:xfrm>
-            <a:off x="1828754" y="658368"/>
-            <a:ext cx="8534186" cy="274320"/>
+            <a:off x="609584" y="658368"/>
+            <a:ext cx="10972525" cy="274320"/>
           </a:xfrm>
           <a:prstGeom prst="rect">
             <a:avLst/>
@@ -3200,8 +3195,8 @@
         </p:nvSpPr>
         <p:spPr>
           <a:xfrm>
-            <a:off x="1828754" y="1005840"/>
-            <a:ext cx="8534186" cy="274320"/>
+            <a:off x="609584" y="1005840"/>
+            <a:ext cx="10972525" cy="274320"/>
           </a:xfrm>
           <a:prstGeom prst="rect">
             <a:avLst/>
@@ -3240,8 +3235,8 @@
           <p:nvPr/>
         </p:nvGraphicFramePr>
         <p:xfrm>
-          <a:off x="1828754" y="1280160"/>
-          <a:ext cx="4267092" cy="1170432"/>
+          <a:off x="609584" y="1280160"/>
+          <a:ext cx="5486261" cy="1170432"/>
         </p:xfrm>
         <a:graphic>
           <a:graphicData uri="http://schemas.openxmlformats.org/drawingml/2006/table">
@@ -3250,8 +3245,8 @@
                 <a:tableStyleId>{5C22544A-7EE6-4342-B048-85BDC9FD1C3A}</a:tableStyleId>
               </a:tblPr>
               <a:tblGrid>
-                <a:gridCol w="1280127"/>
-                <a:gridCol w="2986965"/>
+                <a:gridCol w="1645878"/>
+                <a:gridCol w="3840383"/>
               </a:tblGrid>
               <a:tr h="292608">
                 <a:tc>
@@ -3312,7 +3307,7 @@
                       <a:pPr>
                         <a:defRPr sz="1000">
                           <a:solidFill>
-                            <a:srgbClr val="000000"/>
+                            <a:srgbClr val="FFFFFF"/>
                           </a:solidFill>
                           <a:latin typeface="PingFang SC"/>
                         </a:defRPr>
@@ -3336,7 +3331,7 @@
                       <a:pPr>
                         <a:defRPr sz="1000">
                           <a:solidFill>
-                            <a:srgbClr val="000000"/>
+                            <a:srgbClr val="FFFFFF"/>
                           </a:solidFill>
                           <a:latin typeface="PingFang SC"/>
                         </a:defRPr>
@@ -3362,7 +3357,7 @@
                       <a:pPr>
                         <a:defRPr sz="1000">
                           <a:solidFill>
-                            <a:srgbClr val="000000"/>
+                            <a:srgbClr val="FFFFFF"/>
                           </a:solidFill>
                           <a:latin typeface="PingFang SC"/>
                         </a:defRPr>
@@ -3382,7 +3377,7 @@
                       <a:pPr>
                         <a:defRPr sz="1000">
                           <a:solidFill>
-                            <a:srgbClr val="000000"/>
+                            <a:srgbClr val="FFFFFF"/>
                           </a:solidFill>
                           <a:latin typeface="PingFang SC"/>
                         </a:defRPr>
@@ -3404,7 +3399,7 @@
                       <a:pPr>
                         <a:defRPr sz="1000">
                           <a:solidFill>
-                            <a:srgbClr val="000000"/>
+                            <a:srgbClr val="FFFFFF"/>
                           </a:solidFill>
                           <a:latin typeface="PingFang SC"/>
                         </a:defRPr>
@@ -3428,7 +3423,7 @@
                       <a:pPr>
                         <a:defRPr sz="1000">
                           <a:solidFill>
-                            <a:srgbClr val="000000"/>
+                            <a:srgbClr val="FFFFFF"/>
                           </a:solidFill>
                           <a:latin typeface="PingFang SC"/>
                         </a:defRPr>
@@ -3457,8 +3452,8 @@
         </p:nvSpPr>
         <p:spPr>
           <a:xfrm>
-            <a:off x="1899872" y="2286000"/>
-            <a:ext cx="1564600" cy="731520"/>
+            <a:off x="701022" y="2286000"/>
+            <a:ext cx="2011629" cy="731520"/>
           </a:xfrm>
           <a:prstGeom prst="roundRect">
             <a:avLst/>
@@ -3502,8 +3497,8 @@
         </p:nvSpPr>
         <p:spPr>
           <a:xfrm>
-            <a:off x="1945592" y="2331720"/>
-            <a:ext cx="1473160" cy="320040"/>
+            <a:off x="746742" y="2331720"/>
+            <a:ext cx="1920189" cy="320040"/>
           </a:xfrm>
           <a:prstGeom prst="rect">
             <a:avLst/>
@@ -3541,8 +3536,8 @@
         </p:nvSpPr>
         <p:spPr>
           <a:xfrm>
-            <a:off x="1945592" y="2670048"/>
-            <a:ext cx="1473160" cy="228600"/>
+            <a:off x="746742" y="2670048"/>
+            <a:ext cx="1920189" cy="228600"/>
           </a:xfrm>
           <a:prstGeom prst="rect">
             <a:avLst/>
@@ -3580,8 +3575,8 @@
         </p:nvSpPr>
         <p:spPr>
           <a:xfrm>
-            <a:off x="3606709" y="2286000"/>
-            <a:ext cx="1564600" cy="731520"/>
+            <a:off x="2895527" y="2286000"/>
+            <a:ext cx="2011629" cy="731520"/>
           </a:xfrm>
           <a:prstGeom prst="roundRect">
             <a:avLst/>
@@ -3625,8 +3620,8 @@
         </p:nvSpPr>
         <p:spPr>
           <a:xfrm>
-            <a:off x="3652429" y="2331720"/>
-            <a:ext cx="1473160" cy="320040"/>
+            <a:off x="2941247" y="2331720"/>
+            <a:ext cx="1920189" cy="320040"/>
           </a:xfrm>
           <a:prstGeom prst="rect">
             <a:avLst/>
@@ -3664,8 +3659,8 @@
         </p:nvSpPr>
         <p:spPr>
           <a:xfrm>
-            <a:off x="3652429" y="2670048"/>
-            <a:ext cx="1473160" cy="228600"/>
+            <a:off x="2941247" y="2670048"/>
+            <a:ext cx="1920189" cy="228600"/>
           </a:xfrm>
           <a:prstGeom prst="rect">
             <a:avLst/>
@@ -3703,8 +3698,8 @@
         </p:nvSpPr>
         <p:spPr>
           <a:xfrm>
-            <a:off x="5313547" y="2286000"/>
-            <a:ext cx="1564600" cy="731520"/>
+            <a:off x="5090032" y="2286000"/>
+            <a:ext cx="2011629" cy="731520"/>
           </a:xfrm>
           <a:prstGeom prst="roundRect">
             <a:avLst/>
@@ -3748,8 +3743,8 @@
         </p:nvSpPr>
         <p:spPr>
           <a:xfrm>
-            <a:off x="5359267" y="2331720"/>
-            <a:ext cx="1473160" cy="320040"/>
+            <a:off x="5135752" y="2331720"/>
+            <a:ext cx="1920189" cy="320040"/>
           </a:xfrm>
           <a:prstGeom prst="rect">
             <a:avLst/>
@@ -3787,8 +3782,8 @@
         </p:nvSpPr>
         <p:spPr>
           <a:xfrm>
-            <a:off x="5359267" y="2670048"/>
-            <a:ext cx="1473160" cy="228600"/>
+            <a:off x="5135752" y="2670048"/>
+            <a:ext cx="1920189" cy="228600"/>
           </a:xfrm>
           <a:prstGeom prst="rect">
             <a:avLst/>
@@ -3826,8 +3821,8 @@
         </p:nvSpPr>
         <p:spPr>
           <a:xfrm>
-            <a:off x="7020384" y="2286000"/>
-            <a:ext cx="1564600" cy="731520"/>
+            <a:off x="7284537" y="2286000"/>
+            <a:ext cx="2011629" cy="731520"/>
           </a:xfrm>
           <a:prstGeom prst="roundRect">
             <a:avLst/>
@@ -3871,8 +3866,8 @@
         </p:nvSpPr>
         <p:spPr>
           <a:xfrm>
-            <a:off x="7066104" y="2331720"/>
-            <a:ext cx="1473160" cy="320040"/>
+            <a:off x="7330257" y="2331720"/>
+            <a:ext cx="1920189" cy="320040"/>
           </a:xfrm>
           <a:prstGeom prst="rect">
             <a:avLst/>
@@ -3910,8 +3905,8 @@
         </p:nvSpPr>
         <p:spPr>
           <a:xfrm>
-            <a:off x="7066104" y="2670048"/>
-            <a:ext cx="1473160" cy="228600"/>
+            <a:off x="7330257" y="2670048"/>
+            <a:ext cx="1920189" cy="228600"/>
           </a:xfrm>
           <a:prstGeom prst="rect">
             <a:avLst/>
@@ -3949,8 +3944,8 @@
         </p:nvSpPr>
         <p:spPr>
           <a:xfrm>
-            <a:off x="8727221" y="2286000"/>
-            <a:ext cx="1564600" cy="731520"/>
+            <a:off x="9479043" y="2286000"/>
+            <a:ext cx="2011629" cy="731520"/>
           </a:xfrm>
           <a:prstGeom prst="roundRect">
             <a:avLst/>
@@ -3994,8 +3989,8 @@
         </p:nvSpPr>
         <p:spPr>
           <a:xfrm>
-            <a:off x="8772941" y="2331720"/>
-            <a:ext cx="1473160" cy="320040"/>
+            <a:off x="9524763" y="2331720"/>
+            <a:ext cx="1920189" cy="320040"/>
           </a:xfrm>
           <a:prstGeom prst="rect">
             <a:avLst/>
@@ -4033,8 +4028,8 @@
         </p:nvSpPr>
         <p:spPr>
           <a:xfrm>
-            <a:off x="8772941" y="2670048"/>
-            <a:ext cx="1473160" cy="228600"/>
+            <a:off x="9524763" y="2670048"/>
+            <a:ext cx="1920189" cy="228600"/>
           </a:xfrm>
           <a:prstGeom prst="rect">
             <a:avLst/>
@@ -4072,8 +4067,8 @@
         </p:nvSpPr>
         <p:spPr>
           <a:xfrm>
-            <a:off x="1828754" y="3246120"/>
-            <a:ext cx="8534186" cy="274320"/>
+            <a:off x="609584" y="3246120"/>
+            <a:ext cx="10972525" cy="274320"/>
           </a:xfrm>
           <a:prstGeom prst="rect">
             <a:avLst/>
@@ -4112,8 +4107,8 @@
           <p:nvPr/>
         </p:nvGraphicFramePr>
         <p:xfrm>
-          <a:off x="1828754" y="3520440"/>
-          <a:ext cx="4267092" cy="1755648"/>
+          <a:off x="609584" y="3520440"/>
+          <a:ext cx="5486261" cy="1755648"/>
         </p:xfrm>
         <a:graphic>
           <a:graphicData uri="http://schemas.openxmlformats.org/drawingml/2006/table">
@@ -4122,8 +4117,8 @@
                 <a:tableStyleId>{5C22544A-7EE6-4342-B048-85BDC9FD1C3A}</a:tableStyleId>
               </a:tblPr>
               <a:tblGrid>
-                <a:gridCol w="1280127"/>
-                <a:gridCol w="2986965"/>
+                <a:gridCol w="1645878"/>
+                <a:gridCol w="3840383"/>
               </a:tblGrid>
               <a:tr h="292608">
                 <a:tc>
@@ -4184,7 +4179,7 @@
                       <a:pPr>
                         <a:defRPr sz="900">
                           <a:solidFill>
-                            <a:srgbClr val="000000"/>
+                            <a:srgbClr val="FFFFFF"/>
                           </a:solidFill>
                           <a:latin typeface="PingFang SC"/>
                         </a:defRPr>
@@ -4208,7 +4203,7 @@
                       <a:pPr>
                         <a:defRPr sz="900">
                           <a:solidFill>
-                            <a:srgbClr val="000000"/>
+                            <a:srgbClr val="FFFFFF"/>
                           </a:solidFill>
                           <a:latin typeface="PingFang SC"/>
                         </a:defRPr>
@@ -4234,7 +4229,7 @@
                       <a:pPr>
                         <a:defRPr sz="900">
                           <a:solidFill>
-                            <a:srgbClr val="000000"/>
+                            <a:srgbClr val="FFFFFF"/>
                           </a:solidFill>
                           <a:latin typeface="PingFang SC"/>
                         </a:defRPr>
@@ -4254,7 +4249,7 @@
                       <a:pPr>
                         <a:defRPr sz="900">
                           <a:solidFill>
-                            <a:srgbClr val="000000"/>
+                            <a:srgbClr val="FFFFFF"/>
                           </a:solidFill>
                           <a:latin typeface="PingFang SC"/>
                         </a:defRPr>
@@ -4276,7 +4271,7 @@
                       <a:pPr>
                         <a:defRPr sz="900">
                           <a:solidFill>
-                            <a:srgbClr val="000000"/>
+                            <a:srgbClr val="FFFFFF"/>
                           </a:solidFill>
                           <a:latin typeface="PingFang SC"/>
                         </a:defRPr>
@@ -4300,7 +4295,7 @@
                       <a:pPr>
                         <a:defRPr sz="900">
                           <a:solidFill>
-                            <a:srgbClr val="000000"/>
+                            <a:srgbClr val="FFFFFF"/>
                           </a:solidFill>
                           <a:latin typeface="PingFang SC"/>
                         </a:defRPr>
@@ -4326,7 +4321,7 @@
                       <a:pPr>
                         <a:defRPr sz="900">
                           <a:solidFill>
-                            <a:srgbClr val="000000"/>
+                            <a:srgbClr val="FFFFFF"/>
                           </a:solidFill>
                           <a:latin typeface="PingFang SC"/>
                         </a:defRPr>
@@ -4346,7 +4341,7 @@
                       <a:pPr>
                         <a:defRPr sz="900">
                           <a:solidFill>
-                            <a:srgbClr val="000000"/>
+                            <a:srgbClr val="FFFFFF"/>
                           </a:solidFill>
                           <a:latin typeface="PingFang SC"/>
                         </a:defRPr>
@@ -4368,7 +4363,7 @@
                       <a:pPr>
                         <a:defRPr sz="900">
                           <a:solidFill>
-                            <a:srgbClr val="000000"/>
+                            <a:srgbClr val="FFFFFF"/>
                           </a:solidFill>
                           <a:latin typeface="PingFang SC"/>
                         </a:defRPr>
@@ -4392,7 +4387,7 @@
                       <a:pPr>
                         <a:defRPr sz="900">
                           <a:solidFill>
-                            <a:srgbClr val="000000"/>
+                            <a:srgbClr val="FFFFFF"/>
                           </a:solidFill>
                           <a:latin typeface="PingFang SC"/>
                         </a:defRPr>
@@ -4421,8 +4416,8 @@
         </p:nvSpPr>
         <p:spPr>
           <a:xfrm>
-            <a:off x="6451438" y="3246120"/>
-            <a:ext cx="8534186" cy="274320"/>
+            <a:off x="6553036" y="3246120"/>
+            <a:ext cx="10972525" cy="274320"/>
           </a:xfrm>
           <a:prstGeom prst="rect">
             <a:avLst/>
@@ -4460,8 +4455,8 @@
         </p:nvSpPr>
         <p:spPr>
           <a:xfrm>
-            <a:off x="6451438" y="3520440"/>
-            <a:ext cx="3911502" cy="182880"/>
+            <a:off x="6553036" y="3520440"/>
+            <a:ext cx="5029074" cy="182880"/>
           </a:xfrm>
           <a:prstGeom prst="rect">
             <a:avLst/>
@@ -4500,8 +4495,8 @@
           <p:nvPr/>
         </p:nvGraphicFramePr>
         <p:xfrm>
-          <a:off x="6451438" y="3703320"/>
-          <a:ext cx="3911500" cy="877824"/>
+          <a:off x="6553036" y="3703320"/>
+          <a:ext cx="5029072" cy="877824"/>
         </p:xfrm>
         <a:graphic>
           <a:graphicData uri="http://schemas.openxmlformats.org/drawingml/2006/table">
@@ -4510,10 +4505,10 @@
                 <a:tableStyleId>{5C22544A-7EE6-4342-B048-85BDC9FD1C3A}</a:tableStyleId>
               </a:tblPr>
               <a:tblGrid>
-                <a:gridCol w="853418"/>
-                <a:gridCol w="995655"/>
-                <a:gridCol w="853418"/>
-                <a:gridCol w="1209009"/>
+                <a:gridCol w="1097252"/>
+                <a:gridCol w="1280127"/>
+                <a:gridCol w="1097252"/>
+                <a:gridCol w="1554441"/>
               </a:tblGrid>
               <a:tr h="292608">
                 <a:tc>
@@ -4622,7 +4617,7 @@
                       <a:pPr>
                         <a:defRPr sz="900">
                           <a:solidFill>
-                            <a:srgbClr val="000000"/>
+                            <a:srgbClr val="FFFFFF"/>
                           </a:solidFill>
                           <a:latin typeface="PingFang SC"/>
                         </a:defRPr>
@@ -4646,7 +4641,7 @@
                       <a:pPr>
                         <a:defRPr sz="900">
                           <a:solidFill>
-                            <a:srgbClr val="000000"/>
+                            <a:srgbClr val="FFFFFF"/>
                           </a:solidFill>
                           <a:latin typeface="PingFang SC"/>
                         </a:defRPr>
@@ -4670,7 +4665,7 @@
                       <a:pPr>
                         <a:defRPr sz="900">
                           <a:solidFill>
-                            <a:srgbClr val="000000"/>
+                            <a:srgbClr val="FFFFFF"/>
                           </a:solidFill>
                           <a:latin typeface="PingFang SC"/>
                         </a:defRPr>
@@ -4694,7 +4689,7 @@
                       <a:pPr>
                         <a:defRPr sz="900">
                           <a:solidFill>
-                            <a:srgbClr val="000000"/>
+                            <a:srgbClr val="FFFFFF"/>
                           </a:solidFill>
                           <a:latin typeface="PingFang SC"/>
                         </a:defRPr>
@@ -4720,7 +4715,7 @@
                       <a:pPr>
                         <a:defRPr sz="900">
                           <a:solidFill>
-                            <a:srgbClr val="000000"/>
+                            <a:srgbClr val="FFFFFF"/>
                           </a:solidFill>
                           <a:latin typeface="PingFang SC"/>
                         </a:defRPr>
@@ -4740,7 +4735,7 @@
                       <a:pPr>
                         <a:defRPr sz="900">
                           <a:solidFill>
-                            <a:srgbClr val="000000"/>
+                            <a:srgbClr val="FFFFFF"/>
                           </a:solidFill>
                           <a:latin typeface="PingFang SC"/>
                         </a:defRPr>
@@ -4760,7 +4755,7 @@
                       <a:pPr>
                         <a:defRPr sz="900">
                           <a:solidFill>
-                            <a:srgbClr val="000000"/>
+                            <a:srgbClr val="FFFFFF"/>
                           </a:solidFill>
                           <a:latin typeface="PingFang SC"/>
                         </a:defRPr>
@@ -4780,7 +4775,7 @@
                       <a:pPr>
                         <a:defRPr sz="900">
                           <a:solidFill>
-                            <a:srgbClr val="000000"/>
+                            <a:srgbClr val="FFFFFF"/>
                           </a:solidFill>
                           <a:latin typeface="PingFang SC"/>
                         </a:defRPr>
@@ -4805,8 +4800,8 @@
         </p:nvSpPr>
         <p:spPr>
           <a:xfrm>
-            <a:off x="6451438" y="4434840"/>
-            <a:ext cx="3911502" cy="182880"/>
+            <a:off x="6553036" y="4434840"/>
+            <a:ext cx="5029074" cy="182880"/>
           </a:xfrm>
           <a:prstGeom prst="rect">
             <a:avLst/>
@@ -4845,8 +4840,8 @@
           <p:nvPr/>
         </p:nvGraphicFramePr>
         <p:xfrm>
-          <a:off x="6451438" y="4617720"/>
-          <a:ext cx="3911501" cy="1463040"/>
+          <a:off x="6553036" y="4617720"/>
+          <a:ext cx="5029073" cy="1463040"/>
         </p:xfrm>
         <a:graphic>
           <a:graphicData uri="http://schemas.openxmlformats.org/drawingml/2006/table">
@@ -4855,9 +4850,9 @@
                 <a:tableStyleId>{5C22544A-7EE6-4342-B048-85BDC9FD1C3A}</a:tableStyleId>
               </a:tblPr>
               <a:tblGrid>
-                <a:gridCol w="853418"/>
-                <a:gridCol w="711182"/>
-                <a:gridCol w="2346901"/>
+                <a:gridCol w="1097252"/>
+                <a:gridCol w="914377"/>
+                <a:gridCol w="3017444"/>
               </a:tblGrid>
               <a:tr h="292608">
                 <a:tc>
@@ -4942,7 +4937,7 @@
                       <a:pPr>
                         <a:defRPr sz="900">
                           <a:solidFill>
-                            <a:srgbClr val="000000"/>
+                            <a:srgbClr val="FFFFFF"/>
                           </a:solidFill>
                           <a:latin typeface="PingFang SC"/>
                         </a:defRPr>
@@ -4966,7 +4961,7 @@
                       <a:pPr>
                         <a:defRPr sz="900">
                           <a:solidFill>
-                            <a:srgbClr val="000000"/>
+                            <a:srgbClr val="FFFFFF"/>
                           </a:solidFill>
                           <a:latin typeface="PingFang SC"/>
                         </a:defRPr>
@@ -4990,7 +4985,7 @@
                       <a:pPr>
                         <a:defRPr sz="900">
                           <a:solidFill>
-                            <a:srgbClr val="000000"/>
+                            <a:srgbClr val="FFFFFF"/>
                           </a:solidFill>
                           <a:latin typeface="PingFang SC"/>
                         </a:defRPr>
@@ -5016,7 +5011,7 @@
                       <a:pPr>
                         <a:defRPr sz="900">
                           <a:solidFill>
-                            <a:srgbClr val="000000"/>
+                            <a:srgbClr val="FFFFFF"/>
                           </a:solidFill>
                           <a:latin typeface="PingFang SC"/>
                         </a:defRPr>
@@ -5036,7 +5031,7 @@
                       <a:pPr>
                         <a:defRPr sz="900">
                           <a:solidFill>
-                            <a:srgbClr val="000000"/>
+                            <a:srgbClr val="FFFFFF"/>
                           </a:solidFill>
                           <a:latin typeface="PingFang SC"/>
                         </a:defRPr>
@@ -5056,7 +5051,7 @@
                       <a:pPr>
                         <a:defRPr sz="900">
                           <a:solidFill>
-                            <a:srgbClr val="000000"/>
+                            <a:srgbClr val="FFFFFF"/>
                           </a:solidFill>
                           <a:latin typeface="PingFang SC"/>
                         </a:defRPr>
@@ -5078,7 +5073,7 @@
                       <a:pPr>
                         <a:defRPr sz="900">
                           <a:solidFill>
-                            <a:srgbClr val="000000"/>
+                            <a:srgbClr val="FFFFFF"/>
                           </a:solidFill>
                           <a:latin typeface="PingFang SC"/>
                         </a:defRPr>
@@ -5102,7 +5097,7 @@
                       <a:pPr>
                         <a:defRPr sz="900">
                           <a:solidFill>
-                            <a:srgbClr val="000000"/>
+                            <a:srgbClr val="FFFFFF"/>
                           </a:solidFill>
                           <a:latin typeface="PingFang SC"/>
                         </a:defRPr>
@@ -5126,7 +5121,7 @@
                       <a:pPr>
                         <a:defRPr sz="900">
                           <a:solidFill>
-                            <a:srgbClr val="000000"/>
+                            <a:srgbClr val="FFFFFF"/>
                           </a:solidFill>
                           <a:latin typeface="PingFang SC"/>
                         </a:defRPr>
@@ -5152,7 +5147,7 @@
                       <a:pPr>
                         <a:defRPr sz="900">
                           <a:solidFill>
-                            <a:srgbClr val="000000"/>
+                            <a:srgbClr val="FFFFFF"/>
                           </a:solidFill>
                           <a:latin typeface="PingFang SC"/>
                         </a:defRPr>
@@ -5172,7 +5167,7 @@
                       <a:pPr>
                         <a:defRPr sz="900">
                           <a:solidFill>
-                            <a:srgbClr val="000000"/>
+                            <a:srgbClr val="FFFFFF"/>
                           </a:solidFill>
                           <a:latin typeface="PingFang SC"/>
                         </a:defRPr>
@@ -5192,7 +5187,7 @@
                       <a:pPr>
                         <a:defRPr sz="900">
                           <a:solidFill>
-                            <a:srgbClr val="000000"/>
+                            <a:srgbClr val="FFFFFF"/>
                           </a:solidFill>
                           <a:latin typeface="PingFang SC"/>
                         </a:defRPr>
@@ -5217,8 +5212,8 @@
         </p:nvSpPr>
         <p:spPr>
           <a:xfrm>
-            <a:off x="1828754" y="5623560"/>
-            <a:ext cx="8534186" cy="594360"/>
+            <a:off x="609584" y="5623560"/>
+            <a:ext cx="10972525" cy="594360"/>
           </a:xfrm>
           <a:prstGeom prst="roundRect">
             <a:avLst/>
@@ -5262,8 +5257,8 @@
         </p:nvSpPr>
         <p:spPr>
           <a:xfrm>
-            <a:off x="1970990" y="5650992"/>
-            <a:ext cx="3911502" cy="457200"/>
+            <a:off x="792460" y="5650992"/>
+            <a:ext cx="5029074" cy="457200"/>
           </a:xfrm>
           <a:prstGeom prst="rect">
             <a:avLst/>
@@ -5301,8 +5296,8 @@
         </p:nvSpPr>
         <p:spPr>
           <a:xfrm>
-            <a:off x="6238084" y="5650992"/>
-            <a:ext cx="3911502" cy="457200"/>
+            <a:off x="6278723" y="5650992"/>
+            <a:ext cx="5029074" cy="457200"/>
           </a:xfrm>
           <a:prstGeom prst="rect">
             <a:avLst/>
@@ -5340,8 +5335,8 @@
         </p:nvSpPr>
         <p:spPr>
           <a:xfrm>
-            <a:off x="1828754" y="6400800"/>
-            <a:ext cx="8534186" cy="182880"/>
+            <a:off x="609584" y="6400800"/>
+            <a:ext cx="10972525" cy="182880"/>
           </a:xfrm>
           <a:prstGeom prst="rect">
             <a:avLst/>
@@ -5411,9 +5406,7 @@
           <a:prstGeom prst="rect">
             <a:avLst/>
           </a:prstGeom>
-          <a:solidFill>
-            <a:srgbClr val="F0F0F0"/>
-          </a:solidFill>
+          <a:noFill/>
           <a:ln>
             <a:noFill/>
           </a:ln>
@@ -5433,13 +5426,10 @@
           </a:fontRef>
         </p:style>
         <p:txBody>
-          <a:bodyPr rtlCol="0" anchor="ctr" wrap="square" lIns="1828754" rIns="1828754"/>
+          <a:bodyPr rtlCol="0" anchor="ctr" wrap="square" lIns="609584" rIns="609584"/>
           <a:lstStyle/>
           <a:p>
             <a:pPr algn="l">
-              <a:spcBef>
-                <a:spcPts val="400"/>
-              </a:spcBef>
               <a:defRPr sz="2200" b="1">
                 <a:solidFill>
                   <a:srgbClr val="C7000B"/>
@@ -5461,8 +5451,8 @@
         </p:nvSpPr>
         <p:spPr>
           <a:xfrm>
-            <a:off x="1828754" y="658368"/>
-            <a:ext cx="8534186" cy="274320"/>
+            <a:off x="609584" y="658368"/>
+            <a:ext cx="10972525" cy="274320"/>
           </a:xfrm>
           <a:prstGeom prst="rect">
             <a:avLst/>
@@ -5497,8 +5487,8 @@
         </p:nvSpPr>
         <p:spPr>
           <a:xfrm>
-            <a:off x="1828754" y="914400"/>
-            <a:ext cx="3911502" cy="228600"/>
+            <a:off x="609584" y="914400"/>
+            <a:ext cx="5029074" cy="228600"/>
           </a:xfrm>
           <a:prstGeom prst="rect">
             <a:avLst/>
@@ -5536,17 +5526,19 @@
         </p:nvSpPr>
         <p:spPr>
           <a:xfrm>
-            <a:off x="1970990" y="1234440"/>
-            <a:ext cx="3627029" cy="502920"/>
+            <a:off x="792460" y="1234440"/>
+            <a:ext cx="4663323" cy="502920"/>
           </a:xfrm>
           <a:prstGeom prst="roundRect">
             <a:avLst/>
           </a:prstGeom>
           <a:solidFill>
-            <a:srgbClr val="1E293B"/>
+            <a:srgbClr val="F5F5F5"/>
           </a:solidFill>
-          <a:ln>
-            <a:noFill/>
+          <a:ln w="6350">
+            <a:solidFill>
+              <a:srgbClr val="CCCCCC"/>
+            </a:solidFill>
           </a:ln>
         </p:spPr>
         <p:style>
@@ -5570,7 +5562,7 @@
             <a:pPr algn="ctr">
               <a:defRPr sz="1000" b="1">
                 <a:solidFill>
-                  <a:srgbClr val="FFFFFF"/>
+                  <a:srgbClr val="000000"/>
                 </a:solidFill>
                 <a:latin typeface="PingFang SC"/>
               </a:defRPr>
@@ -5593,7 +5585,7 @@
         </p:nvSpPr>
         <p:spPr>
           <a:xfrm>
-            <a:off x="3658523" y="1737360"/>
+            <a:off x="2977820" y="1737360"/>
             <a:ext cx="109728" cy="109728"/>
           </a:xfrm>
           <a:prstGeom prst="downArrow">
@@ -5602,8 +5594,10 @@
           <a:solidFill>
             <a:srgbClr val="B5B5B5"/>
           </a:solidFill>
-          <a:ln>
-            <a:noFill/>
+          <a:ln w="6350">
+            <a:solidFill>
+              <a:srgbClr val="CCCCCC"/>
+            </a:solidFill>
           </a:ln>
         </p:spPr>
         <p:style>
@@ -5636,17 +5630,19 @@
         </p:nvSpPr>
         <p:spPr>
           <a:xfrm>
-            <a:off x="1970990" y="2011680"/>
-            <a:ext cx="3627029" cy="685800"/>
+            <a:off x="792460" y="2011680"/>
+            <a:ext cx="4663323" cy="685800"/>
           </a:xfrm>
           <a:prstGeom prst="roundRect">
             <a:avLst/>
           </a:prstGeom>
           <a:solidFill>
-            <a:srgbClr val="1E293B"/>
+            <a:srgbClr val="F5F5F5"/>
           </a:solidFill>
-          <a:ln>
-            <a:noFill/>
+          <a:ln w="6350">
+            <a:solidFill>
+              <a:srgbClr val="CCCCCC"/>
+            </a:solidFill>
           </a:ln>
         </p:spPr>
         <p:style>
@@ -5670,7 +5666,7 @@
             <a:pPr algn="ctr">
               <a:defRPr sz="1000" b="1">
                 <a:solidFill>
-                  <a:srgbClr val="FFFFFF"/>
+                  <a:srgbClr val="000000"/>
                 </a:solidFill>
                 <a:latin typeface="PingFang SC"/>
               </a:defRPr>
@@ -5697,7 +5693,7 @@
         </p:nvSpPr>
         <p:spPr>
           <a:xfrm>
-            <a:off x="3658523" y="2697480"/>
+            <a:off x="2977820" y="2697480"/>
             <a:ext cx="109728" cy="109728"/>
           </a:xfrm>
           <a:prstGeom prst="downArrow">
@@ -5706,8 +5702,10 @@
           <a:solidFill>
             <a:srgbClr val="B5B5B5"/>
           </a:solidFill>
-          <a:ln>
-            <a:noFill/>
+          <a:ln w="6350">
+            <a:solidFill>
+              <a:srgbClr val="CCCCCC"/>
+            </a:solidFill>
           </a:ln>
         </p:spPr>
         <p:style>
@@ -5740,17 +5738,19 @@
         </p:nvSpPr>
         <p:spPr>
           <a:xfrm>
-            <a:off x="1970990" y="2788920"/>
-            <a:ext cx="3627029" cy="548640"/>
+            <a:off x="792460" y="2788920"/>
+            <a:ext cx="4663323" cy="548640"/>
           </a:xfrm>
           <a:prstGeom prst="roundRect">
             <a:avLst/>
           </a:prstGeom>
           <a:solidFill>
-            <a:srgbClr val="1E293B"/>
+            <a:srgbClr val="F5F5F5"/>
           </a:solidFill>
-          <a:ln>
-            <a:noFill/>
+          <a:ln w="6350">
+            <a:solidFill>
+              <a:srgbClr val="CCCCCC"/>
+            </a:solidFill>
           </a:ln>
         </p:spPr>
         <p:style>
@@ -5774,7 +5774,7 @@
             <a:pPr algn="ctr">
               <a:defRPr sz="1000" b="1">
                 <a:solidFill>
-                  <a:srgbClr val="FFFFFF"/>
+                  <a:srgbClr val="000000"/>
                 </a:solidFill>
                 <a:latin typeface="PingFang SC"/>
               </a:defRPr>
@@ -5797,7 +5797,7 @@
         </p:nvSpPr>
         <p:spPr>
           <a:xfrm>
-            <a:off x="3658523" y="3337560"/>
+            <a:off x="2977820" y="3337560"/>
             <a:ext cx="109728" cy="109728"/>
           </a:xfrm>
           <a:prstGeom prst="downArrow">
@@ -5806,8 +5806,10 @@
           <a:solidFill>
             <a:srgbClr val="B5B5B5"/>
           </a:solidFill>
-          <a:ln>
-            <a:noFill/>
+          <a:ln w="6350">
+            <a:solidFill>
+              <a:srgbClr val="CCCCCC"/>
+            </a:solidFill>
           </a:ln>
         </p:spPr>
         <p:style>
@@ -5840,17 +5842,19 @@
         </p:nvSpPr>
         <p:spPr>
           <a:xfrm>
-            <a:off x="1970990" y="3566160"/>
-            <a:ext cx="3627029" cy="502920"/>
+            <a:off x="792460" y="3566160"/>
+            <a:ext cx="4663323" cy="502920"/>
           </a:xfrm>
           <a:prstGeom prst="roundRect">
             <a:avLst/>
           </a:prstGeom>
           <a:solidFill>
-            <a:srgbClr val="1E293B"/>
+            <a:srgbClr val="F5F5F5"/>
           </a:solidFill>
-          <a:ln>
-            <a:noFill/>
+          <a:ln w="6350">
+            <a:solidFill>
+              <a:srgbClr val="CCCCCC"/>
+            </a:solidFill>
           </a:ln>
         </p:spPr>
         <p:style>
@@ -5874,7 +5878,7 @@
             <a:pPr algn="ctr">
               <a:defRPr sz="1000" b="1">
                 <a:solidFill>
-                  <a:srgbClr val="FFFFFF"/>
+                  <a:srgbClr val="000000"/>
                 </a:solidFill>
                 <a:latin typeface="PingFang SC"/>
               </a:defRPr>
@@ -5897,8 +5901,8 @@
         </p:nvSpPr>
         <p:spPr>
           <a:xfrm>
-            <a:off x="1970990" y="4754880"/>
-            <a:ext cx="3627029" cy="274320"/>
+            <a:off x="792460" y="4754880"/>
+            <a:ext cx="4663323" cy="274320"/>
           </a:xfrm>
           <a:prstGeom prst="roundRect">
             <a:avLst/>
@@ -5942,8 +5946,8 @@
         </p:nvSpPr>
         <p:spPr>
           <a:xfrm>
-            <a:off x="2113227" y="4773168"/>
-            <a:ext cx="3413674" cy="228600"/>
+            <a:off x="975335" y="4773168"/>
+            <a:ext cx="4389010" cy="228600"/>
           </a:xfrm>
           <a:prstGeom prst="rect">
             <a:avLst/>
@@ -5981,8 +5985,8 @@
         </p:nvSpPr>
         <p:spPr>
           <a:xfrm>
-            <a:off x="6451438" y="914400"/>
-            <a:ext cx="3911502" cy="228600"/>
+            <a:off x="6553036" y="914400"/>
+            <a:ext cx="5029074" cy="228600"/>
           </a:xfrm>
           <a:prstGeom prst="rect">
             <a:avLst/>
@@ -6020,8 +6024,8 @@
         </p:nvSpPr>
         <p:spPr>
           <a:xfrm>
-            <a:off x="6664793" y="1234440"/>
-            <a:ext cx="888977" cy="1005840"/>
+            <a:off x="6827349" y="1234440"/>
+            <a:ext cx="1142971" cy="1005840"/>
           </a:xfrm>
           <a:prstGeom prst="roundRect">
             <a:avLst/>
@@ -6083,8 +6087,8 @@
         </p:nvSpPr>
         <p:spPr>
           <a:xfrm>
-            <a:off x="7624889" y="1234440"/>
-            <a:ext cx="888977" cy="1005840"/>
+            <a:off x="8061758" y="1234440"/>
+            <a:ext cx="1142971" cy="1005840"/>
           </a:xfrm>
           <a:prstGeom prst="roundRect">
             <a:avLst/>
@@ -6146,8 +6150,8 @@
         </p:nvSpPr>
         <p:spPr>
           <a:xfrm>
-            <a:off x="8584985" y="1234440"/>
-            <a:ext cx="888977" cy="1005840"/>
+            <a:off x="9296167" y="1234440"/>
+            <a:ext cx="1142971" cy="1005840"/>
           </a:xfrm>
           <a:prstGeom prst="roundRect">
             <a:avLst/>
@@ -6209,8 +6213,8 @@
         </p:nvSpPr>
         <p:spPr>
           <a:xfrm>
-            <a:off x="9545081" y="1234440"/>
-            <a:ext cx="888977" cy="1005840"/>
+            <a:off x="10530576" y="1234440"/>
+            <a:ext cx="1142971" cy="1005840"/>
           </a:xfrm>
           <a:prstGeom prst="roundRect">
             <a:avLst/>
@@ -6272,17 +6276,19 @@
         </p:nvSpPr>
         <p:spPr>
           <a:xfrm>
-            <a:off x="6664793" y="2377440"/>
-            <a:ext cx="3698147" cy="777240"/>
+            <a:off x="6827349" y="2377440"/>
+            <a:ext cx="4754761" cy="777240"/>
           </a:xfrm>
           <a:prstGeom prst="roundRect">
             <a:avLst/>
           </a:prstGeom>
           <a:solidFill>
-            <a:srgbClr val="1E293B"/>
+            <a:srgbClr val="F5F5F5"/>
           </a:solidFill>
-          <a:ln>
-            <a:noFill/>
+          <a:ln w="6350">
+            <a:solidFill>
+              <a:srgbClr val="CCCCCC"/>
+            </a:solidFill>
           </a:ln>
         </p:spPr>
         <p:style>
@@ -6306,7 +6312,7 @@
             <a:pPr algn="ctr">
               <a:defRPr sz="1000" b="0">
                 <a:solidFill>
-                  <a:srgbClr val="FFFFFF"/>
+                  <a:srgbClr val="000000"/>
                 </a:solidFill>
                 <a:latin typeface="PingFang SC"/>
               </a:defRPr>
@@ -6337,17 +6343,19 @@
         </p:nvSpPr>
         <p:spPr>
           <a:xfrm>
-            <a:off x="6664793" y="3291840"/>
-            <a:ext cx="3698147" cy="1005840"/>
+            <a:off x="6827349" y="3291840"/>
+            <a:ext cx="4754761" cy="1005840"/>
           </a:xfrm>
           <a:prstGeom prst="roundRect">
             <a:avLst/>
           </a:prstGeom>
           <a:solidFill>
-            <a:srgbClr val="1E293B"/>
+            <a:srgbClr val="F5F5F5"/>
           </a:solidFill>
-          <a:ln>
-            <a:noFill/>
+          <a:ln w="6350">
+            <a:solidFill>
+              <a:srgbClr val="CCCCCC"/>
+            </a:solidFill>
           </a:ln>
         </p:spPr>
         <p:style>
@@ -6371,7 +6379,7 @@
             <a:pPr algn="ctr">
               <a:defRPr sz="1000" b="0">
                 <a:solidFill>
-                  <a:srgbClr val="FFFFFF"/>
+                  <a:srgbClr val="000000"/>
                 </a:solidFill>
                 <a:latin typeface="PingFang SC"/>
               </a:defRPr>
@@ -6402,7 +6410,7 @@
         </p:nvSpPr>
         <p:spPr>
           <a:xfrm>
-            <a:off x="8303050" y="4434840"/>
+            <a:off x="8953274" y="4434840"/>
             <a:ext cx="137160" cy="137160"/>
           </a:xfrm>
           <a:prstGeom prst="downArrow">
@@ -6411,8 +6419,10 @@
           <a:solidFill>
             <a:srgbClr val="B5B5B5"/>
           </a:solidFill>
-          <a:ln>
-            <a:noFill/>
+          <a:ln w="6350">
+            <a:solidFill>
+              <a:srgbClr val="CCCCCC"/>
+            </a:solidFill>
           </a:ln>
         </p:spPr>
         <p:style>
@@ -6445,17 +6455,19 @@
         </p:nvSpPr>
         <p:spPr>
           <a:xfrm>
-            <a:off x="6664793" y="4617720"/>
-            <a:ext cx="3698147" cy="502920"/>
+            <a:off x="6827349" y="4617720"/>
+            <a:ext cx="4754761" cy="502920"/>
           </a:xfrm>
           <a:prstGeom prst="roundRect">
             <a:avLst/>
           </a:prstGeom>
           <a:solidFill>
-            <a:srgbClr val="1E293B"/>
+            <a:srgbClr val="F5F5F5"/>
           </a:solidFill>
-          <a:ln>
-            <a:noFill/>
+          <a:ln w="6350">
+            <a:solidFill>
+              <a:srgbClr val="CCCCCC"/>
+            </a:solidFill>
           </a:ln>
         </p:spPr>
         <p:style>
@@ -6479,7 +6491,7 @@
             <a:pPr algn="ctr">
               <a:defRPr sz="1000" b="1">
                 <a:solidFill>
-                  <a:srgbClr val="FFFFFF"/>
+                  <a:srgbClr val="000000"/>
                 </a:solidFill>
                 <a:latin typeface="PingFang SC"/>
               </a:defRPr>
@@ -6502,8 +6514,8 @@
         </p:nvSpPr>
         <p:spPr>
           <a:xfrm>
-            <a:off x="1828754" y="5394960"/>
-            <a:ext cx="8534186" cy="502920"/>
+            <a:off x="609584" y="5394960"/>
+            <a:ext cx="10972525" cy="502920"/>
           </a:xfrm>
           <a:prstGeom prst="roundRect">
             <a:avLst/>
@@ -6547,8 +6559,8 @@
         </p:nvSpPr>
         <p:spPr>
           <a:xfrm>
-            <a:off x="1970990" y="5413248"/>
-            <a:ext cx="8249713" cy="109728"/>
+            <a:off x="792460" y="5413248"/>
+            <a:ext cx="10606774" cy="109728"/>
           </a:xfrm>
           <a:prstGeom prst="rect">
             <a:avLst/>
@@ -6586,8 +6598,8 @@
         </p:nvSpPr>
         <p:spPr>
           <a:xfrm>
-            <a:off x="1970990" y="5577840"/>
-            <a:ext cx="8249713" cy="228600"/>
+            <a:off x="792460" y="5577840"/>
+            <a:ext cx="10606774" cy="228600"/>
           </a:xfrm>
           <a:prstGeom prst="rect">
             <a:avLst/>
@@ -6625,8 +6637,8 @@
         </p:nvSpPr>
         <p:spPr>
           <a:xfrm>
-            <a:off x="1828754" y="6080760"/>
-            <a:ext cx="8534186" cy="182880"/>
+            <a:off x="609584" y="6080760"/>
+            <a:ext cx="10972525" cy="182880"/>
           </a:xfrm>
           <a:prstGeom prst="rect">
             <a:avLst/>
@@ -6696,9 +6708,7 @@
           <a:prstGeom prst="rect">
             <a:avLst/>
           </a:prstGeom>
-          <a:solidFill>
-            <a:srgbClr val="F0F0F0"/>
-          </a:solidFill>
+          <a:noFill/>
           <a:ln>
             <a:noFill/>
           </a:ln>
@@ -6718,13 +6728,10 @@
           </a:fontRef>
         </p:style>
         <p:txBody>
-          <a:bodyPr rtlCol="0" anchor="ctr" wrap="square" lIns="1828754" rIns="1828754"/>
+          <a:bodyPr rtlCol="0" anchor="ctr" wrap="square" lIns="609584" rIns="609584"/>
           <a:lstStyle/>
           <a:p>
             <a:pPr algn="l">
-              <a:spcBef>
-                <a:spcPts val="400"/>
-              </a:spcBef>
               <a:defRPr sz="2200" b="1">
                 <a:solidFill>
                   <a:srgbClr val="C7000B"/>
@@ -6746,8 +6753,8 @@
         </p:nvSpPr>
         <p:spPr>
           <a:xfrm>
-            <a:off x="1828754" y="658368"/>
-            <a:ext cx="8534186" cy="274320"/>
+            <a:off x="609584" y="658368"/>
+            <a:ext cx="10972525" cy="274320"/>
           </a:xfrm>
           <a:prstGeom prst="rect">
             <a:avLst/>
@@ -6782,8 +6789,8 @@
         </p:nvSpPr>
         <p:spPr>
           <a:xfrm>
-            <a:off x="1828754" y="1005840"/>
-            <a:ext cx="8534186" cy="228600"/>
+            <a:off x="609584" y="1005840"/>
+            <a:ext cx="10972525" cy="228600"/>
           </a:xfrm>
           <a:prstGeom prst="rect">
             <a:avLst/>
@@ -6822,8 +6829,8 @@
           <p:nvPr/>
         </p:nvGraphicFramePr>
         <p:xfrm>
-          <a:off x="1828754" y="1280160"/>
-          <a:ext cx="7325175" cy="1463040"/>
+          <a:off x="609584" y="1280160"/>
+          <a:ext cx="9418081" cy="1463040"/>
         </p:xfrm>
         <a:graphic>
           <a:graphicData uri="http://schemas.openxmlformats.org/drawingml/2006/table">
@@ -6832,10 +6839,10 @@
                 <a:tableStyleId>{5C22544A-7EE6-4342-B048-85BDC9FD1C3A}</a:tableStyleId>
               </a:tblPr>
               <a:tblGrid>
-                <a:gridCol w="1777955"/>
-                <a:gridCol w="1991310"/>
-                <a:gridCol w="1991310"/>
-                <a:gridCol w="1564600"/>
+                <a:gridCol w="2285942"/>
+                <a:gridCol w="2560255"/>
+                <a:gridCol w="2560255"/>
+                <a:gridCol w="2011629"/>
               </a:tblGrid>
               <a:tr h="292608">
                 <a:tc>
@@ -6944,7 +6951,7 @@
                       <a:pPr>
                         <a:defRPr sz="1000">
                           <a:solidFill>
-                            <a:srgbClr val="000000"/>
+                            <a:srgbClr val="FFFFFF"/>
                           </a:solidFill>
                           <a:latin typeface="PingFang SC"/>
                         </a:defRPr>
@@ -6968,7 +6975,7 @@
                       <a:pPr>
                         <a:defRPr sz="1000">
                           <a:solidFill>
-                            <a:srgbClr val="000000"/>
+                            <a:srgbClr val="FFFFFF"/>
                           </a:solidFill>
                           <a:latin typeface="PingFang SC"/>
                         </a:defRPr>
@@ -6992,7 +6999,7 @@
                       <a:pPr>
                         <a:defRPr sz="1000">
                           <a:solidFill>
-                            <a:srgbClr val="000000"/>
+                            <a:srgbClr val="FFFFFF"/>
                           </a:solidFill>
                           <a:latin typeface="PingFang SC"/>
                         </a:defRPr>
@@ -7016,7 +7023,7 @@
                       <a:pPr>
                         <a:defRPr sz="1000">
                           <a:solidFill>
-                            <a:srgbClr val="000000"/>
+                            <a:srgbClr val="FFFFFF"/>
                           </a:solidFill>
                           <a:latin typeface="PingFang SC"/>
                         </a:defRPr>
@@ -7042,7 +7049,7 @@
                       <a:pPr>
                         <a:defRPr sz="1000">
                           <a:solidFill>
-                            <a:srgbClr val="000000"/>
+                            <a:srgbClr val="FFFFFF"/>
                           </a:solidFill>
                           <a:latin typeface="PingFang SC"/>
                         </a:defRPr>
@@ -7062,7 +7069,7 @@
                       <a:pPr>
                         <a:defRPr sz="1000">
                           <a:solidFill>
-                            <a:srgbClr val="000000"/>
+                            <a:srgbClr val="FFFFFF"/>
                           </a:solidFill>
                           <a:latin typeface="PingFang SC"/>
                         </a:defRPr>
@@ -7082,7 +7089,7 @@
                       <a:pPr>
                         <a:defRPr sz="1000">
                           <a:solidFill>
-                            <a:srgbClr val="000000"/>
+                            <a:srgbClr val="FFFFFF"/>
                           </a:solidFill>
                           <a:latin typeface="PingFang SC"/>
                         </a:defRPr>
@@ -7102,7 +7109,7 @@
                       <a:pPr>
                         <a:defRPr sz="1000">
                           <a:solidFill>
-                            <a:srgbClr val="000000"/>
+                            <a:srgbClr val="FFFFFF"/>
                           </a:solidFill>
                           <a:latin typeface="PingFang SC"/>
                         </a:defRPr>
@@ -7124,7 +7131,7 @@
                       <a:pPr>
                         <a:defRPr sz="1000">
                           <a:solidFill>
-                            <a:srgbClr val="000000"/>
+                            <a:srgbClr val="FFFFFF"/>
                           </a:solidFill>
                           <a:latin typeface="PingFang SC"/>
                         </a:defRPr>
@@ -7148,7 +7155,7 @@
                       <a:pPr>
                         <a:defRPr sz="1000">
                           <a:solidFill>
-                            <a:srgbClr val="000000"/>
+                            <a:srgbClr val="FFFFFF"/>
                           </a:solidFill>
                           <a:latin typeface="PingFang SC"/>
                         </a:defRPr>
@@ -7172,7 +7179,7 @@
                       <a:pPr>
                         <a:defRPr sz="1000">
                           <a:solidFill>
-                            <a:srgbClr val="000000"/>
+                            <a:srgbClr val="FFFFFF"/>
                           </a:solidFill>
                           <a:latin typeface="PingFang SC"/>
                         </a:defRPr>
@@ -7196,7 +7203,7 @@
                       <a:pPr>
                         <a:defRPr sz="1000">
                           <a:solidFill>
-                            <a:srgbClr val="000000"/>
+                            <a:srgbClr val="FFFFFF"/>
                           </a:solidFill>
                           <a:latin typeface="PingFang SC"/>
                         </a:defRPr>
@@ -7222,7 +7229,7 @@
                       <a:pPr>
                         <a:defRPr sz="1000">
                           <a:solidFill>
-                            <a:srgbClr val="000000"/>
+                            <a:srgbClr val="FFFFFF"/>
                           </a:solidFill>
                           <a:latin typeface="PingFang SC"/>
                         </a:defRPr>
@@ -7242,7 +7249,7 @@
                       <a:pPr>
                         <a:defRPr sz="1000">
                           <a:solidFill>
-                            <a:srgbClr val="000000"/>
+                            <a:srgbClr val="FFFFFF"/>
                           </a:solidFill>
                           <a:latin typeface="PingFang SC"/>
                         </a:defRPr>
@@ -7262,7 +7269,7 @@
                       <a:pPr>
                         <a:defRPr sz="1000">
                           <a:solidFill>
-                            <a:srgbClr val="000000"/>
+                            <a:srgbClr val="FFFFFF"/>
                           </a:solidFill>
                           <a:latin typeface="PingFang SC"/>
                         </a:defRPr>
@@ -7282,7 +7289,7 @@
                       <a:pPr>
                         <a:defRPr sz="1000">
                           <a:solidFill>
-                            <a:srgbClr val="000000"/>
+                            <a:srgbClr val="FFFFFF"/>
                           </a:solidFill>
                           <a:latin typeface="PingFang SC"/>
                         </a:defRPr>
@@ -7307,8 +7314,8 @@
         </p:nvSpPr>
         <p:spPr>
           <a:xfrm>
-            <a:off x="1828754" y="3063240"/>
-            <a:ext cx="8534186" cy="228600"/>
+            <a:off x="609584" y="3063240"/>
+            <a:ext cx="10972525" cy="228600"/>
           </a:xfrm>
           <a:prstGeom prst="rect">
             <a:avLst/>
@@ -7347,8 +7354,8 @@
           <p:nvPr/>
         </p:nvGraphicFramePr>
         <p:xfrm>
-          <a:off x="1828754" y="3337560"/>
-          <a:ext cx="7325175" cy="877824"/>
+          <a:off x="609584" y="3337560"/>
+          <a:ext cx="9418081" cy="877824"/>
         </p:xfrm>
         <a:graphic>
           <a:graphicData uri="http://schemas.openxmlformats.org/drawingml/2006/table">
@@ -7357,10 +7364,10 @@
                 <a:tableStyleId>{5C22544A-7EE6-4342-B048-85BDC9FD1C3A}</a:tableStyleId>
               </a:tblPr>
               <a:tblGrid>
-                <a:gridCol w="1777955"/>
-                <a:gridCol w="1991310"/>
-                <a:gridCol w="1991310"/>
-                <a:gridCol w="1564600"/>
+                <a:gridCol w="2285942"/>
+                <a:gridCol w="2560255"/>
+                <a:gridCol w="2560255"/>
+                <a:gridCol w="2011629"/>
               </a:tblGrid>
               <a:tr h="292608">
                 <a:tc>
@@ -7469,7 +7476,7 @@
                       <a:pPr>
                         <a:defRPr sz="1000">
                           <a:solidFill>
-                            <a:srgbClr val="000000"/>
+                            <a:srgbClr val="FFFFFF"/>
                           </a:solidFill>
                           <a:latin typeface="PingFang SC"/>
                         </a:defRPr>
@@ -7493,7 +7500,7 @@
                       <a:pPr>
                         <a:defRPr sz="1000">
                           <a:solidFill>
-                            <a:srgbClr val="000000"/>
+                            <a:srgbClr val="FFFFFF"/>
                           </a:solidFill>
                           <a:latin typeface="PingFang SC"/>
                         </a:defRPr>
@@ -7517,7 +7524,7 @@
                       <a:pPr>
                         <a:defRPr sz="1000">
                           <a:solidFill>
-                            <a:srgbClr val="000000"/>
+                            <a:srgbClr val="FFFFFF"/>
                           </a:solidFill>
                           <a:latin typeface="PingFang SC"/>
                         </a:defRPr>
@@ -7541,7 +7548,7 @@
                       <a:pPr>
                         <a:defRPr sz="1000">
                           <a:solidFill>
-                            <a:srgbClr val="000000"/>
+                            <a:srgbClr val="FFFFFF"/>
                           </a:solidFill>
                           <a:latin typeface="PingFang SC"/>
                         </a:defRPr>
@@ -7567,7 +7574,7 @@
                       <a:pPr>
                         <a:defRPr sz="1000">
                           <a:solidFill>
-                            <a:srgbClr val="000000"/>
+                            <a:srgbClr val="FFFFFF"/>
                           </a:solidFill>
                           <a:latin typeface="PingFang SC"/>
                         </a:defRPr>
@@ -7587,7 +7594,7 @@
                       <a:pPr>
                         <a:defRPr sz="1000">
                           <a:solidFill>
-                            <a:srgbClr val="000000"/>
+                            <a:srgbClr val="FFFFFF"/>
                           </a:solidFill>
                           <a:latin typeface="PingFang SC"/>
                         </a:defRPr>
@@ -7607,7 +7614,7 @@
                       <a:pPr>
                         <a:defRPr sz="1000">
                           <a:solidFill>
-                            <a:srgbClr val="000000"/>
+                            <a:srgbClr val="FFFFFF"/>
                           </a:solidFill>
                           <a:latin typeface="PingFang SC"/>
                         </a:defRPr>
@@ -7627,7 +7634,7 @@
                       <a:pPr>
                         <a:defRPr sz="1000">
                           <a:solidFill>
-                            <a:srgbClr val="000000"/>
+                            <a:srgbClr val="FFFFFF"/>
                           </a:solidFill>
                           <a:latin typeface="PingFang SC"/>
                         </a:defRPr>
@@ -7652,8 +7659,8 @@
         </p:nvSpPr>
         <p:spPr>
           <a:xfrm>
-            <a:off x="1828754" y="4251960"/>
-            <a:ext cx="8534186" cy="228600"/>
+            <a:off x="609584" y="4251960"/>
+            <a:ext cx="10972525" cy="228600"/>
           </a:xfrm>
           <a:prstGeom prst="rect">
             <a:avLst/>
@@ -7692,8 +7699,8 @@
           <p:nvPr/>
         </p:nvGraphicFramePr>
         <p:xfrm>
-          <a:off x="1828754" y="4526280"/>
-          <a:ext cx="7325175" cy="877824"/>
+          <a:off x="609584" y="4526280"/>
+          <a:ext cx="9418081" cy="877824"/>
         </p:xfrm>
         <a:graphic>
           <a:graphicData uri="http://schemas.openxmlformats.org/drawingml/2006/table">
@@ -7702,10 +7709,10 @@
                 <a:tableStyleId>{5C22544A-7EE6-4342-B048-85BDC9FD1C3A}</a:tableStyleId>
               </a:tblPr>
               <a:tblGrid>
-                <a:gridCol w="1777955"/>
-                <a:gridCol w="1991310"/>
-                <a:gridCol w="1991310"/>
-                <a:gridCol w="1564600"/>
+                <a:gridCol w="2285942"/>
+                <a:gridCol w="2560255"/>
+                <a:gridCol w="2560255"/>
+                <a:gridCol w="2011629"/>
               </a:tblGrid>
               <a:tr h="292608">
                 <a:tc>
@@ -7814,7 +7821,7 @@
                       <a:pPr>
                         <a:defRPr sz="1000">
                           <a:solidFill>
-                            <a:srgbClr val="000000"/>
+                            <a:srgbClr val="FFFFFF"/>
                           </a:solidFill>
                           <a:latin typeface="PingFang SC"/>
                         </a:defRPr>
@@ -7838,7 +7845,7 @@
                       <a:pPr>
                         <a:defRPr sz="1000">
                           <a:solidFill>
-                            <a:srgbClr val="000000"/>
+                            <a:srgbClr val="FFFFFF"/>
                           </a:solidFill>
                           <a:latin typeface="PingFang SC"/>
                         </a:defRPr>
@@ -7862,7 +7869,7 @@
                       <a:pPr>
                         <a:defRPr sz="1000">
                           <a:solidFill>
-                            <a:srgbClr val="000000"/>
+                            <a:srgbClr val="FFFFFF"/>
                           </a:solidFill>
                           <a:latin typeface="PingFang SC"/>
                         </a:defRPr>
@@ -7886,7 +7893,7 @@
                       <a:pPr>
                         <a:defRPr sz="1000">
                           <a:solidFill>
-                            <a:srgbClr val="000000"/>
+                            <a:srgbClr val="FFFFFF"/>
                           </a:solidFill>
                           <a:latin typeface="PingFang SC"/>
                         </a:defRPr>
@@ -7912,7 +7919,7 @@
                       <a:pPr>
                         <a:defRPr sz="1000">
                           <a:solidFill>
-                            <a:srgbClr val="000000"/>
+                            <a:srgbClr val="FFFFFF"/>
                           </a:solidFill>
                           <a:latin typeface="PingFang SC"/>
                         </a:defRPr>
@@ -7932,7 +7939,7 @@
                       <a:pPr>
                         <a:defRPr sz="1000">
                           <a:solidFill>
-                            <a:srgbClr val="000000"/>
+                            <a:srgbClr val="FFFFFF"/>
                           </a:solidFill>
                           <a:latin typeface="PingFang SC"/>
                         </a:defRPr>
@@ -7952,7 +7959,7 @@
                       <a:pPr>
                         <a:defRPr sz="1000">
                           <a:solidFill>
-                            <a:srgbClr val="000000"/>
+                            <a:srgbClr val="FFFFFF"/>
                           </a:solidFill>
                           <a:latin typeface="PingFang SC"/>
                         </a:defRPr>
@@ -7972,7 +7979,7 @@
                       <a:pPr>
                         <a:defRPr sz="1000">
                           <a:solidFill>
-                            <a:srgbClr val="000000"/>
+                            <a:srgbClr val="FFFFFF"/>
                           </a:solidFill>
                           <a:latin typeface="PingFang SC"/>
                         </a:defRPr>
@@ -7997,8 +8004,8 @@
         </p:nvSpPr>
         <p:spPr>
           <a:xfrm>
-            <a:off x="1828754" y="5440680"/>
-            <a:ext cx="8534186" cy="274320"/>
+            <a:off x="609584" y="5440680"/>
+            <a:ext cx="10972525" cy="274320"/>
           </a:xfrm>
           <a:prstGeom prst="rect">
             <a:avLst/>
@@ -8036,8 +8043,8 @@
         </p:nvSpPr>
         <p:spPr>
           <a:xfrm>
-            <a:off x="1828754" y="5897880"/>
-            <a:ext cx="8534186" cy="182880"/>
+            <a:off x="609584" y="5897880"/>
+            <a:ext cx="10972525" cy="182880"/>
           </a:xfrm>
           <a:prstGeom prst="rect">
             <a:avLst/>
@@ -8107,9 +8114,7 @@
           <a:prstGeom prst="rect">
             <a:avLst/>
           </a:prstGeom>
-          <a:solidFill>
-            <a:srgbClr val="F0F0F0"/>
-          </a:solidFill>
+          <a:noFill/>
           <a:ln>
             <a:noFill/>
           </a:ln>
@@ -8129,13 +8134,10 @@
           </a:fontRef>
         </p:style>
         <p:txBody>
-          <a:bodyPr rtlCol="0" anchor="ctr" wrap="square" lIns="1828754" rIns="1828754"/>
+          <a:bodyPr rtlCol="0" anchor="ctr" wrap="square" lIns="609584" rIns="609584"/>
           <a:lstStyle/>
           <a:p>
             <a:pPr algn="l">
-              <a:spcBef>
-                <a:spcPts val="400"/>
-              </a:spcBef>
               <a:defRPr sz="2200" b="1">
                 <a:solidFill>
                   <a:srgbClr val="C7000B"/>
@@ -8157,8 +8159,8 @@
         </p:nvSpPr>
         <p:spPr>
           <a:xfrm>
-            <a:off x="1828754" y="658368"/>
-            <a:ext cx="8534186" cy="274320"/>
+            <a:off x="609584" y="658368"/>
+            <a:ext cx="10972525" cy="274320"/>
           </a:xfrm>
           <a:prstGeom prst="rect">
             <a:avLst/>
@@ -8193,8 +8195,8 @@
         </p:nvSpPr>
         <p:spPr>
           <a:xfrm>
-            <a:off x="1828754" y="1005840"/>
-            <a:ext cx="4124856" cy="228600"/>
+            <a:off x="609584" y="1005840"/>
+            <a:ext cx="5303387" cy="228600"/>
           </a:xfrm>
           <a:prstGeom prst="rect">
             <a:avLst/>
@@ -8233,8 +8235,8 @@
           <p:nvPr/>
         </p:nvGraphicFramePr>
         <p:xfrm>
-          <a:off x="1828754" y="1234440"/>
-          <a:ext cx="4551564" cy="2633472"/>
+          <a:off x="609584" y="1234440"/>
+          <a:ext cx="5852012" cy="2633472"/>
         </p:xfrm>
         <a:graphic>
           <a:graphicData uri="http://schemas.openxmlformats.org/drawingml/2006/table">
@@ -8243,10 +8245,10 @@
                 <a:tableStyleId>{5C22544A-7EE6-4342-B048-85BDC9FD1C3A}</a:tableStyleId>
               </a:tblPr>
               <a:tblGrid>
-                <a:gridCol w="1564600"/>
-                <a:gridCol w="1849073"/>
-                <a:gridCol w="711182"/>
-                <a:gridCol w="426709"/>
+                <a:gridCol w="2011629"/>
+                <a:gridCol w="2377380"/>
+                <a:gridCol w="914377"/>
+                <a:gridCol w="548626"/>
               </a:tblGrid>
               <a:tr h="292608">
                 <a:tc>
@@ -8355,7 +8357,7 @@
                       <a:pPr>
                         <a:defRPr sz="1000">
                           <a:solidFill>
-                            <a:srgbClr val="000000"/>
+                            <a:srgbClr val="FFFFFF"/>
                           </a:solidFill>
                           <a:latin typeface="PingFang SC"/>
                         </a:defRPr>
@@ -8379,7 +8381,7 @@
                       <a:pPr>
                         <a:defRPr sz="1000">
                           <a:solidFill>
-                            <a:srgbClr val="000000"/>
+                            <a:srgbClr val="FFFFFF"/>
                           </a:solidFill>
                           <a:latin typeface="PingFang SC"/>
                         </a:defRPr>
@@ -8403,7 +8405,7 @@
                       <a:pPr>
                         <a:defRPr sz="1000">
                           <a:solidFill>
-                            <a:srgbClr val="000000"/>
+                            <a:srgbClr val="FFFFFF"/>
                           </a:solidFill>
                           <a:latin typeface="PingFang SC"/>
                         </a:defRPr>
@@ -8427,7 +8429,7 @@
                       <a:pPr>
                         <a:defRPr sz="1000">
                           <a:solidFill>
-                            <a:srgbClr val="000000"/>
+                            <a:srgbClr val="FFFFFF"/>
                           </a:solidFill>
                           <a:latin typeface="PingFang SC"/>
                         </a:defRPr>
@@ -8453,7 +8455,7 @@
                       <a:pPr>
                         <a:defRPr sz="1000">
                           <a:solidFill>
-                            <a:srgbClr val="000000"/>
+                            <a:srgbClr val="FFFFFF"/>
                           </a:solidFill>
                           <a:latin typeface="PingFang SC"/>
                         </a:defRPr>
@@ -8473,7 +8475,7 @@
                       <a:pPr>
                         <a:defRPr sz="1000">
                           <a:solidFill>
-                            <a:srgbClr val="000000"/>
+                            <a:srgbClr val="FFFFFF"/>
                           </a:solidFill>
                           <a:latin typeface="PingFang SC"/>
                         </a:defRPr>
@@ -8493,7 +8495,7 @@
                       <a:pPr>
                         <a:defRPr sz="1000">
                           <a:solidFill>
-                            <a:srgbClr val="000000"/>
+                            <a:srgbClr val="FFFFFF"/>
                           </a:solidFill>
                           <a:latin typeface="PingFang SC"/>
                         </a:defRPr>
@@ -8513,7 +8515,7 @@
                       <a:pPr>
                         <a:defRPr sz="1000">
                           <a:solidFill>
-                            <a:srgbClr val="000000"/>
+                            <a:srgbClr val="FFFFFF"/>
                           </a:solidFill>
                           <a:latin typeface="PingFang SC"/>
                         </a:defRPr>
@@ -8535,7 +8537,7 @@
                       <a:pPr>
                         <a:defRPr sz="1000">
                           <a:solidFill>
-                            <a:srgbClr val="000000"/>
+                            <a:srgbClr val="FFFFFF"/>
                           </a:solidFill>
                           <a:latin typeface="PingFang SC"/>
                         </a:defRPr>
@@ -8559,7 +8561,7 @@
                       <a:pPr>
                         <a:defRPr sz="1000">
                           <a:solidFill>
-                            <a:srgbClr val="000000"/>
+                            <a:srgbClr val="FFFFFF"/>
                           </a:solidFill>
                           <a:latin typeface="PingFang SC"/>
                         </a:defRPr>
@@ -8583,7 +8585,7 @@
                       <a:pPr>
                         <a:defRPr sz="1000">
                           <a:solidFill>
-                            <a:srgbClr val="000000"/>
+                            <a:srgbClr val="FFFFFF"/>
                           </a:solidFill>
                           <a:latin typeface="PingFang SC"/>
                         </a:defRPr>
@@ -8607,7 +8609,7 @@
                       <a:pPr>
                         <a:defRPr sz="1000">
                           <a:solidFill>
-                            <a:srgbClr val="000000"/>
+                            <a:srgbClr val="FFFFFF"/>
                           </a:solidFill>
                           <a:latin typeface="PingFang SC"/>
                         </a:defRPr>
@@ -8633,7 +8635,7 @@
                       <a:pPr>
                         <a:defRPr sz="1000">
                           <a:solidFill>
-                            <a:srgbClr val="000000"/>
+                            <a:srgbClr val="FFFFFF"/>
                           </a:solidFill>
                           <a:latin typeface="PingFang SC"/>
                         </a:defRPr>
@@ -8653,7 +8655,7 @@
                       <a:pPr>
                         <a:defRPr sz="1000">
                           <a:solidFill>
-                            <a:srgbClr val="000000"/>
+                            <a:srgbClr val="FFFFFF"/>
                           </a:solidFill>
                           <a:latin typeface="PingFang SC"/>
                         </a:defRPr>
@@ -8673,7 +8675,7 @@
                       <a:pPr>
                         <a:defRPr sz="1000">
                           <a:solidFill>
-                            <a:srgbClr val="000000"/>
+                            <a:srgbClr val="FFFFFF"/>
                           </a:solidFill>
                           <a:latin typeface="PingFang SC"/>
                         </a:defRPr>
@@ -8693,7 +8695,7 @@
                       <a:pPr>
                         <a:defRPr sz="1000">
                           <a:solidFill>
-                            <a:srgbClr val="000000"/>
+                            <a:srgbClr val="FFFFFF"/>
                           </a:solidFill>
                           <a:latin typeface="PingFang SC"/>
                         </a:defRPr>
@@ -8715,7 +8717,7 @@
                       <a:pPr>
                         <a:defRPr sz="1000">
                           <a:solidFill>
-                            <a:srgbClr val="000000"/>
+                            <a:srgbClr val="FFFFFF"/>
                           </a:solidFill>
                           <a:latin typeface="PingFang SC"/>
                         </a:defRPr>
@@ -8739,7 +8741,7 @@
                       <a:pPr>
                         <a:defRPr sz="1000">
                           <a:solidFill>
-                            <a:srgbClr val="000000"/>
+                            <a:srgbClr val="FFFFFF"/>
                           </a:solidFill>
                           <a:latin typeface="PingFang SC"/>
                         </a:defRPr>
@@ -8763,7 +8765,7 @@
                       <a:pPr>
                         <a:defRPr sz="1000">
                           <a:solidFill>
-                            <a:srgbClr val="000000"/>
+                            <a:srgbClr val="FFFFFF"/>
                           </a:solidFill>
                           <a:latin typeface="PingFang SC"/>
                         </a:defRPr>
@@ -8787,7 +8789,7 @@
                       <a:pPr>
                         <a:defRPr sz="1000">
                           <a:solidFill>
-                            <a:srgbClr val="000000"/>
+                            <a:srgbClr val="FFFFFF"/>
                           </a:solidFill>
                           <a:latin typeface="PingFang SC"/>
                         </a:defRPr>
@@ -8813,7 +8815,7 @@
                       <a:pPr>
                         <a:defRPr sz="1000">
                           <a:solidFill>
-                            <a:srgbClr val="000000"/>
+                            <a:srgbClr val="FFFFFF"/>
                           </a:solidFill>
                           <a:latin typeface="PingFang SC"/>
                         </a:defRPr>
@@ -8833,7 +8835,7 @@
                       <a:pPr>
                         <a:defRPr sz="1000">
                           <a:solidFill>
-                            <a:srgbClr val="000000"/>
+                            <a:srgbClr val="FFFFFF"/>
                           </a:solidFill>
                           <a:latin typeface="PingFang SC"/>
                         </a:defRPr>
@@ -8853,7 +8855,7 @@
                       <a:pPr>
                         <a:defRPr sz="1000">
                           <a:solidFill>
-                            <a:srgbClr val="000000"/>
+                            <a:srgbClr val="FFFFFF"/>
                           </a:solidFill>
                           <a:latin typeface="PingFang SC"/>
                         </a:defRPr>
@@ -8873,7 +8875,7 @@
                       <a:pPr>
                         <a:defRPr sz="1000">
                           <a:solidFill>
-                            <a:srgbClr val="000000"/>
+                            <a:srgbClr val="FFFFFF"/>
                           </a:solidFill>
                           <a:latin typeface="PingFang SC"/>
                         </a:defRPr>
@@ -8895,7 +8897,7 @@
                       <a:pPr>
                         <a:defRPr sz="1000">
                           <a:solidFill>
-                            <a:srgbClr val="000000"/>
+                            <a:srgbClr val="FFFFFF"/>
                           </a:solidFill>
                           <a:latin typeface="PingFang SC"/>
                         </a:defRPr>
@@ -8919,7 +8921,7 @@
                       <a:pPr>
                         <a:defRPr sz="1000">
                           <a:solidFill>
-                            <a:srgbClr val="000000"/>
+                            <a:srgbClr val="FFFFFF"/>
                           </a:solidFill>
                           <a:latin typeface="PingFang SC"/>
                         </a:defRPr>
@@ -8943,7 +8945,7 @@
                       <a:pPr>
                         <a:defRPr sz="1000">
                           <a:solidFill>
-                            <a:srgbClr val="000000"/>
+                            <a:srgbClr val="FFFFFF"/>
                           </a:solidFill>
                           <a:latin typeface="PingFang SC"/>
                         </a:defRPr>
@@ -8967,7 +8969,7 @@
                       <a:pPr>
                         <a:defRPr sz="1000">
                           <a:solidFill>
-                            <a:srgbClr val="000000"/>
+                            <a:srgbClr val="FFFFFF"/>
                           </a:solidFill>
                           <a:latin typeface="PingFang SC"/>
                         </a:defRPr>
@@ -8993,7 +8995,7 @@
                       <a:pPr>
                         <a:defRPr sz="1000">
                           <a:solidFill>
-                            <a:srgbClr val="000000"/>
+                            <a:srgbClr val="FFFFFF"/>
                           </a:solidFill>
                           <a:latin typeface="PingFang SC"/>
                         </a:defRPr>
@@ -9013,7 +9015,7 @@
                       <a:pPr>
                         <a:defRPr sz="1000">
                           <a:solidFill>
-                            <a:srgbClr val="000000"/>
+                            <a:srgbClr val="FFFFFF"/>
                           </a:solidFill>
                           <a:latin typeface="PingFang SC"/>
                         </a:defRPr>
@@ -9033,7 +9035,7 @@
                       <a:pPr>
                         <a:defRPr sz="1000">
                           <a:solidFill>
-                            <a:srgbClr val="000000"/>
+                            <a:srgbClr val="FFFFFF"/>
                           </a:solidFill>
                           <a:latin typeface="PingFang SC"/>
                         </a:defRPr>
@@ -9053,7 +9055,7 @@
                       <a:pPr>
                         <a:defRPr sz="1000">
                           <a:solidFill>
-                            <a:srgbClr val="000000"/>
+                            <a:srgbClr val="FFFFFF"/>
                           </a:solidFill>
                           <a:latin typeface="PingFang SC"/>
                         </a:defRPr>
@@ -9078,8 +9080,8 @@
         </p:nvSpPr>
         <p:spPr>
           <a:xfrm>
-            <a:off x="6664793" y="1005840"/>
-            <a:ext cx="3698147" cy="228600"/>
+            <a:off x="6827349" y="1005840"/>
+            <a:ext cx="4754761" cy="228600"/>
           </a:xfrm>
           <a:prstGeom prst="rect">
             <a:avLst/>
@@ -9118,8 +9120,8 @@
           <p:nvPr/>
         </p:nvGraphicFramePr>
         <p:xfrm>
-          <a:off x="6664793" y="1234440"/>
-          <a:ext cx="3698145" cy="2048256"/>
+          <a:off x="6827349" y="1234440"/>
+          <a:ext cx="4754757" cy="2048256"/>
         </p:xfrm>
         <a:graphic>
           <a:graphicData uri="http://schemas.openxmlformats.org/drawingml/2006/table">
@@ -9128,11 +9130,11 @@
                 <a:tableStyleId>{5C22544A-7EE6-4342-B048-85BDC9FD1C3A}</a:tableStyleId>
               </a:tblPr>
               <a:tblGrid>
-                <a:gridCol w="782300"/>
-                <a:gridCol w="782300"/>
-                <a:gridCol w="782300"/>
-                <a:gridCol w="782300"/>
-                <a:gridCol w="568945"/>
+                <a:gridCol w="1005814"/>
+                <a:gridCol w="1005814"/>
+                <a:gridCol w="1005814"/>
+                <a:gridCol w="1005814"/>
+                <a:gridCol w="731501"/>
               </a:tblGrid>
               <a:tr h="292608">
                 <a:tc>
@@ -9265,7 +9267,7 @@
                       <a:pPr>
                         <a:defRPr sz="900">
                           <a:solidFill>
-                            <a:srgbClr val="000000"/>
+                            <a:srgbClr val="FFFFFF"/>
                           </a:solidFill>
                           <a:latin typeface="PingFang SC"/>
                         </a:defRPr>
@@ -9289,7 +9291,7 @@
                       <a:pPr>
                         <a:defRPr sz="900">
                           <a:solidFill>
-                            <a:srgbClr val="000000"/>
+                            <a:srgbClr val="FFFFFF"/>
                           </a:solidFill>
                           <a:latin typeface="PingFang SC"/>
                         </a:defRPr>
@@ -9313,7 +9315,7 @@
                       <a:pPr>
                         <a:defRPr sz="900">
                           <a:solidFill>
-                            <a:srgbClr val="000000"/>
+                            <a:srgbClr val="FFFFFF"/>
                           </a:solidFill>
                           <a:latin typeface="PingFang SC"/>
                         </a:defRPr>
@@ -9337,7 +9339,7 @@
                       <a:pPr>
                         <a:defRPr sz="900">
                           <a:solidFill>
-                            <a:srgbClr val="000000"/>
+                            <a:srgbClr val="FFFFFF"/>
                           </a:solidFill>
                           <a:latin typeface="PingFang SC"/>
                         </a:defRPr>
@@ -9361,7 +9363,7 @@
                       <a:pPr>
                         <a:defRPr sz="900">
                           <a:solidFill>
-                            <a:srgbClr val="000000"/>
+                            <a:srgbClr val="FFFFFF"/>
                           </a:solidFill>
                           <a:latin typeface="PingFang SC"/>
                         </a:defRPr>
@@ -9387,7 +9389,7 @@
                       <a:pPr>
                         <a:defRPr sz="900">
                           <a:solidFill>
-                            <a:srgbClr val="000000"/>
+                            <a:srgbClr val="FFFFFF"/>
                           </a:solidFill>
                           <a:latin typeface="PingFang SC"/>
                         </a:defRPr>
@@ -9407,7 +9409,7 @@
                       <a:pPr>
                         <a:defRPr sz="900">
                           <a:solidFill>
-                            <a:srgbClr val="000000"/>
+                            <a:srgbClr val="FFFFFF"/>
                           </a:solidFill>
                           <a:latin typeface="PingFang SC"/>
                         </a:defRPr>
@@ -9427,7 +9429,7 @@
                       <a:pPr>
                         <a:defRPr sz="900">
                           <a:solidFill>
-                            <a:srgbClr val="000000"/>
+                            <a:srgbClr val="FFFFFF"/>
                           </a:solidFill>
                           <a:latin typeface="PingFang SC"/>
                         </a:defRPr>
@@ -9447,7 +9449,7 @@
                       <a:pPr>
                         <a:defRPr sz="900">
                           <a:solidFill>
-                            <a:srgbClr val="000000"/>
+                            <a:srgbClr val="FFFFFF"/>
                           </a:solidFill>
                           <a:latin typeface="PingFang SC"/>
                         </a:defRPr>
@@ -9467,7 +9469,7 @@
                       <a:pPr>
                         <a:defRPr sz="900">
                           <a:solidFill>
-                            <a:srgbClr val="000000"/>
+                            <a:srgbClr val="FFFFFF"/>
                           </a:solidFill>
                           <a:latin typeface="PingFang SC"/>
                         </a:defRPr>
@@ -9489,7 +9491,7 @@
                       <a:pPr>
                         <a:defRPr sz="900">
                           <a:solidFill>
-                            <a:srgbClr val="000000"/>
+                            <a:srgbClr val="FFFFFF"/>
                           </a:solidFill>
                           <a:latin typeface="PingFang SC"/>
                         </a:defRPr>
@@ -9513,7 +9515,7 @@
                       <a:pPr>
                         <a:defRPr sz="900">
                           <a:solidFill>
-                            <a:srgbClr val="000000"/>
+                            <a:srgbClr val="FFFFFF"/>
                           </a:solidFill>
                           <a:latin typeface="PingFang SC"/>
                         </a:defRPr>
@@ -9537,7 +9539,7 @@
                       <a:pPr>
                         <a:defRPr sz="900">
                           <a:solidFill>
-                            <a:srgbClr val="000000"/>
+                            <a:srgbClr val="FFFFFF"/>
                           </a:solidFill>
                           <a:latin typeface="PingFang SC"/>
                         </a:defRPr>
@@ -9561,7 +9563,7 @@
                       <a:pPr>
                         <a:defRPr sz="900">
                           <a:solidFill>
-                            <a:srgbClr val="000000"/>
+                            <a:srgbClr val="FFFFFF"/>
                           </a:solidFill>
                           <a:latin typeface="PingFang SC"/>
                         </a:defRPr>
@@ -9585,7 +9587,7 @@
                       <a:pPr>
                         <a:defRPr sz="900">
                           <a:solidFill>
-                            <a:srgbClr val="000000"/>
+                            <a:srgbClr val="FFFFFF"/>
                           </a:solidFill>
                           <a:latin typeface="PingFang SC"/>
                         </a:defRPr>
@@ -9611,7 +9613,7 @@
                       <a:pPr>
                         <a:defRPr sz="900">
                           <a:solidFill>
-                            <a:srgbClr val="000000"/>
+                            <a:srgbClr val="FFFFFF"/>
                           </a:solidFill>
                           <a:latin typeface="PingFang SC"/>
                         </a:defRPr>
@@ -9631,7 +9633,7 @@
                       <a:pPr>
                         <a:defRPr sz="900">
                           <a:solidFill>
-                            <a:srgbClr val="000000"/>
+                            <a:srgbClr val="FFFFFF"/>
                           </a:solidFill>
                           <a:latin typeface="PingFang SC"/>
                         </a:defRPr>
@@ -9651,7 +9653,7 @@
                       <a:pPr>
                         <a:defRPr sz="900">
                           <a:solidFill>
-                            <a:srgbClr val="000000"/>
+                            <a:srgbClr val="FFFFFF"/>
                           </a:solidFill>
                           <a:latin typeface="PingFang SC"/>
                         </a:defRPr>
@@ -9671,7 +9673,7 @@
                       <a:pPr>
                         <a:defRPr sz="900">
                           <a:solidFill>
-                            <a:srgbClr val="000000"/>
+                            <a:srgbClr val="FFFFFF"/>
                           </a:solidFill>
                           <a:latin typeface="PingFang SC"/>
                         </a:defRPr>
@@ -9691,7 +9693,7 @@
                       <a:pPr>
                         <a:defRPr sz="900">
                           <a:solidFill>
-                            <a:srgbClr val="000000"/>
+                            <a:srgbClr val="FFFFFF"/>
                           </a:solidFill>
                           <a:latin typeface="PingFang SC"/>
                         </a:defRPr>
@@ -9713,7 +9715,7 @@
                       <a:pPr>
                         <a:defRPr sz="900">
                           <a:solidFill>
-                            <a:srgbClr val="000000"/>
+                            <a:srgbClr val="FFFFFF"/>
                           </a:solidFill>
                           <a:latin typeface="PingFang SC"/>
                         </a:defRPr>
@@ -9737,7 +9739,7 @@
                       <a:pPr>
                         <a:defRPr sz="900">
                           <a:solidFill>
-                            <a:srgbClr val="000000"/>
+                            <a:srgbClr val="FFFFFF"/>
                           </a:solidFill>
                           <a:latin typeface="PingFang SC"/>
                         </a:defRPr>
@@ -9761,7 +9763,7 @@
                       <a:pPr>
                         <a:defRPr sz="900">
                           <a:solidFill>
-                            <a:srgbClr val="000000"/>
+                            <a:srgbClr val="FFFFFF"/>
                           </a:solidFill>
                           <a:latin typeface="PingFang SC"/>
                         </a:defRPr>
@@ -9785,7 +9787,7 @@
                       <a:pPr>
                         <a:defRPr sz="900">
                           <a:solidFill>
-                            <a:srgbClr val="000000"/>
+                            <a:srgbClr val="FFFFFF"/>
                           </a:solidFill>
                           <a:latin typeface="PingFang SC"/>
                         </a:defRPr>
@@ -9809,7 +9811,7 @@
                       <a:pPr>
                         <a:defRPr sz="900">
                           <a:solidFill>
-                            <a:srgbClr val="000000"/>
+                            <a:srgbClr val="FFFFFF"/>
                           </a:solidFill>
                           <a:latin typeface="PingFang SC"/>
                         </a:defRPr>
@@ -9835,7 +9837,7 @@
                       <a:pPr>
                         <a:defRPr sz="900">
                           <a:solidFill>
-                            <a:srgbClr val="000000"/>
+                            <a:srgbClr val="FFFFFF"/>
                           </a:solidFill>
                           <a:latin typeface="PingFang SC"/>
                         </a:defRPr>
@@ -9855,7 +9857,7 @@
                       <a:pPr>
                         <a:defRPr sz="900">
                           <a:solidFill>
-                            <a:srgbClr val="000000"/>
+                            <a:srgbClr val="FFFFFF"/>
                           </a:solidFill>
                           <a:latin typeface="PingFang SC"/>
                         </a:defRPr>
@@ -9875,7 +9877,7 @@
                       <a:pPr>
                         <a:defRPr sz="900">
                           <a:solidFill>
-                            <a:srgbClr val="000000"/>
+                            <a:srgbClr val="FFFFFF"/>
                           </a:solidFill>
                           <a:latin typeface="PingFang SC"/>
                         </a:defRPr>
@@ -9895,7 +9897,7 @@
                       <a:pPr>
                         <a:defRPr sz="900">
                           <a:solidFill>
-                            <a:srgbClr val="000000"/>
+                            <a:srgbClr val="FFFFFF"/>
                           </a:solidFill>
                           <a:latin typeface="PingFang SC"/>
                         </a:defRPr>
@@ -9915,7 +9917,7 @@
                       <a:pPr>
                         <a:defRPr sz="900">
                           <a:solidFill>
-                            <a:srgbClr val="000000"/>
+                            <a:srgbClr val="FFFFFF"/>
                           </a:solidFill>
                           <a:latin typeface="PingFang SC"/>
                         </a:defRPr>
@@ -9940,8 +9942,8 @@
         </p:nvSpPr>
         <p:spPr>
           <a:xfrm>
-            <a:off x="1828754" y="3291840"/>
-            <a:ext cx="8534186" cy="274320"/>
+            <a:off x="609584" y="3291840"/>
+            <a:ext cx="10972525" cy="274320"/>
           </a:xfrm>
           <a:prstGeom prst="rect">
             <a:avLst/>
@@ -9979,17 +9981,19 @@
         </p:nvSpPr>
         <p:spPr>
           <a:xfrm>
-            <a:off x="1970990" y="3657600"/>
-            <a:ext cx="1991310" cy="685800"/>
+            <a:off x="792460" y="3657600"/>
+            <a:ext cx="2560255" cy="685800"/>
           </a:xfrm>
           <a:prstGeom prst="roundRect">
             <a:avLst/>
           </a:prstGeom>
           <a:solidFill>
-            <a:srgbClr val="1E293B"/>
+            <a:srgbClr val="F5F5F5"/>
           </a:solidFill>
-          <a:ln>
-            <a:noFill/>
+          <a:ln w="6350">
+            <a:solidFill>
+              <a:srgbClr val="CCCCCC"/>
+            </a:solidFill>
           </a:ln>
         </p:spPr>
         <p:style>
@@ -10013,7 +10017,7 @@
             <a:pPr algn="ctr">
               <a:defRPr sz="1000" b="1">
                 <a:solidFill>
-                  <a:srgbClr val="FFFFFF"/>
+                  <a:srgbClr val="000000"/>
                 </a:solidFill>
                 <a:latin typeface="PingFang SC"/>
               </a:defRPr>
@@ -10036,7 +10040,7 @@
         </p:nvSpPr>
         <p:spPr>
           <a:xfrm>
-            <a:off x="3893720" y="3977639"/>
+            <a:off x="3284136" y="3977639"/>
             <a:ext cx="137160" cy="137160"/>
           </a:xfrm>
           <a:prstGeom prst="downArrow">
@@ -10045,8 +10049,10 @@
           <a:solidFill>
             <a:srgbClr val="B5B5B5"/>
           </a:solidFill>
-          <a:ln>
-            <a:noFill/>
+          <a:ln w="6350">
+            <a:solidFill>
+              <a:srgbClr val="CCCCCC"/>
+            </a:solidFill>
           </a:ln>
         </p:spPr>
         <p:style>
@@ -10079,17 +10085,19 @@
         </p:nvSpPr>
         <p:spPr>
           <a:xfrm>
-            <a:off x="4175655" y="3657600"/>
-            <a:ext cx="1991310" cy="685800"/>
+            <a:off x="3627029" y="3657600"/>
+            <a:ext cx="2560255" cy="685800"/>
           </a:xfrm>
           <a:prstGeom prst="roundRect">
             <a:avLst/>
           </a:prstGeom>
           <a:solidFill>
-            <a:srgbClr val="1E293B"/>
+            <a:srgbClr val="F5F5F5"/>
           </a:solidFill>
-          <a:ln>
-            <a:noFill/>
+          <a:ln w="6350">
+            <a:solidFill>
+              <a:srgbClr val="CCCCCC"/>
+            </a:solidFill>
           </a:ln>
         </p:spPr>
         <p:style>
@@ -10113,7 +10121,7 @@
             <a:pPr algn="ctr">
               <a:defRPr sz="1000" b="1">
                 <a:solidFill>
-                  <a:srgbClr val="FFFFFF"/>
+                  <a:srgbClr val="000000"/>
                 </a:solidFill>
                 <a:latin typeface="PingFang SC"/>
               </a:defRPr>
@@ -10136,7 +10144,7 @@
         </p:nvSpPr>
         <p:spPr>
           <a:xfrm>
-            <a:off x="6098385" y="3977639"/>
+            <a:off x="6118705" y="3977639"/>
             <a:ext cx="137160" cy="137160"/>
           </a:xfrm>
           <a:prstGeom prst="downArrow">
@@ -10145,8 +10153,10 @@
           <a:solidFill>
             <a:srgbClr val="B5B5B5"/>
           </a:solidFill>
-          <a:ln>
-            <a:noFill/>
+          <a:ln w="6350">
+            <a:solidFill>
+              <a:srgbClr val="CCCCCC"/>
+            </a:solidFill>
           </a:ln>
         </p:spPr>
         <p:style>
@@ -10179,17 +10189,19 @@
         </p:nvSpPr>
         <p:spPr>
           <a:xfrm>
-            <a:off x="6380320" y="3657600"/>
-            <a:ext cx="1991310" cy="685800"/>
+            <a:off x="6461598" y="3657600"/>
+            <a:ext cx="2560255" cy="685800"/>
           </a:xfrm>
           <a:prstGeom prst="roundRect">
             <a:avLst/>
           </a:prstGeom>
           <a:solidFill>
-            <a:srgbClr val="1E293B"/>
+            <a:srgbClr val="F5F5F5"/>
           </a:solidFill>
-          <a:ln>
-            <a:noFill/>
+          <a:ln w="6350">
+            <a:solidFill>
+              <a:srgbClr val="CCCCCC"/>
+            </a:solidFill>
           </a:ln>
         </p:spPr>
         <p:style>
@@ -10213,7 +10225,7 @@
             <a:pPr algn="ctr">
               <a:defRPr sz="1000" b="1">
                 <a:solidFill>
-                  <a:srgbClr val="FFFFFF"/>
+                  <a:srgbClr val="000000"/>
                 </a:solidFill>
                 <a:latin typeface="PingFang SC"/>
               </a:defRPr>
@@ -10236,7 +10248,7 @@
         </p:nvSpPr>
         <p:spPr>
           <a:xfrm>
-            <a:off x="8303050" y="3977639"/>
+            <a:off x="8953274" y="3977639"/>
             <a:ext cx="137160" cy="137160"/>
           </a:xfrm>
           <a:prstGeom prst="downArrow">
@@ -10245,8 +10257,10 @@
           <a:solidFill>
             <a:srgbClr val="B5B5B5"/>
           </a:solidFill>
-          <a:ln>
-            <a:noFill/>
+          <a:ln w="6350">
+            <a:solidFill>
+              <a:srgbClr val="CCCCCC"/>
+            </a:solidFill>
           </a:ln>
         </p:spPr>
         <p:style>
@@ -10279,17 +10293,19 @@
         </p:nvSpPr>
         <p:spPr>
           <a:xfrm>
-            <a:off x="8584985" y="3657600"/>
-            <a:ext cx="1991310" cy="685800"/>
+            <a:off x="9296167" y="3657600"/>
+            <a:ext cx="2560255" cy="685800"/>
           </a:xfrm>
           <a:prstGeom prst="roundRect">
             <a:avLst/>
           </a:prstGeom>
           <a:solidFill>
-            <a:srgbClr val="1E293B"/>
+            <a:srgbClr val="F5F5F5"/>
           </a:solidFill>
-          <a:ln>
-            <a:noFill/>
+          <a:ln w="6350">
+            <a:solidFill>
+              <a:srgbClr val="CCCCCC"/>
+            </a:solidFill>
           </a:ln>
         </p:spPr>
         <p:style>
@@ -10313,7 +10329,7 @@
             <a:pPr algn="ctr">
               <a:defRPr sz="1000" b="1">
                 <a:solidFill>
-                  <a:srgbClr val="FFFFFF"/>
+                  <a:srgbClr val="000000"/>
                 </a:solidFill>
                 <a:latin typeface="PingFang SC"/>
               </a:defRPr>
@@ -10336,8 +10352,8 @@
         </p:nvSpPr>
         <p:spPr>
           <a:xfrm>
-            <a:off x="1828754" y="4572000"/>
-            <a:ext cx="8534186" cy="868680"/>
+            <a:off x="609584" y="4572000"/>
+            <a:ext cx="10972525" cy="868680"/>
           </a:xfrm>
           <a:prstGeom prst="roundRect">
             <a:avLst/>
@@ -10381,8 +10397,8 @@
         </p:nvSpPr>
         <p:spPr>
           <a:xfrm>
-            <a:off x="2042108" y="4617720"/>
-            <a:ext cx="8107477" cy="777240"/>
+            <a:off x="883897" y="4617720"/>
+            <a:ext cx="10423899" cy="777240"/>
           </a:xfrm>
           <a:prstGeom prst="rect">
             <a:avLst/>
@@ -10433,8 +10449,8 @@
         </p:nvSpPr>
         <p:spPr>
           <a:xfrm>
-            <a:off x="1828754" y="5623560"/>
-            <a:ext cx="8534186" cy="182880"/>
+            <a:off x="609584" y="5623560"/>
+            <a:ext cx="10972525" cy="182880"/>
           </a:xfrm>
           <a:prstGeom prst="rect">
             <a:avLst/>
@@ -10504,9 +10520,7 @@
           <a:prstGeom prst="rect">
             <a:avLst/>
           </a:prstGeom>
-          <a:solidFill>
-            <a:srgbClr val="F0F0F0"/>
-          </a:solidFill>
+          <a:noFill/>
           <a:ln>
             <a:noFill/>
           </a:ln>
@@ -10526,13 +10540,10 @@
           </a:fontRef>
         </p:style>
         <p:txBody>
-          <a:bodyPr rtlCol="0" anchor="ctr" wrap="square" lIns="1828754" rIns="1828754"/>
+          <a:bodyPr rtlCol="0" anchor="ctr" wrap="square" lIns="609584" rIns="609584"/>
           <a:lstStyle/>
           <a:p>
             <a:pPr algn="l">
-              <a:spcBef>
-                <a:spcPts val="400"/>
-              </a:spcBef>
               <a:defRPr sz="2200" b="1">
                 <a:solidFill>
                   <a:srgbClr val="C7000B"/>
@@ -10554,8 +10565,8 @@
         </p:nvSpPr>
         <p:spPr>
           <a:xfrm>
-            <a:off x="1828754" y="658368"/>
-            <a:ext cx="8534186" cy="274320"/>
+            <a:off x="609584" y="658368"/>
+            <a:ext cx="10972525" cy="274320"/>
           </a:xfrm>
           <a:prstGeom prst="rect">
             <a:avLst/>
@@ -10590,8 +10601,8 @@
         </p:nvSpPr>
         <p:spPr>
           <a:xfrm>
-            <a:off x="1828754" y="1005840"/>
-            <a:ext cx="8534186" cy="274320"/>
+            <a:off x="609584" y="1005840"/>
+            <a:ext cx="10972525" cy="274320"/>
           </a:xfrm>
           <a:prstGeom prst="rect">
             <a:avLst/>
@@ -10629,8 +10640,8 @@
         </p:nvSpPr>
         <p:spPr>
           <a:xfrm>
-            <a:off x="1970990" y="1325880"/>
-            <a:ext cx="1564600" cy="914400"/>
+            <a:off x="792460" y="1325880"/>
+            <a:ext cx="2011629" cy="914400"/>
           </a:xfrm>
           <a:prstGeom prst="roundRect">
             <a:avLst/>
@@ -10674,8 +10685,8 @@
         </p:nvSpPr>
         <p:spPr>
           <a:xfrm>
-            <a:off x="2016710" y="1353312"/>
-            <a:ext cx="1493482" cy="274320"/>
+            <a:off x="838180" y="1353312"/>
+            <a:ext cx="1920191" cy="274320"/>
           </a:xfrm>
           <a:prstGeom prst="rect">
             <a:avLst/>
@@ -10713,8 +10724,8 @@
         </p:nvSpPr>
         <p:spPr>
           <a:xfrm>
-            <a:off x="2016710" y="1664208"/>
-            <a:ext cx="1493482" cy="502920"/>
+            <a:off x="838180" y="1664208"/>
+            <a:ext cx="1920191" cy="502920"/>
           </a:xfrm>
           <a:prstGeom prst="rect">
             <a:avLst/>
@@ -10756,7 +10767,7 @@
         </p:nvSpPr>
         <p:spPr>
           <a:xfrm>
-            <a:off x="3480727" y="1645920"/>
+            <a:off x="2749225" y="1645920"/>
             <a:ext cx="109728" cy="109728"/>
           </a:xfrm>
           <a:prstGeom prst="downArrow">
@@ -10765,8 +10776,10 @@
           <a:solidFill>
             <a:srgbClr val="B5B5B5"/>
           </a:solidFill>
-          <a:ln>
-            <a:noFill/>
+          <a:ln w="6350">
+            <a:solidFill>
+              <a:srgbClr val="CCCCCC"/>
+            </a:solidFill>
           </a:ln>
         </p:spPr>
         <p:style>
@@ -10799,8 +10812,8 @@
         </p:nvSpPr>
         <p:spPr>
           <a:xfrm>
-            <a:off x="3713387" y="1325880"/>
-            <a:ext cx="1564600" cy="914400"/>
+            <a:off x="3032684" y="1325880"/>
+            <a:ext cx="2011629" cy="914400"/>
           </a:xfrm>
           <a:prstGeom prst="roundRect">
             <a:avLst/>
@@ -10844,8 +10857,8 @@
         </p:nvSpPr>
         <p:spPr>
           <a:xfrm>
-            <a:off x="3759107" y="1353312"/>
-            <a:ext cx="1493482" cy="274320"/>
+            <a:off x="3078404" y="1353312"/>
+            <a:ext cx="1920191" cy="274320"/>
           </a:xfrm>
           <a:prstGeom prst="rect">
             <a:avLst/>
@@ -10883,8 +10896,8 @@
         </p:nvSpPr>
         <p:spPr>
           <a:xfrm>
-            <a:off x="3759107" y="1664208"/>
-            <a:ext cx="1493482" cy="502920"/>
+            <a:off x="3078404" y="1664208"/>
+            <a:ext cx="1920191" cy="502920"/>
           </a:xfrm>
           <a:prstGeom prst="rect">
             <a:avLst/>
@@ -10926,8 +10939,8 @@
         </p:nvSpPr>
         <p:spPr>
           <a:xfrm>
-            <a:off x="5455783" y="1325880"/>
-            <a:ext cx="1564600" cy="914400"/>
+            <a:off x="5272908" y="1325880"/>
+            <a:ext cx="2011629" cy="914400"/>
           </a:xfrm>
           <a:prstGeom prst="roundRect">
             <a:avLst/>
@@ -10971,8 +10984,8 @@
         </p:nvSpPr>
         <p:spPr>
           <a:xfrm>
-            <a:off x="5501503" y="1353312"/>
-            <a:ext cx="1493482" cy="274320"/>
+            <a:off x="5318628" y="1353312"/>
+            <a:ext cx="1920191" cy="274320"/>
           </a:xfrm>
           <a:prstGeom prst="rect">
             <a:avLst/>
@@ -11014,8 +11027,8 @@
         </p:nvSpPr>
         <p:spPr>
           <a:xfrm>
-            <a:off x="5501503" y="1664208"/>
-            <a:ext cx="1493482" cy="502920"/>
+            <a:off x="5318628" y="1664208"/>
+            <a:ext cx="1920191" cy="502920"/>
           </a:xfrm>
           <a:prstGeom prst="rect">
             <a:avLst/>
@@ -11057,7 +11070,7 @@
         </p:nvSpPr>
         <p:spPr>
           <a:xfrm>
-            <a:off x="6965520" y="1645920"/>
+            <a:off x="7229673" y="1645920"/>
             <a:ext cx="109728" cy="109728"/>
           </a:xfrm>
           <a:prstGeom prst="downArrow">
@@ -11066,8 +11079,10 @@
           <a:solidFill>
             <a:srgbClr val="B5B5B5"/>
           </a:solidFill>
-          <a:ln>
-            <a:noFill/>
+          <a:ln w="6350">
+            <a:solidFill>
+              <a:srgbClr val="CCCCCC"/>
+            </a:solidFill>
           </a:ln>
         </p:spPr>
         <p:style>
@@ -11100,8 +11115,8 @@
         </p:nvSpPr>
         <p:spPr>
           <a:xfrm>
-            <a:off x="7198180" y="1325880"/>
-            <a:ext cx="1564600" cy="914400"/>
+            <a:off x="7513132" y="1325880"/>
+            <a:ext cx="2011629" cy="914400"/>
           </a:xfrm>
           <a:prstGeom prst="roundRect">
             <a:avLst/>
@@ -11145,8 +11160,8 @@
         </p:nvSpPr>
         <p:spPr>
           <a:xfrm>
-            <a:off x="7243900" y="1353312"/>
-            <a:ext cx="1493482" cy="274320"/>
+            <a:off x="7558852" y="1353312"/>
+            <a:ext cx="1920191" cy="274320"/>
           </a:xfrm>
           <a:prstGeom prst="rect">
             <a:avLst/>
@@ -11184,8 +11199,8 @@
         </p:nvSpPr>
         <p:spPr>
           <a:xfrm>
-            <a:off x="7243900" y="1664208"/>
-            <a:ext cx="1493482" cy="502920"/>
+            <a:off x="7558852" y="1664208"/>
+            <a:ext cx="1920191" cy="502920"/>
           </a:xfrm>
           <a:prstGeom prst="rect">
             <a:avLst/>
@@ -11227,8 +11242,8 @@
         </p:nvSpPr>
         <p:spPr>
           <a:xfrm>
-            <a:off x="8940576" y="1325880"/>
-            <a:ext cx="1564600" cy="914400"/>
+            <a:off x="9753356" y="1325880"/>
+            <a:ext cx="2011629" cy="914400"/>
           </a:xfrm>
           <a:prstGeom prst="roundRect">
             <a:avLst/>
@@ -11272,8 +11287,8 @@
         </p:nvSpPr>
         <p:spPr>
           <a:xfrm>
-            <a:off x="8986296" y="1353312"/>
-            <a:ext cx="1493482" cy="274320"/>
+            <a:off x="9799076" y="1353312"/>
+            <a:ext cx="1920191" cy="274320"/>
           </a:xfrm>
           <a:prstGeom prst="rect">
             <a:avLst/>
@@ -11311,8 +11326,8 @@
         </p:nvSpPr>
         <p:spPr>
           <a:xfrm>
-            <a:off x="8986296" y="1664208"/>
-            <a:ext cx="1493482" cy="502920"/>
+            <a:off x="9799076" y="1664208"/>
+            <a:ext cx="1920191" cy="502920"/>
           </a:xfrm>
           <a:prstGeom prst="rect">
             <a:avLst/>
@@ -11354,8 +11369,8 @@
         </p:nvSpPr>
         <p:spPr>
           <a:xfrm>
-            <a:off x="1970990" y="2331720"/>
-            <a:ext cx="8178595" cy="182880"/>
+            <a:off x="792460" y="2331720"/>
+            <a:ext cx="10515337" cy="182880"/>
           </a:xfrm>
           <a:prstGeom prst="rect">
             <a:avLst/>
@@ -11393,8 +11408,8 @@
         </p:nvSpPr>
         <p:spPr>
           <a:xfrm>
-            <a:off x="1828754" y="2606040"/>
-            <a:ext cx="8534186" cy="274320"/>
+            <a:off x="609584" y="2606040"/>
+            <a:ext cx="10972525" cy="274320"/>
           </a:xfrm>
           <a:prstGeom prst="rect">
             <a:avLst/>
@@ -11432,8 +11447,8 @@
         </p:nvSpPr>
         <p:spPr>
           <a:xfrm>
-            <a:off x="1828754" y="2971800"/>
-            <a:ext cx="8534186" cy="658368"/>
+            <a:off x="609584" y="2971800"/>
+            <a:ext cx="10972525" cy="658368"/>
           </a:xfrm>
           <a:prstGeom prst="roundRect">
             <a:avLst/>
@@ -11477,7 +11492,7 @@
         </p:nvSpPr>
         <p:spPr>
           <a:xfrm>
-            <a:off x="1828754" y="2971800"/>
+            <a:off x="609584" y="2971800"/>
             <a:ext cx="36576" cy="658368"/>
           </a:xfrm>
           <a:prstGeom prst="rect">
@@ -11520,8 +11535,8 @@
         </p:nvSpPr>
         <p:spPr>
           <a:xfrm>
-            <a:off x="2042108" y="2999232"/>
-            <a:ext cx="8107477" cy="228600"/>
+            <a:off x="883897" y="2999232"/>
+            <a:ext cx="10423899" cy="228600"/>
           </a:xfrm>
           <a:prstGeom prst="rect">
             <a:avLst/>
@@ -11559,8 +11574,8 @@
         </p:nvSpPr>
         <p:spPr>
           <a:xfrm>
-            <a:off x="2042108" y="3246120"/>
-            <a:ext cx="8107477" cy="320040"/>
+            <a:off x="883897" y="3246120"/>
+            <a:ext cx="10423899" cy="320040"/>
           </a:xfrm>
           <a:prstGeom prst="rect">
             <a:avLst/>
@@ -11598,8 +11613,8 @@
         </p:nvSpPr>
         <p:spPr>
           <a:xfrm>
-            <a:off x="1828754" y="3749039"/>
-            <a:ext cx="8534186" cy="658368"/>
+            <a:off x="609584" y="3749039"/>
+            <a:ext cx="10972525" cy="658368"/>
           </a:xfrm>
           <a:prstGeom prst="roundRect">
             <a:avLst/>
@@ -11643,7 +11658,7 @@
         </p:nvSpPr>
         <p:spPr>
           <a:xfrm>
-            <a:off x="1828754" y="3749039"/>
+            <a:off x="609584" y="3749039"/>
             <a:ext cx="36576" cy="658368"/>
           </a:xfrm>
           <a:prstGeom prst="rect">
@@ -11686,8 +11701,8 @@
         </p:nvSpPr>
         <p:spPr>
           <a:xfrm>
-            <a:off x="2042108" y="3776472"/>
-            <a:ext cx="8107477" cy="228600"/>
+            <a:off x="883897" y="3776472"/>
+            <a:ext cx="10423899" cy="228600"/>
           </a:xfrm>
           <a:prstGeom prst="rect">
             <a:avLst/>
@@ -11725,8 +11740,8 @@
         </p:nvSpPr>
         <p:spPr>
           <a:xfrm>
-            <a:off x="2042108" y="4023359"/>
-            <a:ext cx="8107477" cy="320040"/>
+            <a:off x="883897" y="4023359"/>
+            <a:ext cx="10423899" cy="320040"/>
           </a:xfrm>
           <a:prstGeom prst="rect">
             <a:avLst/>
@@ -11764,8 +11779,8 @@
         </p:nvSpPr>
         <p:spPr>
           <a:xfrm>
-            <a:off x="1828754" y="4526280"/>
-            <a:ext cx="8534186" cy="658368"/>
+            <a:off x="609584" y="4526280"/>
+            <a:ext cx="10972525" cy="658368"/>
           </a:xfrm>
           <a:prstGeom prst="roundRect">
             <a:avLst/>
@@ -11809,7 +11824,7 @@
         </p:nvSpPr>
         <p:spPr>
           <a:xfrm>
-            <a:off x="1828754" y="4526280"/>
+            <a:off x="609584" y="4526280"/>
             <a:ext cx="36576" cy="658368"/>
           </a:xfrm>
           <a:prstGeom prst="rect">
@@ -11852,8 +11867,8 @@
         </p:nvSpPr>
         <p:spPr>
           <a:xfrm>
-            <a:off x="2042108" y="4553712"/>
-            <a:ext cx="8107477" cy="228600"/>
+            <a:off x="883897" y="4553712"/>
+            <a:ext cx="10423899" cy="228600"/>
           </a:xfrm>
           <a:prstGeom prst="rect">
             <a:avLst/>
@@ -11891,8 +11906,8 @@
         </p:nvSpPr>
         <p:spPr>
           <a:xfrm>
-            <a:off x="2042108" y="4800600"/>
-            <a:ext cx="8107477" cy="320040"/>
+            <a:off x="883897" y="4800600"/>
+            <a:ext cx="10423899" cy="320040"/>
           </a:xfrm>
           <a:prstGeom prst="rect">
             <a:avLst/>
@@ -11930,8 +11945,8 @@
         </p:nvSpPr>
         <p:spPr>
           <a:xfrm>
-            <a:off x="1828754" y="5303520"/>
-            <a:ext cx="8534186" cy="658368"/>
+            <a:off x="609584" y="5303520"/>
+            <a:ext cx="10972525" cy="658368"/>
           </a:xfrm>
           <a:prstGeom prst="roundRect">
             <a:avLst/>
@@ -11975,7 +11990,7 @@
         </p:nvSpPr>
         <p:spPr>
           <a:xfrm>
-            <a:off x="1828754" y="5303520"/>
+            <a:off x="609584" y="5303520"/>
             <a:ext cx="36576" cy="658368"/>
           </a:xfrm>
           <a:prstGeom prst="rect">
@@ -12018,8 +12033,8 @@
         </p:nvSpPr>
         <p:spPr>
           <a:xfrm>
-            <a:off x="2042108" y="5330952"/>
-            <a:ext cx="8107477" cy="228600"/>
+            <a:off x="883897" y="5330952"/>
+            <a:ext cx="10423899" cy="228600"/>
           </a:xfrm>
           <a:prstGeom prst="rect">
             <a:avLst/>
@@ -12057,8 +12072,8 @@
         </p:nvSpPr>
         <p:spPr>
           <a:xfrm>
-            <a:off x="2042108" y="5577840"/>
-            <a:ext cx="8107477" cy="320040"/>
+            <a:off x="883897" y="5577840"/>
+            <a:ext cx="10423899" cy="320040"/>
           </a:xfrm>
           <a:prstGeom prst="rect">
             <a:avLst/>
@@ -12096,8 +12111,8 @@
         </p:nvSpPr>
         <p:spPr>
           <a:xfrm>
-            <a:off x="1828754" y="6400800"/>
-            <a:ext cx="8534186" cy="182880"/>
+            <a:off x="609584" y="6400800"/>
+            <a:ext cx="10972525" cy="182880"/>
           </a:xfrm>
           <a:prstGeom prst="rect">
             <a:avLst/>

--- a/字节跳动_BA画像_v4.0.pptx
+++ b/字节跳动_BA画像_v4.0.pptx
@@ -3307,7 +3307,7 @@
                       <a:pPr>
                         <a:defRPr sz="1000">
                           <a:solidFill>
-                            <a:srgbClr val="FFFFFF"/>
+                            <a:srgbClr val="000000"/>
                           </a:solidFill>
                           <a:latin typeface="PingFang SC"/>
                         </a:defRPr>
@@ -3331,7 +3331,7 @@
                       <a:pPr>
                         <a:defRPr sz="1000">
                           <a:solidFill>
-                            <a:srgbClr val="FFFFFF"/>
+                            <a:srgbClr val="000000"/>
                           </a:solidFill>
                           <a:latin typeface="PingFang SC"/>
                         </a:defRPr>
@@ -3357,7 +3357,7 @@
                       <a:pPr>
                         <a:defRPr sz="1000">
                           <a:solidFill>
-                            <a:srgbClr val="FFFFFF"/>
+                            <a:srgbClr val="000000"/>
                           </a:solidFill>
                           <a:latin typeface="PingFang SC"/>
                         </a:defRPr>
@@ -3377,7 +3377,7 @@
                       <a:pPr>
                         <a:defRPr sz="1000">
                           <a:solidFill>
-                            <a:srgbClr val="FFFFFF"/>
+                            <a:srgbClr val="000000"/>
                           </a:solidFill>
                           <a:latin typeface="PingFang SC"/>
                         </a:defRPr>
@@ -3399,7 +3399,7 @@
                       <a:pPr>
                         <a:defRPr sz="1000">
                           <a:solidFill>
-                            <a:srgbClr val="FFFFFF"/>
+                            <a:srgbClr val="000000"/>
                           </a:solidFill>
                           <a:latin typeface="PingFang SC"/>
                         </a:defRPr>
@@ -3423,7 +3423,7 @@
                       <a:pPr>
                         <a:defRPr sz="1000">
                           <a:solidFill>
-                            <a:srgbClr val="FFFFFF"/>
+                            <a:srgbClr val="000000"/>
                           </a:solidFill>
                           <a:latin typeface="PingFang SC"/>
                         </a:defRPr>
@@ -4179,7 +4179,7 @@
                       <a:pPr>
                         <a:defRPr sz="900">
                           <a:solidFill>
-                            <a:srgbClr val="FFFFFF"/>
+                            <a:srgbClr val="000000"/>
                           </a:solidFill>
                           <a:latin typeface="PingFang SC"/>
                         </a:defRPr>
@@ -4203,7 +4203,7 @@
                       <a:pPr>
                         <a:defRPr sz="900">
                           <a:solidFill>
-                            <a:srgbClr val="FFFFFF"/>
+                            <a:srgbClr val="000000"/>
                           </a:solidFill>
                           <a:latin typeface="PingFang SC"/>
                         </a:defRPr>
@@ -4229,7 +4229,7 @@
                       <a:pPr>
                         <a:defRPr sz="900">
                           <a:solidFill>
-                            <a:srgbClr val="FFFFFF"/>
+                            <a:srgbClr val="000000"/>
                           </a:solidFill>
                           <a:latin typeface="PingFang SC"/>
                         </a:defRPr>
@@ -4249,7 +4249,7 @@
                       <a:pPr>
                         <a:defRPr sz="900">
                           <a:solidFill>
-                            <a:srgbClr val="FFFFFF"/>
+                            <a:srgbClr val="000000"/>
                           </a:solidFill>
                           <a:latin typeface="PingFang SC"/>
                         </a:defRPr>
@@ -4271,7 +4271,7 @@
                       <a:pPr>
                         <a:defRPr sz="900">
                           <a:solidFill>
-                            <a:srgbClr val="FFFFFF"/>
+                            <a:srgbClr val="000000"/>
                           </a:solidFill>
                           <a:latin typeface="PingFang SC"/>
                         </a:defRPr>
@@ -4295,7 +4295,7 @@
                       <a:pPr>
                         <a:defRPr sz="900">
                           <a:solidFill>
-                            <a:srgbClr val="FFFFFF"/>
+                            <a:srgbClr val="000000"/>
                           </a:solidFill>
                           <a:latin typeface="PingFang SC"/>
                         </a:defRPr>
@@ -4321,7 +4321,7 @@
                       <a:pPr>
                         <a:defRPr sz="900">
                           <a:solidFill>
-                            <a:srgbClr val="FFFFFF"/>
+                            <a:srgbClr val="000000"/>
                           </a:solidFill>
                           <a:latin typeface="PingFang SC"/>
                         </a:defRPr>
@@ -4341,7 +4341,7 @@
                       <a:pPr>
                         <a:defRPr sz="900">
                           <a:solidFill>
-                            <a:srgbClr val="FFFFFF"/>
+                            <a:srgbClr val="000000"/>
                           </a:solidFill>
                           <a:latin typeface="PingFang SC"/>
                         </a:defRPr>
@@ -4363,7 +4363,7 @@
                       <a:pPr>
                         <a:defRPr sz="900">
                           <a:solidFill>
-                            <a:srgbClr val="FFFFFF"/>
+                            <a:srgbClr val="000000"/>
                           </a:solidFill>
                           <a:latin typeface="PingFang SC"/>
                         </a:defRPr>
@@ -4387,7 +4387,7 @@
                       <a:pPr>
                         <a:defRPr sz="900">
                           <a:solidFill>
-                            <a:srgbClr val="FFFFFF"/>
+                            <a:srgbClr val="000000"/>
                           </a:solidFill>
                           <a:latin typeface="PingFang SC"/>
                         </a:defRPr>
@@ -4617,7 +4617,7 @@
                       <a:pPr>
                         <a:defRPr sz="900">
                           <a:solidFill>
-                            <a:srgbClr val="FFFFFF"/>
+                            <a:srgbClr val="000000"/>
                           </a:solidFill>
                           <a:latin typeface="PingFang SC"/>
                         </a:defRPr>
@@ -4641,7 +4641,7 @@
                       <a:pPr>
                         <a:defRPr sz="900">
                           <a:solidFill>
-                            <a:srgbClr val="FFFFFF"/>
+                            <a:srgbClr val="000000"/>
                           </a:solidFill>
                           <a:latin typeface="PingFang SC"/>
                         </a:defRPr>
@@ -4665,7 +4665,7 @@
                       <a:pPr>
                         <a:defRPr sz="900">
                           <a:solidFill>
-                            <a:srgbClr val="FFFFFF"/>
+                            <a:srgbClr val="000000"/>
                           </a:solidFill>
                           <a:latin typeface="PingFang SC"/>
                         </a:defRPr>
@@ -4689,7 +4689,7 @@
                       <a:pPr>
                         <a:defRPr sz="900">
                           <a:solidFill>
-                            <a:srgbClr val="FFFFFF"/>
+                            <a:srgbClr val="000000"/>
                           </a:solidFill>
                           <a:latin typeface="PingFang SC"/>
                         </a:defRPr>
@@ -4715,7 +4715,7 @@
                       <a:pPr>
                         <a:defRPr sz="900">
                           <a:solidFill>
-                            <a:srgbClr val="FFFFFF"/>
+                            <a:srgbClr val="000000"/>
                           </a:solidFill>
                           <a:latin typeface="PingFang SC"/>
                         </a:defRPr>
@@ -4735,7 +4735,7 @@
                       <a:pPr>
                         <a:defRPr sz="900">
                           <a:solidFill>
-                            <a:srgbClr val="FFFFFF"/>
+                            <a:srgbClr val="000000"/>
                           </a:solidFill>
                           <a:latin typeface="PingFang SC"/>
                         </a:defRPr>
@@ -4755,7 +4755,7 @@
                       <a:pPr>
                         <a:defRPr sz="900">
                           <a:solidFill>
-                            <a:srgbClr val="FFFFFF"/>
+                            <a:srgbClr val="000000"/>
                           </a:solidFill>
                           <a:latin typeface="PingFang SC"/>
                         </a:defRPr>
@@ -4775,7 +4775,7 @@
                       <a:pPr>
                         <a:defRPr sz="900">
                           <a:solidFill>
-                            <a:srgbClr val="FFFFFF"/>
+                            <a:srgbClr val="000000"/>
                           </a:solidFill>
                           <a:latin typeface="PingFang SC"/>
                         </a:defRPr>
@@ -4937,7 +4937,7 @@
                       <a:pPr>
                         <a:defRPr sz="900">
                           <a:solidFill>
-                            <a:srgbClr val="FFFFFF"/>
+                            <a:srgbClr val="000000"/>
                           </a:solidFill>
                           <a:latin typeface="PingFang SC"/>
                         </a:defRPr>
@@ -4961,7 +4961,7 @@
                       <a:pPr>
                         <a:defRPr sz="900">
                           <a:solidFill>
-                            <a:srgbClr val="FFFFFF"/>
+                            <a:srgbClr val="000000"/>
                           </a:solidFill>
                           <a:latin typeface="PingFang SC"/>
                         </a:defRPr>
@@ -4985,7 +4985,7 @@
                       <a:pPr>
                         <a:defRPr sz="900">
                           <a:solidFill>
-                            <a:srgbClr val="FFFFFF"/>
+                            <a:srgbClr val="000000"/>
                           </a:solidFill>
                           <a:latin typeface="PingFang SC"/>
                         </a:defRPr>
@@ -5011,7 +5011,7 @@
                       <a:pPr>
                         <a:defRPr sz="900">
                           <a:solidFill>
-                            <a:srgbClr val="FFFFFF"/>
+                            <a:srgbClr val="000000"/>
                           </a:solidFill>
                           <a:latin typeface="PingFang SC"/>
                         </a:defRPr>
@@ -5031,7 +5031,7 @@
                       <a:pPr>
                         <a:defRPr sz="900">
                           <a:solidFill>
-                            <a:srgbClr val="FFFFFF"/>
+                            <a:srgbClr val="000000"/>
                           </a:solidFill>
                           <a:latin typeface="PingFang SC"/>
                         </a:defRPr>
@@ -5051,7 +5051,7 @@
                       <a:pPr>
                         <a:defRPr sz="900">
                           <a:solidFill>
-                            <a:srgbClr val="FFFFFF"/>
+                            <a:srgbClr val="000000"/>
                           </a:solidFill>
                           <a:latin typeface="PingFang SC"/>
                         </a:defRPr>
@@ -5073,7 +5073,7 @@
                       <a:pPr>
                         <a:defRPr sz="900">
                           <a:solidFill>
-                            <a:srgbClr val="FFFFFF"/>
+                            <a:srgbClr val="000000"/>
                           </a:solidFill>
                           <a:latin typeface="PingFang SC"/>
                         </a:defRPr>
@@ -5097,7 +5097,7 @@
                       <a:pPr>
                         <a:defRPr sz="900">
                           <a:solidFill>
-                            <a:srgbClr val="FFFFFF"/>
+                            <a:srgbClr val="000000"/>
                           </a:solidFill>
                           <a:latin typeface="PingFang SC"/>
                         </a:defRPr>
@@ -5121,7 +5121,7 @@
                       <a:pPr>
                         <a:defRPr sz="900">
                           <a:solidFill>
-                            <a:srgbClr val="FFFFFF"/>
+                            <a:srgbClr val="000000"/>
                           </a:solidFill>
                           <a:latin typeface="PingFang SC"/>
                         </a:defRPr>
@@ -5147,7 +5147,7 @@
                       <a:pPr>
                         <a:defRPr sz="900">
                           <a:solidFill>
-                            <a:srgbClr val="FFFFFF"/>
+                            <a:srgbClr val="000000"/>
                           </a:solidFill>
                           <a:latin typeface="PingFang SC"/>
                         </a:defRPr>
@@ -5167,7 +5167,7 @@
                       <a:pPr>
                         <a:defRPr sz="900">
                           <a:solidFill>
-                            <a:srgbClr val="FFFFFF"/>
+                            <a:srgbClr val="000000"/>
                           </a:solidFill>
                           <a:latin typeface="PingFang SC"/>
                         </a:defRPr>
@@ -5187,7 +5187,7 @@
                       <a:pPr>
                         <a:defRPr sz="900">
                           <a:solidFill>
-                            <a:srgbClr val="FFFFFF"/>
+                            <a:srgbClr val="000000"/>
                           </a:solidFill>
                           <a:latin typeface="PingFang SC"/>
                         </a:defRPr>
@@ -6951,7 +6951,7 @@
                       <a:pPr>
                         <a:defRPr sz="1000">
                           <a:solidFill>
-                            <a:srgbClr val="FFFFFF"/>
+                            <a:srgbClr val="000000"/>
                           </a:solidFill>
                           <a:latin typeface="PingFang SC"/>
                         </a:defRPr>
@@ -6975,7 +6975,7 @@
                       <a:pPr>
                         <a:defRPr sz="1000">
                           <a:solidFill>
-                            <a:srgbClr val="FFFFFF"/>
+                            <a:srgbClr val="000000"/>
                           </a:solidFill>
                           <a:latin typeface="PingFang SC"/>
                         </a:defRPr>
@@ -6999,7 +6999,7 @@
                       <a:pPr>
                         <a:defRPr sz="1000">
                           <a:solidFill>
-                            <a:srgbClr val="FFFFFF"/>
+                            <a:srgbClr val="000000"/>
                           </a:solidFill>
                           <a:latin typeface="PingFang SC"/>
                         </a:defRPr>
@@ -7023,7 +7023,7 @@
                       <a:pPr>
                         <a:defRPr sz="1000">
                           <a:solidFill>
-                            <a:srgbClr val="FFFFFF"/>
+                            <a:srgbClr val="000000"/>
                           </a:solidFill>
                           <a:latin typeface="PingFang SC"/>
                         </a:defRPr>
@@ -7049,7 +7049,7 @@
                       <a:pPr>
                         <a:defRPr sz="1000">
                           <a:solidFill>
-                            <a:srgbClr val="FFFFFF"/>
+                            <a:srgbClr val="000000"/>
                           </a:solidFill>
                           <a:latin typeface="PingFang SC"/>
                         </a:defRPr>
@@ -7069,7 +7069,7 @@
                       <a:pPr>
                         <a:defRPr sz="1000">
                           <a:solidFill>
-                            <a:srgbClr val="FFFFFF"/>
+                            <a:srgbClr val="000000"/>
                           </a:solidFill>
                           <a:latin typeface="PingFang SC"/>
                         </a:defRPr>
@@ -7089,7 +7089,7 @@
                       <a:pPr>
                         <a:defRPr sz="1000">
                           <a:solidFill>
-                            <a:srgbClr val="FFFFFF"/>
+                            <a:srgbClr val="000000"/>
                           </a:solidFill>
                           <a:latin typeface="PingFang SC"/>
                         </a:defRPr>
@@ -7109,7 +7109,7 @@
                       <a:pPr>
                         <a:defRPr sz="1000">
                           <a:solidFill>
-                            <a:srgbClr val="FFFFFF"/>
+                            <a:srgbClr val="000000"/>
                           </a:solidFill>
                           <a:latin typeface="PingFang SC"/>
                         </a:defRPr>
@@ -7131,7 +7131,7 @@
                       <a:pPr>
                         <a:defRPr sz="1000">
                           <a:solidFill>
-                            <a:srgbClr val="FFFFFF"/>
+                            <a:srgbClr val="000000"/>
                           </a:solidFill>
                           <a:latin typeface="PingFang SC"/>
                         </a:defRPr>
@@ -7155,7 +7155,7 @@
                       <a:pPr>
                         <a:defRPr sz="1000">
                           <a:solidFill>
-                            <a:srgbClr val="FFFFFF"/>
+                            <a:srgbClr val="000000"/>
                           </a:solidFill>
                           <a:latin typeface="PingFang SC"/>
                         </a:defRPr>
@@ -7179,7 +7179,7 @@
                       <a:pPr>
                         <a:defRPr sz="1000">
                           <a:solidFill>
-                            <a:srgbClr val="FFFFFF"/>
+                            <a:srgbClr val="000000"/>
                           </a:solidFill>
                           <a:latin typeface="PingFang SC"/>
                         </a:defRPr>
@@ -7203,7 +7203,7 @@
                       <a:pPr>
                         <a:defRPr sz="1000">
                           <a:solidFill>
-                            <a:srgbClr val="FFFFFF"/>
+                            <a:srgbClr val="000000"/>
                           </a:solidFill>
                           <a:latin typeface="PingFang SC"/>
                         </a:defRPr>
@@ -7229,7 +7229,7 @@
                       <a:pPr>
                         <a:defRPr sz="1000">
                           <a:solidFill>
-                            <a:srgbClr val="FFFFFF"/>
+                            <a:srgbClr val="000000"/>
                           </a:solidFill>
                           <a:latin typeface="PingFang SC"/>
                         </a:defRPr>
@@ -7249,7 +7249,7 @@
                       <a:pPr>
                         <a:defRPr sz="1000">
                           <a:solidFill>
-                            <a:srgbClr val="FFFFFF"/>
+                            <a:srgbClr val="000000"/>
                           </a:solidFill>
                           <a:latin typeface="PingFang SC"/>
                         </a:defRPr>
@@ -7269,7 +7269,7 @@
                       <a:pPr>
                         <a:defRPr sz="1000">
                           <a:solidFill>
-                            <a:srgbClr val="FFFFFF"/>
+                            <a:srgbClr val="000000"/>
                           </a:solidFill>
                           <a:latin typeface="PingFang SC"/>
                         </a:defRPr>
@@ -7289,7 +7289,7 @@
                       <a:pPr>
                         <a:defRPr sz="1000">
                           <a:solidFill>
-                            <a:srgbClr val="FFFFFF"/>
+                            <a:srgbClr val="000000"/>
                           </a:solidFill>
                           <a:latin typeface="PingFang SC"/>
                         </a:defRPr>
@@ -7476,7 +7476,7 @@
                       <a:pPr>
                         <a:defRPr sz="1000">
                           <a:solidFill>
-                            <a:srgbClr val="FFFFFF"/>
+                            <a:srgbClr val="000000"/>
                           </a:solidFill>
                           <a:latin typeface="PingFang SC"/>
                         </a:defRPr>
@@ -7500,7 +7500,7 @@
                       <a:pPr>
                         <a:defRPr sz="1000">
                           <a:solidFill>
-                            <a:srgbClr val="FFFFFF"/>
+                            <a:srgbClr val="000000"/>
                           </a:solidFill>
                           <a:latin typeface="PingFang SC"/>
                         </a:defRPr>
@@ -7524,7 +7524,7 @@
                       <a:pPr>
                         <a:defRPr sz="1000">
                           <a:solidFill>
-                            <a:srgbClr val="FFFFFF"/>
+                            <a:srgbClr val="000000"/>
                           </a:solidFill>
                           <a:latin typeface="PingFang SC"/>
                         </a:defRPr>
@@ -7548,7 +7548,7 @@
                       <a:pPr>
                         <a:defRPr sz="1000">
                           <a:solidFill>
-                            <a:srgbClr val="FFFFFF"/>
+                            <a:srgbClr val="000000"/>
                           </a:solidFill>
                           <a:latin typeface="PingFang SC"/>
                         </a:defRPr>
@@ -7574,7 +7574,7 @@
                       <a:pPr>
                         <a:defRPr sz="1000">
                           <a:solidFill>
-                            <a:srgbClr val="FFFFFF"/>
+                            <a:srgbClr val="000000"/>
                           </a:solidFill>
                           <a:latin typeface="PingFang SC"/>
                         </a:defRPr>
@@ -7594,7 +7594,7 @@
                       <a:pPr>
                         <a:defRPr sz="1000">
                           <a:solidFill>
-                            <a:srgbClr val="FFFFFF"/>
+                            <a:srgbClr val="000000"/>
                           </a:solidFill>
                           <a:latin typeface="PingFang SC"/>
                         </a:defRPr>
@@ -7614,7 +7614,7 @@
                       <a:pPr>
                         <a:defRPr sz="1000">
                           <a:solidFill>
-                            <a:srgbClr val="FFFFFF"/>
+                            <a:srgbClr val="000000"/>
                           </a:solidFill>
                           <a:latin typeface="PingFang SC"/>
                         </a:defRPr>
@@ -7634,7 +7634,7 @@
                       <a:pPr>
                         <a:defRPr sz="1000">
                           <a:solidFill>
-                            <a:srgbClr val="FFFFFF"/>
+                            <a:srgbClr val="000000"/>
                           </a:solidFill>
                           <a:latin typeface="PingFang SC"/>
                         </a:defRPr>
@@ -7821,7 +7821,7 @@
                       <a:pPr>
                         <a:defRPr sz="1000">
                           <a:solidFill>
-                            <a:srgbClr val="FFFFFF"/>
+                            <a:srgbClr val="000000"/>
                           </a:solidFill>
                           <a:latin typeface="PingFang SC"/>
                         </a:defRPr>
@@ -7845,7 +7845,7 @@
                       <a:pPr>
                         <a:defRPr sz="1000">
                           <a:solidFill>
-                            <a:srgbClr val="FFFFFF"/>
+                            <a:srgbClr val="000000"/>
                           </a:solidFill>
                           <a:latin typeface="PingFang SC"/>
                         </a:defRPr>
@@ -7869,7 +7869,7 @@
                       <a:pPr>
                         <a:defRPr sz="1000">
                           <a:solidFill>
-                            <a:srgbClr val="FFFFFF"/>
+                            <a:srgbClr val="000000"/>
                           </a:solidFill>
                           <a:latin typeface="PingFang SC"/>
                         </a:defRPr>
@@ -7893,7 +7893,7 @@
                       <a:pPr>
                         <a:defRPr sz="1000">
                           <a:solidFill>
-                            <a:srgbClr val="FFFFFF"/>
+                            <a:srgbClr val="000000"/>
                           </a:solidFill>
                           <a:latin typeface="PingFang SC"/>
                         </a:defRPr>
@@ -7919,7 +7919,7 @@
                       <a:pPr>
                         <a:defRPr sz="1000">
                           <a:solidFill>
-                            <a:srgbClr val="FFFFFF"/>
+                            <a:srgbClr val="000000"/>
                           </a:solidFill>
                           <a:latin typeface="PingFang SC"/>
                         </a:defRPr>
@@ -7939,7 +7939,7 @@
                       <a:pPr>
                         <a:defRPr sz="1000">
                           <a:solidFill>
-                            <a:srgbClr val="FFFFFF"/>
+                            <a:srgbClr val="000000"/>
                           </a:solidFill>
                           <a:latin typeface="PingFang SC"/>
                         </a:defRPr>
@@ -7959,7 +7959,7 @@
                       <a:pPr>
                         <a:defRPr sz="1000">
                           <a:solidFill>
-                            <a:srgbClr val="FFFFFF"/>
+                            <a:srgbClr val="000000"/>
                           </a:solidFill>
                           <a:latin typeface="PingFang SC"/>
                         </a:defRPr>
@@ -7979,7 +7979,7 @@
                       <a:pPr>
                         <a:defRPr sz="1000">
                           <a:solidFill>
-                            <a:srgbClr val="FFFFFF"/>
+                            <a:srgbClr val="000000"/>
                           </a:solidFill>
                           <a:latin typeface="PingFang SC"/>
                         </a:defRPr>
@@ -8357,7 +8357,7 @@
                       <a:pPr>
                         <a:defRPr sz="1000">
                           <a:solidFill>
-                            <a:srgbClr val="FFFFFF"/>
+                            <a:srgbClr val="000000"/>
                           </a:solidFill>
                           <a:latin typeface="PingFang SC"/>
                         </a:defRPr>
@@ -8381,7 +8381,7 @@
                       <a:pPr>
                         <a:defRPr sz="1000">
                           <a:solidFill>
-                            <a:srgbClr val="FFFFFF"/>
+                            <a:srgbClr val="000000"/>
                           </a:solidFill>
                           <a:latin typeface="PingFang SC"/>
                         </a:defRPr>
@@ -8405,7 +8405,7 @@
                       <a:pPr>
                         <a:defRPr sz="1000">
                           <a:solidFill>
-                            <a:srgbClr val="FFFFFF"/>
+                            <a:srgbClr val="000000"/>
                           </a:solidFill>
                           <a:latin typeface="PingFang SC"/>
                         </a:defRPr>
@@ -8429,7 +8429,7 @@
                       <a:pPr>
                         <a:defRPr sz="1000">
                           <a:solidFill>
-                            <a:srgbClr val="FFFFFF"/>
+                            <a:srgbClr val="000000"/>
                           </a:solidFill>
                           <a:latin typeface="PingFang SC"/>
                         </a:defRPr>
@@ -8455,7 +8455,7 @@
                       <a:pPr>
                         <a:defRPr sz="1000">
                           <a:solidFill>
-                            <a:srgbClr val="FFFFFF"/>
+                            <a:srgbClr val="000000"/>
                           </a:solidFill>
                           <a:latin typeface="PingFang SC"/>
                         </a:defRPr>
@@ -8475,7 +8475,7 @@
                       <a:pPr>
                         <a:defRPr sz="1000">
                           <a:solidFill>
-                            <a:srgbClr val="FFFFFF"/>
+                            <a:srgbClr val="000000"/>
                           </a:solidFill>
                           <a:latin typeface="PingFang SC"/>
                         </a:defRPr>
@@ -8495,7 +8495,7 @@
                       <a:pPr>
                         <a:defRPr sz="1000">
                           <a:solidFill>
-                            <a:srgbClr val="FFFFFF"/>
+                            <a:srgbClr val="000000"/>
                           </a:solidFill>
                           <a:latin typeface="PingFang SC"/>
                         </a:defRPr>
@@ -8515,7 +8515,7 @@
                       <a:pPr>
                         <a:defRPr sz="1000">
                           <a:solidFill>
-                            <a:srgbClr val="FFFFFF"/>
+                            <a:srgbClr val="000000"/>
                           </a:solidFill>
                           <a:latin typeface="PingFang SC"/>
                         </a:defRPr>
@@ -8537,7 +8537,7 @@
                       <a:pPr>
                         <a:defRPr sz="1000">
                           <a:solidFill>
-                            <a:srgbClr val="FFFFFF"/>
+                            <a:srgbClr val="000000"/>
                           </a:solidFill>
                           <a:latin typeface="PingFang SC"/>
                         </a:defRPr>
@@ -8561,7 +8561,7 @@
                       <a:pPr>
                         <a:defRPr sz="1000">
                           <a:solidFill>
-                            <a:srgbClr val="FFFFFF"/>
+                            <a:srgbClr val="000000"/>
                           </a:solidFill>
                           <a:latin typeface="PingFang SC"/>
                         </a:defRPr>
@@ -8585,7 +8585,7 @@
                       <a:pPr>
                         <a:defRPr sz="1000">
                           <a:solidFill>
-                            <a:srgbClr val="FFFFFF"/>
+                            <a:srgbClr val="000000"/>
                           </a:solidFill>
                           <a:latin typeface="PingFang SC"/>
                         </a:defRPr>
@@ -8609,7 +8609,7 @@
                       <a:pPr>
                         <a:defRPr sz="1000">
                           <a:solidFill>
-                            <a:srgbClr val="FFFFFF"/>
+                            <a:srgbClr val="000000"/>
                           </a:solidFill>
                           <a:latin typeface="PingFang SC"/>
                         </a:defRPr>
@@ -8635,7 +8635,7 @@
                       <a:pPr>
                         <a:defRPr sz="1000">
                           <a:solidFill>
-                            <a:srgbClr val="FFFFFF"/>
+                            <a:srgbClr val="000000"/>
                           </a:solidFill>
                           <a:latin typeface="PingFang SC"/>
                         </a:defRPr>
@@ -8655,7 +8655,7 @@
                       <a:pPr>
                         <a:defRPr sz="1000">
                           <a:solidFill>
-                            <a:srgbClr val="FFFFFF"/>
+                            <a:srgbClr val="000000"/>
                           </a:solidFill>
                           <a:latin typeface="PingFang SC"/>
                         </a:defRPr>
@@ -8675,7 +8675,7 @@
                       <a:pPr>
                         <a:defRPr sz="1000">
                           <a:solidFill>
-                            <a:srgbClr val="FFFFFF"/>
+                            <a:srgbClr val="000000"/>
                           </a:solidFill>
                           <a:latin typeface="PingFang SC"/>
                         </a:defRPr>
@@ -8695,7 +8695,7 @@
                       <a:pPr>
                         <a:defRPr sz="1000">
                           <a:solidFill>
-                            <a:srgbClr val="FFFFFF"/>
+                            <a:srgbClr val="000000"/>
                           </a:solidFill>
                           <a:latin typeface="PingFang SC"/>
                         </a:defRPr>
@@ -8717,7 +8717,7 @@
                       <a:pPr>
                         <a:defRPr sz="1000">
                           <a:solidFill>
-                            <a:srgbClr val="FFFFFF"/>
+                            <a:srgbClr val="000000"/>
                           </a:solidFill>
                           <a:latin typeface="PingFang SC"/>
                         </a:defRPr>
@@ -8741,7 +8741,7 @@
                       <a:pPr>
                         <a:defRPr sz="1000">
                           <a:solidFill>
-                            <a:srgbClr val="FFFFFF"/>
+                            <a:srgbClr val="000000"/>
                           </a:solidFill>
                           <a:latin typeface="PingFang SC"/>
                         </a:defRPr>
@@ -8765,7 +8765,7 @@
                       <a:pPr>
                         <a:defRPr sz="1000">
                           <a:solidFill>
-                            <a:srgbClr val="FFFFFF"/>
+                            <a:srgbClr val="000000"/>
                           </a:solidFill>
                           <a:latin typeface="PingFang SC"/>
                         </a:defRPr>
@@ -8789,7 +8789,7 @@
                       <a:pPr>
                         <a:defRPr sz="1000">
                           <a:solidFill>
-                            <a:srgbClr val="FFFFFF"/>
+                            <a:srgbClr val="000000"/>
                           </a:solidFill>
                           <a:latin typeface="PingFang SC"/>
                         </a:defRPr>
@@ -8815,7 +8815,7 @@
                       <a:pPr>
                         <a:defRPr sz="1000">
                           <a:solidFill>
-                            <a:srgbClr val="FFFFFF"/>
+                            <a:srgbClr val="000000"/>
                           </a:solidFill>
                           <a:latin typeface="PingFang SC"/>
                         </a:defRPr>
@@ -8835,7 +8835,7 @@
                       <a:pPr>
                         <a:defRPr sz="1000">
                           <a:solidFill>
-                            <a:srgbClr val="FFFFFF"/>
+                            <a:srgbClr val="000000"/>
                           </a:solidFill>
                           <a:latin typeface="PingFang SC"/>
                         </a:defRPr>
@@ -8855,7 +8855,7 @@
                       <a:pPr>
                         <a:defRPr sz="1000">
                           <a:solidFill>
-                            <a:srgbClr val="FFFFFF"/>
+                            <a:srgbClr val="000000"/>
                           </a:solidFill>
                           <a:latin typeface="PingFang SC"/>
                         </a:defRPr>
@@ -8875,7 +8875,7 @@
                       <a:pPr>
                         <a:defRPr sz="1000">
                           <a:solidFill>
-                            <a:srgbClr val="FFFFFF"/>
+                            <a:srgbClr val="000000"/>
                           </a:solidFill>
                           <a:latin typeface="PingFang SC"/>
                         </a:defRPr>
@@ -8897,7 +8897,7 @@
                       <a:pPr>
                         <a:defRPr sz="1000">
                           <a:solidFill>
-                            <a:srgbClr val="FFFFFF"/>
+                            <a:srgbClr val="000000"/>
                           </a:solidFill>
                           <a:latin typeface="PingFang SC"/>
                         </a:defRPr>
@@ -8921,7 +8921,7 @@
                       <a:pPr>
                         <a:defRPr sz="1000">
                           <a:solidFill>
-                            <a:srgbClr val="FFFFFF"/>
+                            <a:srgbClr val="000000"/>
                           </a:solidFill>
                           <a:latin typeface="PingFang SC"/>
                         </a:defRPr>
@@ -8945,7 +8945,7 @@
                       <a:pPr>
                         <a:defRPr sz="1000">
                           <a:solidFill>
-                            <a:srgbClr val="FFFFFF"/>
+                            <a:srgbClr val="000000"/>
                           </a:solidFill>
                           <a:latin typeface="PingFang SC"/>
                         </a:defRPr>
@@ -8969,7 +8969,7 @@
                       <a:pPr>
                         <a:defRPr sz="1000">
                           <a:solidFill>
-                            <a:srgbClr val="FFFFFF"/>
+                            <a:srgbClr val="000000"/>
                           </a:solidFill>
                           <a:latin typeface="PingFang SC"/>
                         </a:defRPr>
@@ -8995,7 +8995,7 @@
                       <a:pPr>
                         <a:defRPr sz="1000">
                           <a:solidFill>
-                            <a:srgbClr val="FFFFFF"/>
+                            <a:srgbClr val="000000"/>
                           </a:solidFill>
                           <a:latin typeface="PingFang SC"/>
                         </a:defRPr>
@@ -9015,7 +9015,7 @@
                       <a:pPr>
                         <a:defRPr sz="1000">
                           <a:solidFill>
-                            <a:srgbClr val="FFFFFF"/>
+                            <a:srgbClr val="000000"/>
                           </a:solidFill>
                           <a:latin typeface="PingFang SC"/>
                         </a:defRPr>
@@ -9035,7 +9035,7 @@
                       <a:pPr>
                         <a:defRPr sz="1000">
                           <a:solidFill>
-                            <a:srgbClr val="FFFFFF"/>
+                            <a:srgbClr val="000000"/>
                           </a:solidFill>
                           <a:latin typeface="PingFang SC"/>
                         </a:defRPr>
@@ -9055,7 +9055,7 @@
                       <a:pPr>
                         <a:defRPr sz="1000">
                           <a:solidFill>
-                            <a:srgbClr val="FFFFFF"/>
+                            <a:srgbClr val="000000"/>
                           </a:solidFill>
                           <a:latin typeface="PingFang SC"/>
                         </a:defRPr>
@@ -9267,7 +9267,7 @@
                       <a:pPr>
                         <a:defRPr sz="900">
                           <a:solidFill>
-                            <a:srgbClr val="FFFFFF"/>
+                            <a:srgbClr val="000000"/>
                           </a:solidFill>
                           <a:latin typeface="PingFang SC"/>
                         </a:defRPr>
@@ -9291,7 +9291,7 @@
                       <a:pPr>
                         <a:defRPr sz="900">
                           <a:solidFill>
-                            <a:srgbClr val="FFFFFF"/>
+                            <a:srgbClr val="000000"/>
                           </a:solidFill>
                           <a:latin typeface="PingFang SC"/>
                         </a:defRPr>
@@ -9315,7 +9315,7 @@
                       <a:pPr>
                         <a:defRPr sz="900">
                           <a:solidFill>
-                            <a:srgbClr val="FFFFFF"/>
+                            <a:srgbClr val="000000"/>
                           </a:solidFill>
                           <a:latin typeface="PingFang SC"/>
                         </a:defRPr>
@@ -9339,7 +9339,7 @@
                       <a:pPr>
                         <a:defRPr sz="900">
                           <a:solidFill>
-                            <a:srgbClr val="FFFFFF"/>
+                            <a:srgbClr val="000000"/>
                           </a:solidFill>
                           <a:latin typeface="PingFang SC"/>
                         </a:defRPr>
@@ -9363,7 +9363,7 @@
                       <a:pPr>
                         <a:defRPr sz="900">
                           <a:solidFill>
-                            <a:srgbClr val="FFFFFF"/>
+                            <a:srgbClr val="000000"/>
                           </a:solidFill>
                           <a:latin typeface="PingFang SC"/>
                         </a:defRPr>
@@ -9389,7 +9389,7 @@
                       <a:pPr>
                         <a:defRPr sz="900">
                           <a:solidFill>
-                            <a:srgbClr val="FFFFFF"/>
+                            <a:srgbClr val="000000"/>
                           </a:solidFill>
                           <a:latin typeface="PingFang SC"/>
                         </a:defRPr>
@@ -9409,7 +9409,7 @@
                       <a:pPr>
                         <a:defRPr sz="900">
                           <a:solidFill>
-                            <a:srgbClr val="FFFFFF"/>
+                            <a:srgbClr val="000000"/>
                           </a:solidFill>
                           <a:latin typeface="PingFang SC"/>
                         </a:defRPr>
@@ -9429,7 +9429,7 @@
                       <a:pPr>
                         <a:defRPr sz="900">
                           <a:solidFill>
-                            <a:srgbClr val="FFFFFF"/>
+                            <a:srgbClr val="000000"/>
                           </a:solidFill>
                           <a:latin typeface="PingFang SC"/>
                         </a:defRPr>
@@ -9449,7 +9449,7 @@
                       <a:pPr>
                         <a:defRPr sz="900">
                           <a:solidFill>
-                            <a:srgbClr val="FFFFFF"/>
+                            <a:srgbClr val="000000"/>
                           </a:solidFill>
                           <a:latin typeface="PingFang SC"/>
                         </a:defRPr>
@@ -9469,7 +9469,7 @@
                       <a:pPr>
                         <a:defRPr sz="900">
                           <a:solidFill>
-                            <a:srgbClr val="FFFFFF"/>
+                            <a:srgbClr val="000000"/>
                           </a:solidFill>
                           <a:latin typeface="PingFang SC"/>
                         </a:defRPr>
@@ -9491,7 +9491,7 @@
                       <a:pPr>
                         <a:defRPr sz="900">
                           <a:solidFill>
-                            <a:srgbClr val="FFFFFF"/>
+                            <a:srgbClr val="000000"/>
                           </a:solidFill>
                           <a:latin typeface="PingFang SC"/>
                         </a:defRPr>
@@ -9515,7 +9515,7 @@
                       <a:pPr>
                         <a:defRPr sz="900">
                           <a:solidFill>
-                            <a:srgbClr val="FFFFFF"/>
+                            <a:srgbClr val="000000"/>
                           </a:solidFill>
                           <a:latin typeface="PingFang SC"/>
                         </a:defRPr>
@@ -9539,7 +9539,7 @@
                       <a:pPr>
                         <a:defRPr sz="900">
                           <a:solidFill>
-                            <a:srgbClr val="FFFFFF"/>
+                            <a:srgbClr val="000000"/>
                           </a:solidFill>
                           <a:latin typeface="PingFang SC"/>
                         </a:defRPr>
@@ -9563,7 +9563,7 @@
                       <a:pPr>
                         <a:defRPr sz="900">
                           <a:solidFill>
-                            <a:srgbClr val="FFFFFF"/>
+                            <a:srgbClr val="000000"/>
                           </a:solidFill>
                           <a:latin typeface="PingFang SC"/>
                         </a:defRPr>
@@ -9587,7 +9587,7 @@
                       <a:pPr>
                         <a:defRPr sz="900">
                           <a:solidFill>
-                            <a:srgbClr val="FFFFFF"/>
+                            <a:srgbClr val="000000"/>
                           </a:solidFill>
                           <a:latin typeface="PingFang SC"/>
                         </a:defRPr>
@@ -9613,7 +9613,7 @@
                       <a:pPr>
                         <a:defRPr sz="900">
                           <a:solidFill>
-                            <a:srgbClr val="FFFFFF"/>
+                            <a:srgbClr val="000000"/>
                           </a:solidFill>
                           <a:latin typeface="PingFang SC"/>
                         </a:defRPr>
@@ -9633,7 +9633,7 @@
                       <a:pPr>
                         <a:defRPr sz="900">
                           <a:solidFill>
-                            <a:srgbClr val="FFFFFF"/>
+                            <a:srgbClr val="000000"/>
                           </a:solidFill>
                           <a:latin typeface="PingFang SC"/>
                         </a:defRPr>
@@ -9653,7 +9653,7 @@
                       <a:pPr>
                         <a:defRPr sz="900">
                           <a:solidFill>
-                            <a:srgbClr val="FFFFFF"/>
+                            <a:srgbClr val="000000"/>
                           </a:solidFill>
                           <a:latin typeface="PingFang SC"/>
                         </a:defRPr>
@@ -9673,7 +9673,7 @@
                       <a:pPr>
                         <a:defRPr sz="900">
                           <a:solidFill>
-                            <a:srgbClr val="FFFFFF"/>
+                            <a:srgbClr val="000000"/>
                           </a:solidFill>
                           <a:latin typeface="PingFang SC"/>
                         </a:defRPr>
@@ -9693,7 +9693,7 @@
                       <a:pPr>
                         <a:defRPr sz="900">
                           <a:solidFill>
-                            <a:srgbClr val="FFFFFF"/>
+                            <a:srgbClr val="000000"/>
                           </a:solidFill>
                           <a:latin typeface="PingFang SC"/>
                         </a:defRPr>
@@ -9715,7 +9715,7 @@
                       <a:pPr>
                         <a:defRPr sz="900">
                           <a:solidFill>
-                            <a:srgbClr val="FFFFFF"/>
+                            <a:srgbClr val="000000"/>
                           </a:solidFill>
                           <a:latin typeface="PingFang SC"/>
                         </a:defRPr>
@@ -9739,7 +9739,7 @@
                       <a:pPr>
                         <a:defRPr sz="900">
                           <a:solidFill>
-                            <a:srgbClr val="FFFFFF"/>
+                            <a:srgbClr val="000000"/>
                           </a:solidFill>
                           <a:latin typeface="PingFang SC"/>
                         </a:defRPr>
@@ -9763,7 +9763,7 @@
                       <a:pPr>
                         <a:defRPr sz="900">
                           <a:solidFill>
-                            <a:srgbClr val="FFFFFF"/>
+                            <a:srgbClr val="000000"/>
                           </a:solidFill>
                           <a:latin typeface="PingFang SC"/>
                         </a:defRPr>
@@ -9787,7 +9787,7 @@
                       <a:pPr>
                         <a:defRPr sz="900">
                           <a:solidFill>
-                            <a:srgbClr val="FFFFFF"/>
+                            <a:srgbClr val="000000"/>
                           </a:solidFill>
                           <a:latin typeface="PingFang SC"/>
                         </a:defRPr>
@@ -9811,7 +9811,7 @@
                       <a:pPr>
                         <a:defRPr sz="900">
                           <a:solidFill>
-                            <a:srgbClr val="FFFFFF"/>
+                            <a:srgbClr val="000000"/>
                           </a:solidFill>
                           <a:latin typeface="PingFang SC"/>
                         </a:defRPr>
@@ -9837,7 +9837,7 @@
                       <a:pPr>
                         <a:defRPr sz="900">
                           <a:solidFill>
-                            <a:srgbClr val="FFFFFF"/>
+                            <a:srgbClr val="000000"/>
                           </a:solidFill>
                           <a:latin typeface="PingFang SC"/>
                         </a:defRPr>
@@ -9857,7 +9857,7 @@
                       <a:pPr>
                         <a:defRPr sz="900">
                           <a:solidFill>
-                            <a:srgbClr val="FFFFFF"/>
+                            <a:srgbClr val="000000"/>
                           </a:solidFill>
                           <a:latin typeface="PingFang SC"/>
                         </a:defRPr>
@@ -9877,7 +9877,7 @@
                       <a:pPr>
                         <a:defRPr sz="900">
                           <a:solidFill>
-                            <a:srgbClr val="FFFFFF"/>
+                            <a:srgbClr val="000000"/>
                           </a:solidFill>
                           <a:latin typeface="PingFang SC"/>
                         </a:defRPr>
@@ -9897,7 +9897,7 @@
                       <a:pPr>
                         <a:defRPr sz="900">
                           <a:solidFill>
-                            <a:srgbClr val="FFFFFF"/>
+                            <a:srgbClr val="000000"/>
                           </a:solidFill>
                           <a:latin typeface="PingFang SC"/>
                         </a:defRPr>
@@ -9917,7 +9917,7 @@
                       <a:pPr>
                         <a:defRPr sz="900">
                           <a:solidFill>
-                            <a:srgbClr val="FFFFFF"/>
+                            <a:srgbClr val="000000"/>
                           </a:solidFill>
                           <a:latin typeface="PingFang SC"/>
                         </a:defRPr>

--- a/字节跳动_BA画像_v4.0.pptx
+++ b/字节跳动_BA画像_v4.0.pptx
@@ -3142,7 +3142,7 @@
                 <a:solidFill>
                   <a:srgbClr val="C7000B"/>
                 </a:solidFill>
-                <a:latin typeface="PingFang SC"/>
+                <a:latin typeface="Microsoft YaHei"/>
               </a:defRPr>
             </a:pPr>
             <a:r>
@@ -3178,7 +3178,7 @@
                 <a:solidFill>
                   <a:srgbClr val="666666"/>
                 </a:solidFill>
-                <a:latin typeface="PingFang SC"/>
+                <a:latin typeface="Microsoft YaHei"/>
               </a:defRPr>
             </a:pPr>
             <a:r>
@@ -3214,7 +3214,7 @@
                 <a:solidFill>
                   <a:srgbClr val="C7000B"/>
                 </a:solidFill>
-                <a:latin typeface="PingFang SC"/>
+                <a:latin typeface="Microsoft YaHei"/>
               </a:defRPr>
               <a:lnSpc>
                 <a:spcPct val="130000"/>
@@ -3259,7 +3259,7 @@
                           <a:solidFill>
                             <a:srgbClr val="FFFFFF"/>
                           </a:solidFill>
-                          <a:latin typeface="PingFang SC"/>
+                          <a:latin typeface="Microsoft YaHei"/>
                         </a:defRPr>
                       </a:pPr>
                       <a:r>
@@ -3283,7 +3283,7 @@
                           <a:solidFill>
                             <a:srgbClr val="FFFFFF"/>
                           </a:solidFill>
-                          <a:latin typeface="PingFang SC"/>
+                          <a:latin typeface="Microsoft YaHei"/>
                         </a:defRPr>
                       </a:pPr>
                       <a:r>
@@ -3309,7 +3309,7 @@
                           <a:solidFill>
                             <a:srgbClr val="000000"/>
                           </a:solidFill>
-                          <a:latin typeface="PingFang SC"/>
+                          <a:latin typeface="Microsoft YaHei"/>
                         </a:defRPr>
                       </a:pPr>
                       <a:r>
@@ -3333,7 +3333,7 @@
                           <a:solidFill>
                             <a:srgbClr val="000000"/>
                           </a:solidFill>
-                          <a:latin typeface="PingFang SC"/>
+                          <a:latin typeface="Microsoft YaHei"/>
                         </a:defRPr>
                       </a:pPr>
                       <a:r>
@@ -3359,7 +3359,7 @@
                           <a:solidFill>
                             <a:srgbClr val="000000"/>
                           </a:solidFill>
-                          <a:latin typeface="PingFang SC"/>
+                          <a:latin typeface="Microsoft YaHei"/>
                         </a:defRPr>
                       </a:pPr>
                       <a:r>
@@ -3379,7 +3379,7 @@
                           <a:solidFill>
                             <a:srgbClr val="000000"/>
                           </a:solidFill>
-                          <a:latin typeface="PingFang SC"/>
+                          <a:latin typeface="Microsoft YaHei"/>
                         </a:defRPr>
                       </a:pPr>
                       <a:r>
@@ -3401,7 +3401,7 @@
                           <a:solidFill>
                             <a:srgbClr val="000000"/>
                           </a:solidFill>
-                          <a:latin typeface="PingFang SC"/>
+                          <a:latin typeface="Microsoft YaHei"/>
                         </a:defRPr>
                       </a:pPr>
                       <a:r>
@@ -3425,7 +3425,7 @@
                           <a:solidFill>
                             <a:srgbClr val="000000"/>
                           </a:solidFill>
-                          <a:latin typeface="PingFang SC"/>
+                          <a:latin typeface="Microsoft YaHei"/>
                         </a:defRPr>
                       </a:pPr>
                       <a:r>
@@ -3516,7 +3516,7 @@
                 <a:solidFill>
                   <a:srgbClr val="C7000B"/>
                 </a:solidFill>
-                <a:latin typeface="PingFang SC"/>
+                <a:latin typeface="Microsoft YaHei"/>
               </a:defRPr>
               <a:lnSpc>
                 <a:spcPct val="130000"/>
@@ -3555,7 +3555,7 @@
                 <a:solidFill>
                   <a:srgbClr val="666666"/>
                 </a:solidFill>
-                <a:latin typeface="PingFang SC"/>
+                <a:latin typeface="Microsoft YaHei"/>
               </a:defRPr>
               <a:lnSpc>
                 <a:spcPct val="130000"/>
@@ -3639,7 +3639,7 @@
                 <a:solidFill>
                   <a:srgbClr val="C7000B"/>
                 </a:solidFill>
-                <a:latin typeface="PingFang SC"/>
+                <a:latin typeface="Microsoft YaHei"/>
               </a:defRPr>
               <a:lnSpc>
                 <a:spcPct val="130000"/>
@@ -3678,7 +3678,7 @@
                 <a:solidFill>
                   <a:srgbClr val="666666"/>
                 </a:solidFill>
-                <a:latin typeface="PingFang SC"/>
+                <a:latin typeface="Microsoft YaHei"/>
               </a:defRPr>
               <a:lnSpc>
                 <a:spcPct val="130000"/>
@@ -3762,7 +3762,7 @@
                 <a:solidFill>
                   <a:srgbClr val="C7000B"/>
                 </a:solidFill>
-                <a:latin typeface="PingFang SC"/>
+                <a:latin typeface="Microsoft YaHei"/>
               </a:defRPr>
               <a:lnSpc>
                 <a:spcPct val="130000"/>
@@ -3801,7 +3801,7 @@
                 <a:solidFill>
                   <a:srgbClr val="666666"/>
                 </a:solidFill>
-                <a:latin typeface="PingFang SC"/>
+                <a:latin typeface="Microsoft YaHei"/>
               </a:defRPr>
               <a:lnSpc>
                 <a:spcPct val="130000"/>
@@ -3885,7 +3885,7 @@
                 <a:solidFill>
                   <a:srgbClr val="C7000B"/>
                 </a:solidFill>
-                <a:latin typeface="PingFang SC"/>
+                <a:latin typeface="Microsoft YaHei"/>
               </a:defRPr>
               <a:lnSpc>
                 <a:spcPct val="130000"/>
@@ -3924,7 +3924,7 @@
                 <a:solidFill>
                   <a:srgbClr val="666666"/>
                 </a:solidFill>
-                <a:latin typeface="PingFang SC"/>
+                <a:latin typeface="Microsoft YaHei"/>
               </a:defRPr>
               <a:lnSpc>
                 <a:spcPct val="130000"/>
@@ -4008,7 +4008,7 @@
                 <a:solidFill>
                   <a:srgbClr val="C7000B"/>
                 </a:solidFill>
-                <a:latin typeface="PingFang SC"/>
+                <a:latin typeface="Microsoft YaHei"/>
               </a:defRPr>
               <a:lnSpc>
                 <a:spcPct val="130000"/>
@@ -4047,7 +4047,7 @@
                 <a:solidFill>
                   <a:srgbClr val="666666"/>
                 </a:solidFill>
-                <a:latin typeface="PingFang SC"/>
+                <a:latin typeface="Microsoft YaHei"/>
               </a:defRPr>
               <a:lnSpc>
                 <a:spcPct val="130000"/>
@@ -4086,7 +4086,7 @@
                 <a:solidFill>
                   <a:srgbClr val="C7000B"/>
                 </a:solidFill>
-                <a:latin typeface="PingFang SC"/>
+                <a:latin typeface="Microsoft YaHei"/>
               </a:defRPr>
               <a:lnSpc>
                 <a:spcPct val="130000"/>
@@ -4131,7 +4131,7 @@
                           <a:solidFill>
                             <a:srgbClr val="FFFFFF"/>
                           </a:solidFill>
-                          <a:latin typeface="PingFang SC"/>
+                          <a:latin typeface="Microsoft YaHei"/>
                         </a:defRPr>
                       </a:pPr>
                       <a:r>
@@ -4155,7 +4155,7 @@
                           <a:solidFill>
                             <a:srgbClr val="FFFFFF"/>
                           </a:solidFill>
-                          <a:latin typeface="PingFang SC"/>
+                          <a:latin typeface="Microsoft YaHei"/>
                         </a:defRPr>
                       </a:pPr>
                       <a:r>
@@ -4181,7 +4181,7 @@
                           <a:solidFill>
                             <a:srgbClr val="000000"/>
                           </a:solidFill>
-                          <a:latin typeface="PingFang SC"/>
+                          <a:latin typeface="Microsoft YaHei"/>
                         </a:defRPr>
                       </a:pPr>
                       <a:r>
@@ -4205,7 +4205,7 @@
                           <a:solidFill>
                             <a:srgbClr val="000000"/>
                           </a:solidFill>
-                          <a:latin typeface="PingFang SC"/>
+                          <a:latin typeface="Microsoft YaHei"/>
                         </a:defRPr>
                       </a:pPr>
                       <a:r>
@@ -4231,7 +4231,7 @@
                           <a:solidFill>
                             <a:srgbClr val="000000"/>
                           </a:solidFill>
-                          <a:latin typeface="PingFang SC"/>
+                          <a:latin typeface="Microsoft YaHei"/>
                         </a:defRPr>
                       </a:pPr>
                       <a:r>
@@ -4251,7 +4251,7 @@
                           <a:solidFill>
                             <a:srgbClr val="000000"/>
                           </a:solidFill>
-                          <a:latin typeface="PingFang SC"/>
+                          <a:latin typeface="Microsoft YaHei"/>
                         </a:defRPr>
                       </a:pPr>
                       <a:r>
@@ -4273,7 +4273,7 @@
                           <a:solidFill>
                             <a:srgbClr val="000000"/>
                           </a:solidFill>
-                          <a:latin typeface="PingFang SC"/>
+                          <a:latin typeface="Microsoft YaHei"/>
                         </a:defRPr>
                       </a:pPr>
                       <a:r>
@@ -4297,7 +4297,7 @@
                           <a:solidFill>
                             <a:srgbClr val="000000"/>
                           </a:solidFill>
-                          <a:latin typeface="PingFang SC"/>
+                          <a:latin typeface="Microsoft YaHei"/>
                         </a:defRPr>
                       </a:pPr>
                       <a:r>
@@ -4323,7 +4323,7 @@
                           <a:solidFill>
                             <a:srgbClr val="000000"/>
                           </a:solidFill>
-                          <a:latin typeface="PingFang SC"/>
+                          <a:latin typeface="Microsoft YaHei"/>
                         </a:defRPr>
                       </a:pPr>
                       <a:r>
@@ -4343,7 +4343,7 @@
                           <a:solidFill>
                             <a:srgbClr val="000000"/>
                           </a:solidFill>
-                          <a:latin typeface="PingFang SC"/>
+                          <a:latin typeface="Microsoft YaHei"/>
                         </a:defRPr>
                       </a:pPr>
                       <a:r>
@@ -4365,7 +4365,7 @@
                           <a:solidFill>
                             <a:srgbClr val="000000"/>
                           </a:solidFill>
-                          <a:latin typeface="PingFang SC"/>
+                          <a:latin typeface="Microsoft YaHei"/>
                         </a:defRPr>
                       </a:pPr>
                       <a:r>
@@ -4389,7 +4389,7 @@
                           <a:solidFill>
                             <a:srgbClr val="000000"/>
                           </a:solidFill>
-                          <a:latin typeface="PingFang SC"/>
+                          <a:latin typeface="Microsoft YaHei"/>
                         </a:defRPr>
                       </a:pPr>
                       <a:r>
@@ -4435,7 +4435,7 @@
                 <a:solidFill>
                   <a:srgbClr val="C7000B"/>
                 </a:solidFill>
-                <a:latin typeface="PingFang SC"/>
+                <a:latin typeface="Microsoft YaHei"/>
               </a:defRPr>
               <a:lnSpc>
                 <a:spcPct val="130000"/>
@@ -4474,7 +4474,7 @@
                 <a:solidFill>
                   <a:srgbClr val="000000"/>
                 </a:solidFill>
-                <a:latin typeface="PingFang SC"/>
+                <a:latin typeface="Microsoft YaHei"/>
               </a:defRPr>
               <a:lnSpc>
                 <a:spcPct val="130000"/>
@@ -4521,7 +4521,7 @@
                           <a:solidFill>
                             <a:srgbClr val="FFFFFF"/>
                           </a:solidFill>
-                          <a:latin typeface="PingFang SC"/>
+                          <a:latin typeface="Microsoft YaHei"/>
                         </a:defRPr>
                       </a:pPr>
                       <a:r>
@@ -4545,7 +4545,7 @@
                           <a:solidFill>
                             <a:srgbClr val="FFFFFF"/>
                           </a:solidFill>
-                          <a:latin typeface="PingFang SC"/>
+                          <a:latin typeface="Microsoft YaHei"/>
                         </a:defRPr>
                       </a:pPr>
                       <a:r>
@@ -4569,7 +4569,7 @@
                           <a:solidFill>
                             <a:srgbClr val="FFFFFF"/>
                           </a:solidFill>
-                          <a:latin typeface="PingFang SC"/>
+                          <a:latin typeface="Microsoft YaHei"/>
                         </a:defRPr>
                       </a:pPr>
                       <a:r>
@@ -4593,7 +4593,7 @@
                           <a:solidFill>
                             <a:srgbClr val="FFFFFF"/>
                           </a:solidFill>
-                          <a:latin typeface="PingFang SC"/>
+                          <a:latin typeface="Microsoft YaHei"/>
                         </a:defRPr>
                       </a:pPr>
                       <a:r>
@@ -4619,7 +4619,7 @@
                           <a:solidFill>
                             <a:srgbClr val="000000"/>
                           </a:solidFill>
-                          <a:latin typeface="PingFang SC"/>
+                          <a:latin typeface="Microsoft YaHei"/>
                         </a:defRPr>
                       </a:pPr>
                       <a:r>
@@ -4643,7 +4643,7 @@
                           <a:solidFill>
                             <a:srgbClr val="000000"/>
                           </a:solidFill>
-                          <a:latin typeface="PingFang SC"/>
+                          <a:latin typeface="Microsoft YaHei"/>
                         </a:defRPr>
                       </a:pPr>
                       <a:r>
@@ -4667,7 +4667,7 @@
                           <a:solidFill>
                             <a:srgbClr val="000000"/>
                           </a:solidFill>
-                          <a:latin typeface="PingFang SC"/>
+                          <a:latin typeface="Microsoft YaHei"/>
                         </a:defRPr>
                       </a:pPr>
                       <a:r>
@@ -4691,7 +4691,7 @@
                           <a:solidFill>
                             <a:srgbClr val="000000"/>
                           </a:solidFill>
-                          <a:latin typeface="PingFang SC"/>
+                          <a:latin typeface="Microsoft YaHei"/>
                         </a:defRPr>
                       </a:pPr>
                       <a:r>
@@ -4717,7 +4717,7 @@
                           <a:solidFill>
                             <a:srgbClr val="000000"/>
                           </a:solidFill>
-                          <a:latin typeface="PingFang SC"/>
+                          <a:latin typeface="Microsoft YaHei"/>
                         </a:defRPr>
                       </a:pPr>
                       <a:r>
@@ -4737,7 +4737,7 @@
                           <a:solidFill>
                             <a:srgbClr val="000000"/>
                           </a:solidFill>
-                          <a:latin typeface="PingFang SC"/>
+                          <a:latin typeface="Microsoft YaHei"/>
                         </a:defRPr>
                       </a:pPr>
                       <a:r>
@@ -4757,7 +4757,7 @@
                           <a:solidFill>
                             <a:srgbClr val="000000"/>
                           </a:solidFill>
-                          <a:latin typeface="PingFang SC"/>
+                          <a:latin typeface="Microsoft YaHei"/>
                         </a:defRPr>
                       </a:pPr>
                       <a:r>
@@ -4777,7 +4777,7 @@
                           <a:solidFill>
                             <a:srgbClr val="000000"/>
                           </a:solidFill>
-                          <a:latin typeface="PingFang SC"/>
+                          <a:latin typeface="Microsoft YaHei"/>
                         </a:defRPr>
                       </a:pPr>
                       <a:r>
@@ -4819,7 +4819,7 @@
                 <a:solidFill>
                   <a:srgbClr val="000000"/>
                 </a:solidFill>
-                <a:latin typeface="PingFang SC"/>
+                <a:latin typeface="Microsoft YaHei"/>
               </a:defRPr>
               <a:lnSpc>
                 <a:spcPct val="130000"/>
@@ -4865,7 +4865,7 @@
                           <a:solidFill>
                             <a:srgbClr val="FFFFFF"/>
                           </a:solidFill>
-                          <a:latin typeface="PingFang SC"/>
+                          <a:latin typeface="Microsoft YaHei"/>
                         </a:defRPr>
                       </a:pPr>
                       <a:r>
@@ -4889,7 +4889,7 @@
                           <a:solidFill>
                             <a:srgbClr val="FFFFFF"/>
                           </a:solidFill>
-                          <a:latin typeface="PingFang SC"/>
+                          <a:latin typeface="Microsoft YaHei"/>
                         </a:defRPr>
                       </a:pPr>
                       <a:r>
@@ -4913,7 +4913,7 @@
                           <a:solidFill>
                             <a:srgbClr val="FFFFFF"/>
                           </a:solidFill>
-                          <a:latin typeface="PingFang SC"/>
+                          <a:latin typeface="Microsoft YaHei"/>
                         </a:defRPr>
                       </a:pPr>
                       <a:r>
@@ -4939,7 +4939,7 @@
                           <a:solidFill>
                             <a:srgbClr val="000000"/>
                           </a:solidFill>
-                          <a:latin typeface="PingFang SC"/>
+                          <a:latin typeface="Microsoft YaHei"/>
                         </a:defRPr>
                       </a:pPr>
                       <a:r>
@@ -4963,7 +4963,7 @@
                           <a:solidFill>
                             <a:srgbClr val="000000"/>
                           </a:solidFill>
-                          <a:latin typeface="PingFang SC"/>
+                          <a:latin typeface="Microsoft YaHei"/>
                         </a:defRPr>
                       </a:pPr>
                       <a:r>
@@ -4987,7 +4987,7 @@
                           <a:solidFill>
                             <a:srgbClr val="000000"/>
                           </a:solidFill>
-                          <a:latin typeface="PingFang SC"/>
+                          <a:latin typeface="Microsoft YaHei"/>
                         </a:defRPr>
                       </a:pPr>
                       <a:r>
@@ -5013,7 +5013,7 @@
                           <a:solidFill>
                             <a:srgbClr val="000000"/>
                           </a:solidFill>
-                          <a:latin typeface="PingFang SC"/>
+                          <a:latin typeface="Microsoft YaHei"/>
                         </a:defRPr>
                       </a:pPr>
                       <a:r>
@@ -5033,7 +5033,7 @@
                           <a:solidFill>
                             <a:srgbClr val="000000"/>
                           </a:solidFill>
-                          <a:latin typeface="PingFang SC"/>
+                          <a:latin typeface="Microsoft YaHei"/>
                         </a:defRPr>
                       </a:pPr>
                       <a:r>
@@ -5053,7 +5053,7 @@
                           <a:solidFill>
                             <a:srgbClr val="000000"/>
                           </a:solidFill>
-                          <a:latin typeface="PingFang SC"/>
+                          <a:latin typeface="Microsoft YaHei"/>
                         </a:defRPr>
                       </a:pPr>
                       <a:r>
@@ -5075,7 +5075,7 @@
                           <a:solidFill>
                             <a:srgbClr val="000000"/>
                           </a:solidFill>
-                          <a:latin typeface="PingFang SC"/>
+                          <a:latin typeface="Microsoft YaHei"/>
                         </a:defRPr>
                       </a:pPr>
                       <a:r>
@@ -5099,7 +5099,7 @@
                           <a:solidFill>
                             <a:srgbClr val="000000"/>
                           </a:solidFill>
-                          <a:latin typeface="PingFang SC"/>
+                          <a:latin typeface="Microsoft YaHei"/>
                         </a:defRPr>
                       </a:pPr>
                       <a:r>
@@ -5123,7 +5123,7 @@
                           <a:solidFill>
                             <a:srgbClr val="000000"/>
                           </a:solidFill>
-                          <a:latin typeface="PingFang SC"/>
+                          <a:latin typeface="Microsoft YaHei"/>
                         </a:defRPr>
                       </a:pPr>
                       <a:r>
@@ -5149,7 +5149,7 @@
                           <a:solidFill>
                             <a:srgbClr val="000000"/>
                           </a:solidFill>
-                          <a:latin typeface="PingFang SC"/>
+                          <a:latin typeface="Microsoft YaHei"/>
                         </a:defRPr>
                       </a:pPr>
                       <a:r>
@@ -5169,7 +5169,7 @@
                           <a:solidFill>
                             <a:srgbClr val="000000"/>
                           </a:solidFill>
-                          <a:latin typeface="PingFang SC"/>
+                          <a:latin typeface="Microsoft YaHei"/>
                         </a:defRPr>
                       </a:pPr>
                       <a:r>
@@ -5189,7 +5189,7 @@
                           <a:solidFill>
                             <a:srgbClr val="000000"/>
                           </a:solidFill>
-                          <a:latin typeface="PingFang SC"/>
+                          <a:latin typeface="Microsoft YaHei"/>
                         </a:defRPr>
                       </a:pPr>
                       <a:r>
@@ -5276,7 +5276,7 @@
                 <a:solidFill>
                   <a:srgbClr val="000000"/>
                 </a:solidFill>
-                <a:latin typeface="PingFang SC"/>
+                <a:latin typeface="Microsoft YaHei"/>
               </a:defRPr>
               <a:lnSpc>
                 <a:spcPct val="130000"/>
@@ -5315,7 +5315,7 @@
                 <a:solidFill>
                   <a:srgbClr val="000000"/>
                 </a:solidFill>
-                <a:latin typeface="PingFang SC"/>
+                <a:latin typeface="Microsoft YaHei"/>
               </a:defRPr>
               <a:lnSpc>
                 <a:spcPct val="130000"/>
@@ -5354,7 +5354,7 @@
                 <a:solidFill>
                   <a:srgbClr val="999999"/>
                 </a:solidFill>
-                <a:latin typeface="PingFang SC"/>
+                <a:latin typeface="Microsoft YaHei"/>
               </a:defRPr>
               <a:lnSpc>
                 <a:spcPct val="130000"/>
@@ -5434,7 +5434,7 @@
                 <a:solidFill>
                   <a:srgbClr val="C7000B"/>
                 </a:solidFill>
-                <a:latin typeface="PingFang SC"/>
+                <a:latin typeface="Microsoft YaHei"/>
               </a:defRPr>
             </a:pPr>
             <a:r>
@@ -5470,7 +5470,7 @@
                 <a:solidFill>
                   <a:srgbClr val="666666"/>
                 </a:solidFill>
-                <a:latin typeface="PingFang SC"/>
+                <a:latin typeface="Microsoft YaHei"/>
               </a:defRPr>
             </a:pPr>
             <a:r>
@@ -5506,7 +5506,7 @@
                 <a:solidFill>
                   <a:srgbClr val="000000"/>
                 </a:solidFill>
-                <a:latin typeface="PingFang SC"/>
+                <a:latin typeface="Microsoft YaHei"/>
               </a:defRPr>
               <a:lnSpc>
                 <a:spcPct val="130000"/>
@@ -5564,7 +5564,7 @@
                 <a:solidFill>
                   <a:srgbClr val="000000"/>
                 </a:solidFill>
-                <a:latin typeface="PingFang SC"/>
+                <a:latin typeface="Microsoft YaHei"/>
               </a:defRPr>
             </a:pPr>
             <a:r>
@@ -5668,7 +5668,7 @@
                 <a:solidFill>
                   <a:srgbClr val="000000"/>
                 </a:solidFill>
-                <a:latin typeface="PingFang SC"/>
+                <a:latin typeface="Microsoft YaHei"/>
               </a:defRPr>
             </a:pPr>
             <a:r>
@@ -5776,7 +5776,7 @@
                 <a:solidFill>
                   <a:srgbClr val="000000"/>
                 </a:solidFill>
-                <a:latin typeface="PingFang SC"/>
+                <a:latin typeface="Microsoft YaHei"/>
               </a:defRPr>
             </a:pPr>
             <a:r>
@@ -5880,7 +5880,7 @@
                 <a:solidFill>
                   <a:srgbClr val="000000"/>
                 </a:solidFill>
-                <a:latin typeface="PingFang SC"/>
+                <a:latin typeface="Microsoft YaHei"/>
               </a:defRPr>
             </a:pPr>
             <a:r>
@@ -5965,7 +5965,7 @@
                 <a:solidFill>
                   <a:srgbClr val="000000"/>
                 </a:solidFill>
-                <a:latin typeface="PingFang SC"/>
+                <a:latin typeface="Microsoft YaHei"/>
               </a:defRPr>
               <a:lnSpc>
                 <a:spcPct val="130000"/>
@@ -6004,7 +6004,7 @@
                 <a:solidFill>
                   <a:srgbClr val="000000"/>
                 </a:solidFill>
-                <a:latin typeface="PingFang SC"/>
+                <a:latin typeface="Microsoft YaHei"/>
               </a:defRPr>
               <a:lnSpc>
                 <a:spcPct val="130000"/>
@@ -6062,7 +6062,7 @@
                 <a:solidFill>
                   <a:srgbClr val="000000"/>
                 </a:solidFill>
-                <a:latin typeface="PingFang SC"/>
+                <a:latin typeface="Microsoft YaHei"/>
               </a:defRPr>
             </a:pPr>
             <a:r>
@@ -6125,7 +6125,7 @@
                 <a:solidFill>
                   <a:srgbClr val="000000"/>
                 </a:solidFill>
-                <a:latin typeface="PingFang SC"/>
+                <a:latin typeface="Microsoft YaHei"/>
               </a:defRPr>
             </a:pPr>
             <a:r>
@@ -6188,7 +6188,7 @@
                 <a:solidFill>
                   <a:srgbClr val="000000"/>
                 </a:solidFill>
-                <a:latin typeface="PingFang SC"/>
+                <a:latin typeface="Microsoft YaHei"/>
               </a:defRPr>
             </a:pPr>
             <a:r>
@@ -6251,7 +6251,7 @@
                 <a:solidFill>
                   <a:srgbClr val="000000"/>
                 </a:solidFill>
-                <a:latin typeface="PingFang SC"/>
+                <a:latin typeface="Microsoft YaHei"/>
               </a:defRPr>
             </a:pPr>
             <a:r>
@@ -6314,7 +6314,7 @@
                 <a:solidFill>
                   <a:srgbClr val="000000"/>
                 </a:solidFill>
-                <a:latin typeface="PingFang SC"/>
+                <a:latin typeface="Microsoft YaHei"/>
               </a:defRPr>
             </a:pPr>
             <a:r>
@@ -6381,7 +6381,7 @@
                 <a:solidFill>
                   <a:srgbClr val="000000"/>
                 </a:solidFill>
-                <a:latin typeface="PingFang SC"/>
+                <a:latin typeface="Microsoft YaHei"/>
               </a:defRPr>
             </a:pPr>
             <a:r>
@@ -6493,7 +6493,7 @@
                 <a:solidFill>
                   <a:srgbClr val="000000"/>
                 </a:solidFill>
-                <a:latin typeface="PingFang SC"/>
+                <a:latin typeface="Microsoft YaHei"/>
               </a:defRPr>
             </a:pPr>
             <a:r>
@@ -6578,7 +6578,7 @@
                 <a:solidFill>
                   <a:srgbClr val="000000"/>
                 </a:solidFill>
-                <a:latin typeface="PingFang SC"/>
+                <a:latin typeface="Microsoft YaHei"/>
               </a:defRPr>
               <a:lnSpc>
                 <a:spcPct val="130000"/>
@@ -6617,7 +6617,7 @@
                 <a:solidFill>
                   <a:srgbClr val="555555"/>
                 </a:solidFill>
-                <a:latin typeface="PingFang SC"/>
+                <a:latin typeface="Microsoft YaHei"/>
               </a:defRPr>
               <a:lnSpc>
                 <a:spcPct val="130000"/>
@@ -6656,7 +6656,7 @@
                 <a:solidFill>
                   <a:srgbClr val="999999"/>
                 </a:solidFill>
-                <a:latin typeface="PingFang SC"/>
+                <a:latin typeface="Microsoft YaHei"/>
               </a:defRPr>
               <a:lnSpc>
                 <a:spcPct val="130000"/>
@@ -6736,7 +6736,7 @@
                 <a:solidFill>
                   <a:srgbClr val="C7000B"/>
                 </a:solidFill>
-                <a:latin typeface="PingFang SC"/>
+                <a:latin typeface="Microsoft YaHei"/>
               </a:defRPr>
             </a:pPr>
             <a:r>
@@ -6772,7 +6772,7 @@
                 <a:solidFill>
                   <a:srgbClr val="666666"/>
                 </a:solidFill>
-                <a:latin typeface="PingFang SC"/>
+                <a:latin typeface="Microsoft YaHei"/>
               </a:defRPr>
             </a:pPr>
             <a:r>
@@ -6808,7 +6808,7 @@
                 <a:solidFill>
                   <a:srgbClr val="000000"/>
                 </a:solidFill>
-                <a:latin typeface="PingFang SC"/>
+                <a:latin typeface="Microsoft YaHei"/>
               </a:defRPr>
               <a:lnSpc>
                 <a:spcPct val="130000"/>
@@ -6855,7 +6855,7 @@
                           <a:solidFill>
                             <a:srgbClr val="FFFFFF"/>
                           </a:solidFill>
-                          <a:latin typeface="PingFang SC"/>
+                          <a:latin typeface="Microsoft YaHei"/>
                         </a:defRPr>
                       </a:pPr>
                       <a:r>
@@ -6879,7 +6879,7 @@
                           <a:solidFill>
                             <a:srgbClr val="FFFFFF"/>
                           </a:solidFill>
-                          <a:latin typeface="PingFang SC"/>
+                          <a:latin typeface="Microsoft YaHei"/>
                         </a:defRPr>
                       </a:pPr>
                       <a:r>
@@ -6903,7 +6903,7 @@
                           <a:solidFill>
                             <a:srgbClr val="FFFFFF"/>
                           </a:solidFill>
-                          <a:latin typeface="PingFang SC"/>
+                          <a:latin typeface="Microsoft YaHei"/>
                         </a:defRPr>
                       </a:pPr>
                       <a:r>
@@ -6927,7 +6927,7 @@
                           <a:solidFill>
                             <a:srgbClr val="FFFFFF"/>
                           </a:solidFill>
-                          <a:latin typeface="PingFang SC"/>
+                          <a:latin typeface="Microsoft YaHei"/>
                         </a:defRPr>
                       </a:pPr>
                       <a:r>
@@ -6953,7 +6953,7 @@
                           <a:solidFill>
                             <a:srgbClr val="000000"/>
                           </a:solidFill>
-                          <a:latin typeface="PingFang SC"/>
+                          <a:latin typeface="Microsoft YaHei"/>
                         </a:defRPr>
                       </a:pPr>
                       <a:r>
@@ -6977,7 +6977,7 @@
                           <a:solidFill>
                             <a:srgbClr val="000000"/>
                           </a:solidFill>
-                          <a:latin typeface="PingFang SC"/>
+                          <a:latin typeface="Microsoft YaHei"/>
                         </a:defRPr>
                       </a:pPr>
                       <a:r>
@@ -7001,7 +7001,7 @@
                           <a:solidFill>
                             <a:srgbClr val="000000"/>
                           </a:solidFill>
-                          <a:latin typeface="PingFang SC"/>
+                          <a:latin typeface="Microsoft YaHei"/>
                         </a:defRPr>
                       </a:pPr>
                       <a:r>
@@ -7025,7 +7025,7 @@
                           <a:solidFill>
                             <a:srgbClr val="000000"/>
                           </a:solidFill>
-                          <a:latin typeface="PingFang SC"/>
+                          <a:latin typeface="Microsoft YaHei"/>
                         </a:defRPr>
                       </a:pPr>
                       <a:r>
@@ -7051,7 +7051,7 @@
                           <a:solidFill>
                             <a:srgbClr val="000000"/>
                           </a:solidFill>
-                          <a:latin typeface="PingFang SC"/>
+                          <a:latin typeface="Microsoft YaHei"/>
                         </a:defRPr>
                       </a:pPr>
                       <a:r>
@@ -7071,7 +7071,7 @@
                           <a:solidFill>
                             <a:srgbClr val="000000"/>
                           </a:solidFill>
-                          <a:latin typeface="PingFang SC"/>
+                          <a:latin typeface="Microsoft YaHei"/>
                         </a:defRPr>
                       </a:pPr>
                       <a:r>
@@ -7091,7 +7091,7 @@
                           <a:solidFill>
                             <a:srgbClr val="000000"/>
                           </a:solidFill>
-                          <a:latin typeface="PingFang SC"/>
+                          <a:latin typeface="Microsoft YaHei"/>
                         </a:defRPr>
                       </a:pPr>
                       <a:r>
@@ -7111,7 +7111,7 @@
                           <a:solidFill>
                             <a:srgbClr val="000000"/>
                           </a:solidFill>
-                          <a:latin typeface="PingFang SC"/>
+                          <a:latin typeface="Microsoft YaHei"/>
                         </a:defRPr>
                       </a:pPr>
                       <a:r>
@@ -7133,7 +7133,7 @@
                           <a:solidFill>
                             <a:srgbClr val="000000"/>
                           </a:solidFill>
-                          <a:latin typeface="PingFang SC"/>
+                          <a:latin typeface="Microsoft YaHei"/>
                         </a:defRPr>
                       </a:pPr>
                       <a:r>
@@ -7157,7 +7157,7 @@
                           <a:solidFill>
                             <a:srgbClr val="000000"/>
                           </a:solidFill>
-                          <a:latin typeface="PingFang SC"/>
+                          <a:latin typeface="Microsoft YaHei"/>
                         </a:defRPr>
                       </a:pPr>
                       <a:r>
@@ -7181,7 +7181,7 @@
                           <a:solidFill>
                             <a:srgbClr val="000000"/>
                           </a:solidFill>
-                          <a:latin typeface="PingFang SC"/>
+                          <a:latin typeface="Microsoft YaHei"/>
                         </a:defRPr>
                       </a:pPr>
                       <a:r>
@@ -7205,7 +7205,7 @@
                           <a:solidFill>
                             <a:srgbClr val="000000"/>
                           </a:solidFill>
-                          <a:latin typeface="PingFang SC"/>
+                          <a:latin typeface="Microsoft YaHei"/>
                         </a:defRPr>
                       </a:pPr>
                       <a:r>
@@ -7231,7 +7231,7 @@
                           <a:solidFill>
                             <a:srgbClr val="000000"/>
                           </a:solidFill>
-                          <a:latin typeface="PingFang SC"/>
+                          <a:latin typeface="Microsoft YaHei"/>
                         </a:defRPr>
                       </a:pPr>
                       <a:r>
@@ -7251,7 +7251,7 @@
                           <a:solidFill>
                             <a:srgbClr val="000000"/>
                           </a:solidFill>
-                          <a:latin typeface="PingFang SC"/>
+                          <a:latin typeface="Microsoft YaHei"/>
                         </a:defRPr>
                       </a:pPr>
                       <a:r>
@@ -7271,7 +7271,7 @@
                           <a:solidFill>
                             <a:srgbClr val="000000"/>
                           </a:solidFill>
-                          <a:latin typeface="PingFang SC"/>
+                          <a:latin typeface="Microsoft YaHei"/>
                         </a:defRPr>
                       </a:pPr>
                       <a:r>
@@ -7291,7 +7291,7 @@
                           <a:solidFill>
                             <a:srgbClr val="000000"/>
                           </a:solidFill>
-                          <a:latin typeface="PingFang SC"/>
+                          <a:latin typeface="Microsoft YaHei"/>
                         </a:defRPr>
                       </a:pPr>
                       <a:r>
@@ -7333,7 +7333,7 @@
                 <a:solidFill>
                   <a:srgbClr val="000000"/>
                 </a:solidFill>
-                <a:latin typeface="PingFang SC"/>
+                <a:latin typeface="Microsoft YaHei"/>
               </a:defRPr>
               <a:lnSpc>
                 <a:spcPct val="130000"/>
@@ -7380,7 +7380,7 @@
                           <a:solidFill>
                             <a:srgbClr val="FFFFFF"/>
                           </a:solidFill>
-                          <a:latin typeface="PingFang SC"/>
+                          <a:latin typeface="Microsoft YaHei"/>
                         </a:defRPr>
                       </a:pPr>
                       <a:r>
@@ -7404,7 +7404,7 @@
                           <a:solidFill>
                             <a:srgbClr val="FFFFFF"/>
                           </a:solidFill>
-                          <a:latin typeface="PingFang SC"/>
+                          <a:latin typeface="Microsoft YaHei"/>
                         </a:defRPr>
                       </a:pPr>
                       <a:r>
@@ -7428,7 +7428,7 @@
                           <a:solidFill>
                             <a:srgbClr val="FFFFFF"/>
                           </a:solidFill>
-                          <a:latin typeface="PingFang SC"/>
+                          <a:latin typeface="Microsoft YaHei"/>
                         </a:defRPr>
                       </a:pPr>
                       <a:r>
@@ -7452,7 +7452,7 @@
                           <a:solidFill>
                             <a:srgbClr val="FFFFFF"/>
                           </a:solidFill>
-                          <a:latin typeface="PingFang SC"/>
+                          <a:latin typeface="Microsoft YaHei"/>
                         </a:defRPr>
                       </a:pPr>
                       <a:r>
@@ -7478,7 +7478,7 @@
                           <a:solidFill>
                             <a:srgbClr val="000000"/>
                           </a:solidFill>
-                          <a:latin typeface="PingFang SC"/>
+                          <a:latin typeface="Microsoft YaHei"/>
                         </a:defRPr>
                       </a:pPr>
                       <a:r>
@@ -7502,7 +7502,7 @@
                           <a:solidFill>
                             <a:srgbClr val="000000"/>
                           </a:solidFill>
-                          <a:latin typeface="PingFang SC"/>
+                          <a:latin typeface="Microsoft YaHei"/>
                         </a:defRPr>
                       </a:pPr>
                       <a:r>
@@ -7526,7 +7526,7 @@
                           <a:solidFill>
                             <a:srgbClr val="000000"/>
                           </a:solidFill>
-                          <a:latin typeface="PingFang SC"/>
+                          <a:latin typeface="Microsoft YaHei"/>
                         </a:defRPr>
                       </a:pPr>
                       <a:r>
@@ -7550,7 +7550,7 @@
                           <a:solidFill>
                             <a:srgbClr val="000000"/>
                           </a:solidFill>
-                          <a:latin typeface="PingFang SC"/>
+                          <a:latin typeface="Microsoft YaHei"/>
                         </a:defRPr>
                       </a:pPr>
                       <a:r>
@@ -7576,7 +7576,7 @@
                           <a:solidFill>
                             <a:srgbClr val="000000"/>
                           </a:solidFill>
-                          <a:latin typeface="PingFang SC"/>
+                          <a:latin typeface="Microsoft YaHei"/>
                         </a:defRPr>
                       </a:pPr>
                       <a:r>
@@ -7596,7 +7596,7 @@
                           <a:solidFill>
                             <a:srgbClr val="000000"/>
                           </a:solidFill>
-                          <a:latin typeface="PingFang SC"/>
+                          <a:latin typeface="Microsoft YaHei"/>
                         </a:defRPr>
                       </a:pPr>
                       <a:r>
@@ -7616,7 +7616,7 @@
                           <a:solidFill>
                             <a:srgbClr val="000000"/>
                           </a:solidFill>
-                          <a:latin typeface="PingFang SC"/>
+                          <a:latin typeface="Microsoft YaHei"/>
                         </a:defRPr>
                       </a:pPr>
                       <a:r>
@@ -7636,7 +7636,7 @@
                           <a:solidFill>
                             <a:srgbClr val="000000"/>
                           </a:solidFill>
-                          <a:latin typeface="PingFang SC"/>
+                          <a:latin typeface="Microsoft YaHei"/>
                         </a:defRPr>
                       </a:pPr>
                       <a:r>
@@ -7678,7 +7678,7 @@
                 <a:solidFill>
                   <a:srgbClr val="000000"/>
                 </a:solidFill>
-                <a:latin typeface="PingFang SC"/>
+                <a:latin typeface="Microsoft YaHei"/>
               </a:defRPr>
               <a:lnSpc>
                 <a:spcPct val="130000"/>
@@ -7725,7 +7725,7 @@
                           <a:solidFill>
                             <a:srgbClr val="FFFFFF"/>
                           </a:solidFill>
-                          <a:latin typeface="PingFang SC"/>
+                          <a:latin typeface="Microsoft YaHei"/>
                         </a:defRPr>
                       </a:pPr>
                       <a:r>
@@ -7749,7 +7749,7 @@
                           <a:solidFill>
                             <a:srgbClr val="FFFFFF"/>
                           </a:solidFill>
-                          <a:latin typeface="PingFang SC"/>
+                          <a:latin typeface="Microsoft YaHei"/>
                         </a:defRPr>
                       </a:pPr>
                       <a:r>
@@ -7773,7 +7773,7 @@
                           <a:solidFill>
                             <a:srgbClr val="FFFFFF"/>
                           </a:solidFill>
-                          <a:latin typeface="PingFang SC"/>
+                          <a:latin typeface="Microsoft YaHei"/>
                         </a:defRPr>
                       </a:pPr>
                       <a:r>
@@ -7797,7 +7797,7 @@
                           <a:solidFill>
                             <a:srgbClr val="FFFFFF"/>
                           </a:solidFill>
-                          <a:latin typeface="PingFang SC"/>
+                          <a:latin typeface="Microsoft YaHei"/>
                         </a:defRPr>
                       </a:pPr>
                       <a:r>
@@ -7823,7 +7823,7 @@
                           <a:solidFill>
                             <a:srgbClr val="000000"/>
                           </a:solidFill>
-                          <a:latin typeface="PingFang SC"/>
+                          <a:latin typeface="Microsoft YaHei"/>
                         </a:defRPr>
                       </a:pPr>
                       <a:r>
@@ -7847,7 +7847,7 @@
                           <a:solidFill>
                             <a:srgbClr val="000000"/>
                           </a:solidFill>
-                          <a:latin typeface="PingFang SC"/>
+                          <a:latin typeface="Microsoft YaHei"/>
                         </a:defRPr>
                       </a:pPr>
                       <a:r>
@@ -7871,7 +7871,7 @@
                           <a:solidFill>
                             <a:srgbClr val="000000"/>
                           </a:solidFill>
-                          <a:latin typeface="PingFang SC"/>
+                          <a:latin typeface="Microsoft YaHei"/>
                         </a:defRPr>
                       </a:pPr>
                       <a:r>
@@ -7895,7 +7895,7 @@
                           <a:solidFill>
                             <a:srgbClr val="000000"/>
                           </a:solidFill>
-                          <a:latin typeface="PingFang SC"/>
+                          <a:latin typeface="Microsoft YaHei"/>
                         </a:defRPr>
                       </a:pPr>
                       <a:r>
@@ -7921,7 +7921,7 @@
                           <a:solidFill>
                             <a:srgbClr val="000000"/>
                           </a:solidFill>
-                          <a:latin typeface="PingFang SC"/>
+                          <a:latin typeface="Microsoft YaHei"/>
                         </a:defRPr>
                       </a:pPr>
                       <a:r>
@@ -7941,7 +7941,7 @@
                           <a:solidFill>
                             <a:srgbClr val="000000"/>
                           </a:solidFill>
-                          <a:latin typeface="PingFang SC"/>
+                          <a:latin typeface="Microsoft YaHei"/>
                         </a:defRPr>
                       </a:pPr>
                       <a:r>
@@ -7961,7 +7961,7 @@
                           <a:solidFill>
                             <a:srgbClr val="000000"/>
                           </a:solidFill>
-                          <a:latin typeface="PingFang SC"/>
+                          <a:latin typeface="Microsoft YaHei"/>
                         </a:defRPr>
                       </a:pPr>
                       <a:r>
@@ -7981,7 +7981,7 @@
                           <a:solidFill>
                             <a:srgbClr val="000000"/>
                           </a:solidFill>
-                          <a:latin typeface="PingFang SC"/>
+                          <a:latin typeface="Microsoft YaHei"/>
                         </a:defRPr>
                       </a:pPr>
                       <a:r>
@@ -8023,7 +8023,7 @@
                 <a:solidFill>
                   <a:srgbClr val="000000"/>
                 </a:solidFill>
-                <a:latin typeface="PingFang SC"/>
+                <a:latin typeface="Microsoft YaHei"/>
               </a:defRPr>
               <a:lnSpc>
                 <a:spcPct val="130000"/>
@@ -8062,7 +8062,7 @@
                 <a:solidFill>
                   <a:srgbClr val="999999"/>
                 </a:solidFill>
-                <a:latin typeface="PingFang SC"/>
+                <a:latin typeface="Microsoft YaHei"/>
               </a:defRPr>
               <a:lnSpc>
                 <a:spcPct val="130000"/>
@@ -8142,7 +8142,7 @@
                 <a:solidFill>
                   <a:srgbClr val="C7000B"/>
                 </a:solidFill>
-                <a:latin typeface="PingFang SC"/>
+                <a:latin typeface="Microsoft YaHei"/>
               </a:defRPr>
             </a:pPr>
             <a:r>
@@ -8178,7 +8178,7 @@
                 <a:solidFill>
                   <a:srgbClr val="666666"/>
                 </a:solidFill>
-                <a:latin typeface="PingFang SC"/>
+                <a:latin typeface="Microsoft YaHei"/>
               </a:defRPr>
             </a:pPr>
             <a:r>
@@ -8214,7 +8214,7 @@
                 <a:solidFill>
                   <a:srgbClr val="000000"/>
                 </a:solidFill>
-                <a:latin typeface="PingFang SC"/>
+                <a:latin typeface="Microsoft YaHei"/>
               </a:defRPr>
               <a:lnSpc>
                 <a:spcPct val="130000"/>
@@ -8261,7 +8261,7 @@
                           <a:solidFill>
                             <a:srgbClr val="FFFFFF"/>
                           </a:solidFill>
-                          <a:latin typeface="PingFang SC"/>
+                          <a:latin typeface="Microsoft YaHei"/>
                         </a:defRPr>
                       </a:pPr>
                       <a:r>
@@ -8285,7 +8285,7 @@
                           <a:solidFill>
                             <a:srgbClr val="FFFFFF"/>
                           </a:solidFill>
-                          <a:latin typeface="PingFang SC"/>
+                          <a:latin typeface="Microsoft YaHei"/>
                         </a:defRPr>
                       </a:pPr>
                       <a:r>
@@ -8309,7 +8309,7 @@
                           <a:solidFill>
                             <a:srgbClr val="FFFFFF"/>
                           </a:solidFill>
-                          <a:latin typeface="PingFang SC"/>
+                          <a:latin typeface="Microsoft YaHei"/>
                         </a:defRPr>
                       </a:pPr>
                       <a:r>
@@ -8333,7 +8333,7 @@
                           <a:solidFill>
                             <a:srgbClr val="FFFFFF"/>
                           </a:solidFill>
-                          <a:latin typeface="PingFang SC"/>
+                          <a:latin typeface="Microsoft YaHei"/>
                         </a:defRPr>
                       </a:pPr>
                       <a:r>
@@ -8359,7 +8359,7 @@
                           <a:solidFill>
                             <a:srgbClr val="000000"/>
                           </a:solidFill>
-                          <a:latin typeface="PingFang SC"/>
+                          <a:latin typeface="Microsoft YaHei"/>
                         </a:defRPr>
                       </a:pPr>
                       <a:r>
@@ -8383,7 +8383,7 @@
                           <a:solidFill>
                             <a:srgbClr val="000000"/>
                           </a:solidFill>
-                          <a:latin typeface="PingFang SC"/>
+                          <a:latin typeface="Microsoft YaHei"/>
                         </a:defRPr>
                       </a:pPr>
                       <a:r>
@@ -8407,7 +8407,7 @@
                           <a:solidFill>
                             <a:srgbClr val="000000"/>
                           </a:solidFill>
-                          <a:latin typeface="PingFang SC"/>
+                          <a:latin typeface="Microsoft YaHei"/>
                         </a:defRPr>
                       </a:pPr>
                       <a:r>
@@ -8431,7 +8431,7 @@
                           <a:solidFill>
                             <a:srgbClr val="000000"/>
                           </a:solidFill>
-                          <a:latin typeface="PingFang SC"/>
+                          <a:latin typeface="Microsoft YaHei"/>
                         </a:defRPr>
                       </a:pPr>
                       <a:r>
@@ -8457,7 +8457,7 @@
                           <a:solidFill>
                             <a:srgbClr val="000000"/>
                           </a:solidFill>
-                          <a:latin typeface="PingFang SC"/>
+                          <a:latin typeface="Microsoft YaHei"/>
                         </a:defRPr>
                       </a:pPr>
                       <a:r>
@@ -8477,7 +8477,7 @@
                           <a:solidFill>
                             <a:srgbClr val="000000"/>
                           </a:solidFill>
-                          <a:latin typeface="PingFang SC"/>
+                          <a:latin typeface="Microsoft YaHei"/>
                         </a:defRPr>
                       </a:pPr>
                       <a:r>
@@ -8497,7 +8497,7 @@
                           <a:solidFill>
                             <a:srgbClr val="000000"/>
                           </a:solidFill>
-                          <a:latin typeface="PingFang SC"/>
+                          <a:latin typeface="Microsoft YaHei"/>
                         </a:defRPr>
                       </a:pPr>
                       <a:r>
@@ -8517,7 +8517,7 @@
                           <a:solidFill>
                             <a:srgbClr val="000000"/>
                           </a:solidFill>
-                          <a:latin typeface="PingFang SC"/>
+                          <a:latin typeface="Microsoft YaHei"/>
                         </a:defRPr>
                       </a:pPr>
                       <a:r>
@@ -8539,7 +8539,7 @@
                           <a:solidFill>
                             <a:srgbClr val="000000"/>
                           </a:solidFill>
-                          <a:latin typeface="PingFang SC"/>
+                          <a:latin typeface="Microsoft YaHei"/>
                         </a:defRPr>
                       </a:pPr>
                       <a:r>
@@ -8563,7 +8563,7 @@
                           <a:solidFill>
                             <a:srgbClr val="000000"/>
                           </a:solidFill>
-                          <a:latin typeface="PingFang SC"/>
+                          <a:latin typeface="Microsoft YaHei"/>
                         </a:defRPr>
                       </a:pPr>
                       <a:r>
@@ -8587,7 +8587,7 @@
                           <a:solidFill>
                             <a:srgbClr val="000000"/>
                           </a:solidFill>
-                          <a:latin typeface="PingFang SC"/>
+                          <a:latin typeface="Microsoft YaHei"/>
                         </a:defRPr>
                       </a:pPr>
                       <a:r>
@@ -8611,7 +8611,7 @@
                           <a:solidFill>
                             <a:srgbClr val="000000"/>
                           </a:solidFill>
-                          <a:latin typeface="PingFang SC"/>
+                          <a:latin typeface="Microsoft YaHei"/>
                         </a:defRPr>
                       </a:pPr>
                       <a:r>
@@ -8637,7 +8637,7 @@
                           <a:solidFill>
                             <a:srgbClr val="000000"/>
                           </a:solidFill>
-                          <a:latin typeface="PingFang SC"/>
+                          <a:latin typeface="Microsoft YaHei"/>
                         </a:defRPr>
                       </a:pPr>
                       <a:r>
@@ -8657,7 +8657,7 @@
                           <a:solidFill>
                             <a:srgbClr val="000000"/>
                           </a:solidFill>
-                          <a:latin typeface="PingFang SC"/>
+                          <a:latin typeface="Microsoft YaHei"/>
                         </a:defRPr>
                       </a:pPr>
                       <a:r>
@@ -8677,7 +8677,7 @@
                           <a:solidFill>
                             <a:srgbClr val="000000"/>
                           </a:solidFill>
-                          <a:latin typeface="PingFang SC"/>
+                          <a:latin typeface="Microsoft YaHei"/>
                         </a:defRPr>
                       </a:pPr>
                       <a:r>
@@ -8697,7 +8697,7 @@
                           <a:solidFill>
                             <a:srgbClr val="000000"/>
                           </a:solidFill>
-                          <a:latin typeface="PingFang SC"/>
+                          <a:latin typeface="Microsoft YaHei"/>
                         </a:defRPr>
                       </a:pPr>
                       <a:r>
@@ -8719,7 +8719,7 @@
                           <a:solidFill>
                             <a:srgbClr val="000000"/>
                           </a:solidFill>
-                          <a:latin typeface="PingFang SC"/>
+                          <a:latin typeface="Microsoft YaHei"/>
                         </a:defRPr>
                       </a:pPr>
                       <a:r>
@@ -8743,7 +8743,7 @@
                           <a:solidFill>
                             <a:srgbClr val="000000"/>
                           </a:solidFill>
-                          <a:latin typeface="PingFang SC"/>
+                          <a:latin typeface="Microsoft YaHei"/>
                         </a:defRPr>
                       </a:pPr>
                       <a:r>
@@ -8767,7 +8767,7 @@
                           <a:solidFill>
                             <a:srgbClr val="000000"/>
                           </a:solidFill>
-                          <a:latin typeface="PingFang SC"/>
+                          <a:latin typeface="Microsoft YaHei"/>
                         </a:defRPr>
                       </a:pPr>
                       <a:r>
@@ -8791,7 +8791,7 @@
                           <a:solidFill>
                             <a:srgbClr val="000000"/>
                           </a:solidFill>
-                          <a:latin typeface="PingFang SC"/>
+                          <a:latin typeface="Microsoft YaHei"/>
                         </a:defRPr>
                       </a:pPr>
                       <a:r>
@@ -8817,7 +8817,7 @@
                           <a:solidFill>
                             <a:srgbClr val="000000"/>
                           </a:solidFill>
-                          <a:latin typeface="PingFang SC"/>
+                          <a:latin typeface="Microsoft YaHei"/>
                         </a:defRPr>
                       </a:pPr>
                       <a:r>
@@ -8837,7 +8837,7 @@
                           <a:solidFill>
                             <a:srgbClr val="000000"/>
                           </a:solidFill>
-                          <a:latin typeface="PingFang SC"/>
+                          <a:latin typeface="Microsoft YaHei"/>
                         </a:defRPr>
                       </a:pPr>
                       <a:r>
@@ -8857,7 +8857,7 @@
                           <a:solidFill>
                             <a:srgbClr val="000000"/>
                           </a:solidFill>
-                          <a:latin typeface="PingFang SC"/>
+                          <a:latin typeface="Microsoft YaHei"/>
                         </a:defRPr>
                       </a:pPr>
                       <a:r>
@@ -8877,7 +8877,7 @@
                           <a:solidFill>
                             <a:srgbClr val="000000"/>
                           </a:solidFill>
-                          <a:latin typeface="PingFang SC"/>
+                          <a:latin typeface="Microsoft YaHei"/>
                         </a:defRPr>
                       </a:pPr>
                       <a:r>
@@ -8899,7 +8899,7 @@
                           <a:solidFill>
                             <a:srgbClr val="000000"/>
                           </a:solidFill>
-                          <a:latin typeface="PingFang SC"/>
+                          <a:latin typeface="Microsoft YaHei"/>
                         </a:defRPr>
                       </a:pPr>
                       <a:r>
@@ -8923,7 +8923,7 @@
                           <a:solidFill>
                             <a:srgbClr val="000000"/>
                           </a:solidFill>
-                          <a:latin typeface="PingFang SC"/>
+                          <a:latin typeface="Microsoft YaHei"/>
                         </a:defRPr>
                       </a:pPr>
                       <a:r>
@@ -8947,7 +8947,7 @@
                           <a:solidFill>
                             <a:srgbClr val="000000"/>
                           </a:solidFill>
-                          <a:latin typeface="PingFang SC"/>
+                          <a:latin typeface="Microsoft YaHei"/>
                         </a:defRPr>
                       </a:pPr>
                       <a:r>
@@ -8971,7 +8971,7 @@
                           <a:solidFill>
                             <a:srgbClr val="000000"/>
                           </a:solidFill>
-                          <a:latin typeface="PingFang SC"/>
+                          <a:latin typeface="Microsoft YaHei"/>
                         </a:defRPr>
                       </a:pPr>
                       <a:r>
@@ -8997,7 +8997,7 @@
                           <a:solidFill>
                             <a:srgbClr val="000000"/>
                           </a:solidFill>
-                          <a:latin typeface="PingFang SC"/>
+                          <a:latin typeface="Microsoft YaHei"/>
                         </a:defRPr>
                       </a:pPr>
                       <a:r>
@@ -9017,7 +9017,7 @@
                           <a:solidFill>
                             <a:srgbClr val="000000"/>
                           </a:solidFill>
-                          <a:latin typeface="PingFang SC"/>
+                          <a:latin typeface="Microsoft YaHei"/>
                         </a:defRPr>
                       </a:pPr>
                       <a:r>
@@ -9037,7 +9037,7 @@
                           <a:solidFill>
                             <a:srgbClr val="000000"/>
                           </a:solidFill>
-                          <a:latin typeface="PingFang SC"/>
+                          <a:latin typeface="Microsoft YaHei"/>
                         </a:defRPr>
                       </a:pPr>
                       <a:r>
@@ -9057,7 +9057,7 @@
                           <a:solidFill>
                             <a:srgbClr val="000000"/>
                           </a:solidFill>
-                          <a:latin typeface="PingFang SC"/>
+                          <a:latin typeface="Microsoft YaHei"/>
                         </a:defRPr>
                       </a:pPr>
                       <a:r>
@@ -9099,7 +9099,7 @@
                 <a:solidFill>
                   <a:srgbClr val="000000"/>
                 </a:solidFill>
-                <a:latin typeface="PingFang SC"/>
+                <a:latin typeface="Microsoft YaHei"/>
               </a:defRPr>
               <a:lnSpc>
                 <a:spcPct val="130000"/>
@@ -9147,7 +9147,7 @@
                           <a:solidFill>
                             <a:srgbClr val="FFFFFF"/>
                           </a:solidFill>
-                          <a:latin typeface="PingFang SC"/>
+                          <a:latin typeface="Microsoft YaHei"/>
                         </a:defRPr>
                       </a:pPr>
                       <a:r>
@@ -9171,7 +9171,7 @@
                           <a:solidFill>
                             <a:srgbClr val="FFFFFF"/>
                           </a:solidFill>
-                          <a:latin typeface="PingFang SC"/>
+                          <a:latin typeface="Microsoft YaHei"/>
                         </a:defRPr>
                       </a:pPr>
                       <a:r>
@@ -9195,7 +9195,7 @@
                           <a:solidFill>
                             <a:srgbClr val="FFFFFF"/>
                           </a:solidFill>
-                          <a:latin typeface="PingFang SC"/>
+                          <a:latin typeface="Microsoft YaHei"/>
                         </a:defRPr>
                       </a:pPr>
                       <a:r>
@@ -9219,7 +9219,7 @@
                           <a:solidFill>
                             <a:srgbClr val="FFFFFF"/>
                           </a:solidFill>
-                          <a:latin typeface="PingFang SC"/>
+                          <a:latin typeface="Microsoft YaHei"/>
                         </a:defRPr>
                       </a:pPr>
                       <a:r>
@@ -9243,7 +9243,7 @@
                           <a:solidFill>
                             <a:srgbClr val="FFFFFF"/>
                           </a:solidFill>
-                          <a:latin typeface="PingFang SC"/>
+                          <a:latin typeface="Microsoft YaHei"/>
                         </a:defRPr>
                       </a:pPr>
                       <a:r>
@@ -9269,7 +9269,7 @@
                           <a:solidFill>
                             <a:srgbClr val="000000"/>
                           </a:solidFill>
-                          <a:latin typeface="PingFang SC"/>
+                          <a:latin typeface="Microsoft YaHei"/>
                         </a:defRPr>
                       </a:pPr>
                       <a:r>
@@ -9293,7 +9293,7 @@
                           <a:solidFill>
                             <a:srgbClr val="000000"/>
                           </a:solidFill>
-                          <a:latin typeface="PingFang SC"/>
+                          <a:latin typeface="Microsoft YaHei"/>
                         </a:defRPr>
                       </a:pPr>
                       <a:r>
@@ -9317,7 +9317,7 @@
                           <a:solidFill>
                             <a:srgbClr val="000000"/>
                           </a:solidFill>
-                          <a:latin typeface="PingFang SC"/>
+                          <a:latin typeface="Microsoft YaHei"/>
                         </a:defRPr>
                       </a:pPr>
                       <a:r>
@@ -9341,7 +9341,7 @@
                           <a:solidFill>
                             <a:srgbClr val="000000"/>
                           </a:solidFill>
-                          <a:latin typeface="PingFang SC"/>
+                          <a:latin typeface="Microsoft YaHei"/>
                         </a:defRPr>
                       </a:pPr>
                       <a:r>
@@ -9365,7 +9365,7 @@
                           <a:solidFill>
                             <a:srgbClr val="000000"/>
                           </a:solidFill>
-                          <a:latin typeface="PingFang SC"/>
+                          <a:latin typeface="Microsoft YaHei"/>
                         </a:defRPr>
                       </a:pPr>
                       <a:r>
@@ -9391,7 +9391,7 @@
                           <a:solidFill>
                             <a:srgbClr val="000000"/>
                           </a:solidFill>
-                          <a:latin typeface="PingFang SC"/>
+                          <a:latin typeface="Microsoft YaHei"/>
                         </a:defRPr>
                       </a:pPr>
                       <a:r>
@@ -9411,7 +9411,7 @@
                           <a:solidFill>
                             <a:srgbClr val="000000"/>
                           </a:solidFill>
-                          <a:latin typeface="PingFang SC"/>
+                          <a:latin typeface="Microsoft YaHei"/>
                         </a:defRPr>
                       </a:pPr>
                       <a:r>
@@ -9431,7 +9431,7 @@
                           <a:solidFill>
                             <a:srgbClr val="000000"/>
                           </a:solidFill>
-                          <a:latin typeface="PingFang SC"/>
+                          <a:latin typeface="Microsoft YaHei"/>
                         </a:defRPr>
                       </a:pPr>
                       <a:r>
@@ -9451,7 +9451,7 @@
                           <a:solidFill>
                             <a:srgbClr val="000000"/>
                           </a:solidFill>
-                          <a:latin typeface="PingFang SC"/>
+                          <a:latin typeface="Microsoft YaHei"/>
                         </a:defRPr>
                       </a:pPr>
                       <a:r>
@@ -9471,7 +9471,7 @@
                           <a:solidFill>
                             <a:srgbClr val="000000"/>
                           </a:solidFill>
-                          <a:latin typeface="PingFang SC"/>
+                          <a:latin typeface="Microsoft YaHei"/>
                         </a:defRPr>
                       </a:pPr>
                       <a:r>
@@ -9493,7 +9493,7 @@
                           <a:solidFill>
                             <a:srgbClr val="000000"/>
                           </a:solidFill>
-                          <a:latin typeface="PingFang SC"/>
+                          <a:latin typeface="Microsoft YaHei"/>
                         </a:defRPr>
                       </a:pPr>
                       <a:r>
@@ -9517,7 +9517,7 @@
                           <a:solidFill>
                             <a:srgbClr val="000000"/>
                           </a:solidFill>
-                          <a:latin typeface="PingFang SC"/>
+                          <a:latin typeface="Microsoft YaHei"/>
                         </a:defRPr>
                       </a:pPr>
                       <a:r>
@@ -9541,7 +9541,7 @@
                           <a:solidFill>
                             <a:srgbClr val="000000"/>
                           </a:solidFill>
-                          <a:latin typeface="PingFang SC"/>
+                          <a:latin typeface="Microsoft YaHei"/>
                         </a:defRPr>
                       </a:pPr>
                       <a:r>
@@ -9565,7 +9565,7 @@
                           <a:solidFill>
                             <a:srgbClr val="000000"/>
                           </a:solidFill>
-                          <a:latin typeface="PingFang SC"/>
+                          <a:latin typeface="Microsoft YaHei"/>
                         </a:defRPr>
                       </a:pPr>
                       <a:r>
@@ -9589,7 +9589,7 @@
                           <a:solidFill>
                             <a:srgbClr val="000000"/>
                           </a:solidFill>
-                          <a:latin typeface="PingFang SC"/>
+                          <a:latin typeface="Microsoft YaHei"/>
                         </a:defRPr>
                       </a:pPr>
                       <a:r>
@@ -9615,7 +9615,7 @@
                           <a:solidFill>
                             <a:srgbClr val="000000"/>
                           </a:solidFill>
-                          <a:latin typeface="PingFang SC"/>
+                          <a:latin typeface="Microsoft YaHei"/>
                         </a:defRPr>
                       </a:pPr>
                       <a:r>
@@ -9635,7 +9635,7 @@
                           <a:solidFill>
                             <a:srgbClr val="000000"/>
                           </a:solidFill>
-                          <a:latin typeface="PingFang SC"/>
+                          <a:latin typeface="Microsoft YaHei"/>
                         </a:defRPr>
                       </a:pPr>
                       <a:r>
@@ -9655,7 +9655,7 @@
                           <a:solidFill>
                             <a:srgbClr val="000000"/>
                           </a:solidFill>
-                          <a:latin typeface="PingFang SC"/>
+                          <a:latin typeface="Microsoft YaHei"/>
                         </a:defRPr>
                       </a:pPr>
                       <a:r>
@@ -9675,7 +9675,7 @@
                           <a:solidFill>
                             <a:srgbClr val="000000"/>
                           </a:solidFill>
-                          <a:latin typeface="PingFang SC"/>
+                          <a:latin typeface="Microsoft YaHei"/>
                         </a:defRPr>
                       </a:pPr>
                       <a:r>
@@ -9695,7 +9695,7 @@
                           <a:solidFill>
                             <a:srgbClr val="000000"/>
                           </a:solidFill>
-                          <a:latin typeface="PingFang SC"/>
+                          <a:latin typeface="Microsoft YaHei"/>
                         </a:defRPr>
                       </a:pPr>
                       <a:r>
@@ -9717,7 +9717,7 @@
                           <a:solidFill>
                             <a:srgbClr val="000000"/>
                           </a:solidFill>
-                          <a:latin typeface="PingFang SC"/>
+                          <a:latin typeface="Microsoft YaHei"/>
                         </a:defRPr>
                       </a:pPr>
                       <a:r>
@@ -9741,7 +9741,7 @@
                           <a:solidFill>
                             <a:srgbClr val="000000"/>
                           </a:solidFill>
-                          <a:latin typeface="PingFang SC"/>
+                          <a:latin typeface="Microsoft YaHei"/>
                         </a:defRPr>
                       </a:pPr>
                       <a:r>
@@ -9765,7 +9765,7 @@
                           <a:solidFill>
                             <a:srgbClr val="000000"/>
                           </a:solidFill>
-                          <a:latin typeface="PingFang SC"/>
+                          <a:latin typeface="Microsoft YaHei"/>
                         </a:defRPr>
                       </a:pPr>
                       <a:r>
@@ -9789,7 +9789,7 @@
                           <a:solidFill>
                             <a:srgbClr val="000000"/>
                           </a:solidFill>
-                          <a:latin typeface="PingFang SC"/>
+                          <a:latin typeface="Microsoft YaHei"/>
                         </a:defRPr>
                       </a:pPr>
                       <a:r>
@@ -9813,7 +9813,7 @@
                           <a:solidFill>
                             <a:srgbClr val="000000"/>
                           </a:solidFill>
-                          <a:latin typeface="PingFang SC"/>
+                          <a:latin typeface="Microsoft YaHei"/>
                         </a:defRPr>
                       </a:pPr>
                       <a:r>
@@ -9839,7 +9839,7 @@
                           <a:solidFill>
                             <a:srgbClr val="000000"/>
                           </a:solidFill>
-                          <a:latin typeface="PingFang SC"/>
+                          <a:latin typeface="Microsoft YaHei"/>
                         </a:defRPr>
                       </a:pPr>
                       <a:r>
@@ -9859,7 +9859,7 @@
                           <a:solidFill>
                             <a:srgbClr val="000000"/>
                           </a:solidFill>
-                          <a:latin typeface="PingFang SC"/>
+                          <a:latin typeface="Microsoft YaHei"/>
                         </a:defRPr>
                       </a:pPr>
                       <a:r>
@@ -9879,7 +9879,7 @@
                           <a:solidFill>
                             <a:srgbClr val="000000"/>
                           </a:solidFill>
-                          <a:latin typeface="PingFang SC"/>
+                          <a:latin typeface="Microsoft YaHei"/>
                         </a:defRPr>
                       </a:pPr>
                       <a:r>
@@ -9899,7 +9899,7 @@
                           <a:solidFill>
                             <a:srgbClr val="000000"/>
                           </a:solidFill>
-                          <a:latin typeface="PingFang SC"/>
+                          <a:latin typeface="Microsoft YaHei"/>
                         </a:defRPr>
                       </a:pPr>
                       <a:r>
@@ -9919,7 +9919,7 @@
                           <a:solidFill>
                             <a:srgbClr val="000000"/>
                           </a:solidFill>
-                          <a:latin typeface="PingFang SC"/>
+                          <a:latin typeface="Microsoft YaHei"/>
                         </a:defRPr>
                       </a:pPr>
                       <a:r>
@@ -9961,7 +9961,7 @@
                 <a:solidFill>
                   <a:srgbClr val="C7000B"/>
                 </a:solidFill>
-                <a:latin typeface="PingFang SC"/>
+                <a:latin typeface="Microsoft YaHei"/>
               </a:defRPr>
               <a:lnSpc>
                 <a:spcPct val="130000"/>
@@ -10019,7 +10019,7 @@
                 <a:solidFill>
                   <a:srgbClr val="000000"/>
                 </a:solidFill>
-                <a:latin typeface="PingFang SC"/>
+                <a:latin typeface="Microsoft YaHei"/>
               </a:defRPr>
             </a:pPr>
             <a:r>
@@ -10123,7 +10123,7 @@
                 <a:solidFill>
                   <a:srgbClr val="000000"/>
                 </a:solidFill>
-                <a:latin typeface="PingFang SC"/>
+                <a:latin typeface="Microsoft YaHei"/>
               </a:defRPr>
             </a:pPr>
             <a:r>
@@ -10227,7 +10227,7 @@
                 <a:solidFill>
                   <a:srgbClr val="000000"/>
                 </a:solidFill>
-                <a:latin typeface="PingFang SC"/>
+                <a:latin typeface="Microsoft YaHei"/>
               </a:defRPr>
             </a:pPr>
             <a:r>
@@ -10331,7 +10331,7 @@
                 <a:solidFill>
                   <a:srgbClr val="000000"/>
                 </a:solidFill>
-                <a:latin typeface="PingFang SC"/>
+                <a:latin typeface="Microsoft YaHei"/>
               </a:defRPr>
             </a:pPr>
             <a:r>
@@ -10416,7 +10416,7 @@
                 <a:solidFill>
                   <a:srgbClr val="000000"/>
                 </a:solidFill>
-                <a:latin typeface="PingFang SC"/>
+                <a:latin typeface="Microsoft YaHei"/>
               </a:defRPr>
             </a:pPr>
             <a:r>
@@ -10432,7 +10432,7 @@
                 <a:solidFill>
                   <a:srgbClr val="000000"/>
                 </a:solidFill>
-                <a:latin typeface="PingFang SC"/>
+                <a:latin typeface="Microsoft YaHei"/>
               </a:defRPr>
             </a:pPr>
             <a:r>
@@ -10468,7 +10468,7 @@
                 <a:solidFill>
                   <a:srgbClr val="999999"/>
                 </a:solidFill>
-                <a:latin typeface="PingFang SC"/>
+                <a:latin typeface="Microsoft YaHei"/>
               </a:defRPr>
               <a:lnSpc>
                 <a:spcPct val="130000"/>
@@ -10548,7 +10548,7 @@
                 <a:solidFill>
                   <a:srgbClr val="C7000B"/>
                 </a:solidFill>
-                <a:latin typeface="PingFang SC"/>
+                <a:latin typeface="Microsoft YaHei"/>
               </a:defRPr>
             </a:pPr>
             <a:r>
@@ -10584,7 +10584,7 @@
                 <a:solidFill>
                   <a:srgbClr val="666666"/>
                 </a:solidFill>
-                <a:latin typeface="PingFang SC"/>
+                <a:latin typeface="Microsoft YaHei"/>
               </a:defRPr>
             </a:pPr>
             <a:r>
@@ -10620,7 +10620,7 @@
                 <a:solidFill>
                   <a:srgbClr val="C7000B"/>
                 </a:solidFill>
-                <a:latin typeface="PingFang SC"/>
+                <a:latin typeface="Microsoft YaHei"/>
               </a:defRPr>
               <a:lnSpc>
                 <a:spcPct val="130000"/>
@@ -10704,7 +10704,7 @@
                 <a:solidFill>
                   <a:srgbClr val="000000"/>
                 </a:solidFill>
-                <a:latin typeface="PingFang SC"/>
+                <a:latin typeface="Microsoft YaHei"/>
               </a:defRPr>
               <a:lnSpc>
                 <a:spcPct val="130000"/>
@@ -10743,7 +10743,7 @@
                 <a:solidFill>
                   <a:srgbClr val="000000"/>
                 </a:solidFill>
-                <a:latin typeface="PingFang SC"/>
+                <a:latin typeface="Microsoft YaHei"/>
               </a:defRPr>
               <a:lnSpc>
                 <a:spcPct val="130000"/>
@@ -10876,7 +10876,7 @@
                 <a:solidFill>
                   <a:srgbClr val="000000"/>
                 </a:solidFill>
-                <a:latin typeface="PingFang SC"/>
+                <a:latin typeface="Microsoft YaHei"/>
               </a:defRPr>
               <a:lnSpc>
                 <a:spcPct val="130000"/>
@@ -10915,7 +10915,7 @@
                 <a:solidFill>
                   <a:srgbClr val="000000"/>
                 </a:solidFill>
-                <a:latin typeface="PingFang SC"/>
+                <a:latin typeface="Microsoft YaHei"/>
               </a:defRPr>
               <a:lnSpc>
                 <a:spcPct val="130000"/>
@@ -11003,7 +11003,7 @@
                 <a:solidFill>
                   <a:srgbClr val="000000"/>
                 </a:solidFill>
-                <a:latin typeface="PingFang SC"/>
+                <a:latin typeface="Microsoft YaHei"/>
               </a:defRPr>
               <a:lnSpc>
                 <a:spcPct val="130000"/>
@@ -11046,7 +11046,7 @@
                 <a:solidFill>
                   <a:srgbClr val="000000"/>
                 </a:solidFill>
-                <a:latin typeface="PingFang SC"/>
+                <a:latin typeface="Microsoft YaHei"/>
               </a:defRPr>
               <a:lnSpc>
                 <a:spcPct val="130000"/>
@@ -11179,7 +11179,7 @@
                 <a:solidFill>
                   <a:srgbClr val="000000"/>
                 </a:solidFill>
-                <a:latin typeface="PingFang SC"/>
+                <a:latin typeface="Microsoft YaHei"/>
               </a:defRPr>
               <a:lnSpc>
                 <a:spcPct val="130000"/>
@@ -11218,7 +11218,7 @@
                 <a:solidFill>
                   <a:srgbClr val="000000"/>
                 </a:solidFill>
-                <a:latin typeface="PingFang SC"/>
+                <a:latin typeface="Microsoft YaHei"/>
               </a:defRPr>
               <a:lnSpc>
                 <a:spcPct val="130000"/>
@@ -11306,7 +11306,7 @@
                 <a:solidFill>
                   <a:srgbClr val="000000"/>
                 </a:solidFill>
-                <a:latin typeface="PingFang SC"/>
+                <a:latin typeface="Microsoft YaHei"/>
               </a:defRPr>
               <a:lnSpc>
                 <a:spcPct val="130000"/>
@@ -11345,7 +11345,7 @@
                 <a:solidFill>
                   <a:srgbClr val="000000"/>
                 </a:solidFill>
-                <a:latin typeface="PingFang SC"/>
+                <a:latin typeface="Microsoft YaHei"/>
               </a:defRPr>
               <a:lnSpc>
                 <a:spcPct val="130000"/>
@@ -11388,7 +11388,7 @@
                 <a:solidFill>
                   <a:srgbClr val="000000"/>
                 </a:solidFill>
-                <a:latin typeface="PingFang SC"/>
+                <a:latin typeface="Microsoft YaHei"/>
               </a:defRPr>
               <a:lnSpc>
                 <a:spcPct val="130000"/>
@@ -11427,7 +11427,7 @@
                 <a:solidFill>
                   <a:srgbClr val="C7000B"/>
                 </a:solidFill>
-                <a:latin typeface="PingFang SC"/>
+                <a:latin typeface="Microsoft YaHei"/>
               </a:defRPr>
               <a:lnSpc>
                 <a:spcPct val="130000"/>
@@ -11554,7 +11554,7 @@
                 <a:solidFill>
                   <a:srgbClr val="000000"/>
                 </a:solidFill>
-                <a:latin typeface="PingFang SC"/>
+                <a:latin typeface="Microsoft YaHei"/>
               </a:defRPr>
               <a:lnSpc>
                 <a:spcPct val="130000"/>
@@ -11593,7 +11593,7 @@
                 <a:solidFill>
                   <a:srgbClr val="444444"/>
                 </a:solidFill>
-                <a:latin typeface="PingFang SC"/>
+                <a:latin typeface="Microsoft YaHei"/>
               </a:defRPr>
               <a:lnSpc>
                 <a:spcPct val="130000"/>
@@ -11720,7 +11720,7 @@
                 <a:solidFill>
                   <a:srgbClr val="000000"/>
                 </a:solidFill>
-                <a:latin typeface="PingFang SC"/>
+                <a:latin typeface="Microsoft YaHei"/>
               </a:defRPr>
               <a:lnSpc>
                 <a:spcPct val="130000"/>
@@ -11759,7 +11759,7 @@
                 <a:solidFill>
                   <a:srgbClr val="444444"/>
                 </a:solidFill>
-                <a:latin typeface="PingFang SC"/>
+                <a:latin typeface="Microsoft YaHei"/>
               </a:defRPr>
               <a:lnSpc>
                 <a:spcPct val="130000"/>
@@ -11886,7 +11886,7 @@
                 <a:solidFill>
                   <a:srgbClr val="000000"/>
                 </a:solidFill>
-                <a:latin typeface="PingFang SC"/>
+                <a:latin typeface="Microsoft YaHei"/>
               </a:defRPr>
               <a:lnSpc>
                 <a:spcPct val="130000"/>
@@ -11925,7 +11925,7 @@
                 <a:solidFill>
                   <a:srgbClr val="444444"/>
                 </a:solidFill>
-                <a:latin typeface="PingFang SC"/>
+                <a:latin typeface="Microsoft YaHei"/>
               </a:defRPr>
               <a:lnSpc>
                 <a:spcPct val="130000"/>
@@ -12052,7 +12052,7 @@
                 <a:solidFill>
                   <a:srgbClr val="000000"/>
                 </a:solidFill>
-                <a:latin typeface="PingFang SC"/>
+                <a:latin typeface="Microsoft YaHei"/>
               </a:defRPr>
               <a:lnSpc>
                 <a:spcPct val="130000"/>
@@ -12091,7 +12091,7 @@
                 <a:solidFill>
                   <a:srgbClr val="444444"/>
                 </a:solidFill>
-                <a:latin typeface="PingFang SC"/>
+                <a:latin typeface="Microsoft YaHei"/>
               </a:defRPr>
               <a:lnSpc>
                 <a:spcPct val="130000"/>
@@ -12130,7 +12130,7 @@
                 <a:solidFill>
                   <a:srgbClr val="999999"/>
                 </a:solidFill>
-                <a:latin typeface="PingFang SC"/>
+                <a:latin typeface="Microsoft YaHei"/>
               </a:defRPr>
               <a:lnSpc>
                 <a:spcPct val="130000"/>
